--- a/cours/Module TIC/Département Français/ENS 2ème année/Cours_TIC_01_Introduction_aux_TIC_FR.pptx
+++ b/cours/Module TIC/Département Français/ENS 2ème année/Cours_TIC_01_Introduction_aux_TIC_FR.pptx
@@ -4,9 +4,6 @@
   <p:sldMasterIdLst>
     <p:sldMasterId id="2147483648" r:id="rId1"/>
   </p:sldMasterIdLst>
-  <p:notesMasterIdLst>
-    <p:notesMasterId r:id="rId33"/>
-  </p:notesMasterIdLst>
   <p:sldIdLst>
     <p:sldId id="256" r:id="rId7"/>
     <p:sldId id="257" r:id="rId8"/>
@@ -18,6 +15,11 @@
     <p:sldId id="263" r:id="rId14"/>
     <p:sldId id="264" r:id="rId15"/>
     <p:sldId id="265" r:id="rId16"/>
+    <p:sldId id="266" r:id="rId17"/>
+    <p:sldId id="267" r:id="rId18"/>
+    <p:sldId id="268" r:id="rId19"/>
+    <p:sldId id="269" r:id="rId20"/>
+    <p:sldId id="270" r:id="rId21"/>
   </p:sldIdLst>
   <p:sldSz cx="9144000" cy="6858000" type="screen4x3"/>
   <p:notesSz cx="6858000" cy="9144000"/>
@@ -116,372 +118,7 @@
       </a:defRPr>
     </a:lvl9pPr>
   </p:defaultTextStyle>
-  <p:extLst>
-    <p:ext uri="{EFAFB233-063F-42B5-8137-9DF3F51BA10A}">
-      <p15:sldGuideLst xmlns:p15="http://schemas.microsoft.com/office/powerpoint/2012/main">
-        <p15:guide id="1" orient="horz" pos="2160">
-          <p15:clr>
-            <a:srgbClr val="A4A3A4"/>
-          </p15:clr>
-        </p15:guide>
-        <p15:guide id="2" pos="2880">
-          <p15:clr>
-            <a:srgbClr val="A4A3A4"/>
-          </p15:clr>
-        </p15:guide>
-      </p15:sldGuideLst>
-    </p:ext>
-  </p:extLst>
 </p:presentation>
-</file>
-
-<file path=ppt/notesMasters/notesMaster1.xml><?xml version="1.0" encoding="utf-8"?>
-<p:notesMaster xmlns:a="http://schemas.openxmlformats.org/drawingml/2006/main" xmlns:r="http://schemas.openxmlformats.org/officeDocument/2006/relationships" xmlns:p="http://schemas.openxmlformats.org/presentationml/2006/main">
-  <p:cSld>
-    <p:bg>
-      <p:bgRef idx="1001">
-        <a:schemeClr val="bg1"/>
-      </p:bgRef>
-    </p:bg>
-    <p:spTree>
-      <p:nvGrpSpPr>
-        <p:cNvPr id="1" name=""/>
-        <p:cNvGrpSpPr/>
-        <p:nvPr/>
-      </p:nvGrpSpPr>
-      <p:grpSpPr>
-        <a:xfrm>
-          <a:off x="0" y="0"/>
-          <a:ext cx="0" cy="0"/>
-          <a:chOff x="0" y="0"/>
-          <a:chExt cx="0" cy="0"/>
-        </a:xfrm>
-      </p:grpSpPr>
-      <p:sp>
-        <p:nvSpPr>
-          <p:cNvPr id="2" name="Espace réservé de l'en-tête 1"/>
-          <p:cNvSpPr>
-            <a:spLocks noGrp="1"/>
-          </p:cNvSpPr>
-          <p:nvPr>
-            <p:ph type="hdr" sz="quarter"/>
-          </p:nvPr>
-        </p:nvSpPr>
-        <p:spPr>
-          <a:xfrm>
-            <a:off x="0" y="0"/>
-            <a:ext cx="2971800" cy="458788"/>
-          </a:xfrm>
-          <a:prstGeom prst="rect">
-            <a:avLst/>
-          </a:prstGeom>
-        </p:spPr>
-        <p:txBody>
-          <a:bodyPr vert="horz" lIns="91440" tIns="45720" rIns="91440" bIns="45720" rtlCol="0"/>
-          <a:lstStyle>
-            <a:lvl1pPr algn="l">
-              <a:defRPr sz="1200"/>
-            </a:lvl1pPr>
-          </a:lstStyle>
-          <a:p>
-            <a:endParaRPr lang="fr-FR"/>
-          </a:p>
-        </p:txBody>
-      </p:sp>
-      <p:sp>
-        <p:nvSpPr>
-          <p:cNvPr id="3" name="Espace réservé de la date 2"/>
-          <p:cNvSpPr>
-            <a:spLocks noGrp="1"/>
-          </p:cNvSpPr>
-          <p:nvPr>
-            <p:ph type="dt" idx="1"/>
-          </p:nvPr>
-        </p:nvSpPr>
-        <p:spPr>
-          <a:xfrm>
-            <a:off x="3884613" y="0"/>
-            <a:ext cx="2971800" cy="458788"/>
-          </a:xfrm>
-          <a:prstGeom prst="rect">
-            <a:avLst/>
-          </a:prstGeom>
-        </p:spPr>
-        <p:txBody>
-          <a:bodyPr vert="horz" lIns="91440" tIns="45720" rIns="91440" bIns="45720" rtlCol="0"/>
-          <a:lstStyle>
-            <a:lvl1pPr algn="r">
-              <a:defRPr sz="1200"/>
-            </a:lvl1pPr>
-          </a:lstStyle>
-          <a:p>
-            <a:fld id="{B8F0B2C1-4194-45A7-9834-731A4F36BABD}" type="datetimeFigureOut">
-              <a:rPr lang="fr-FR" smtClean="0"/>
-              <a:t>16/05/2026</a:t>
-            </a:fld>
-            <a:endParaRPr lang="fr-FR"/>
-          </a:p>
-        </p:txBody>
-      </p:sp>
-      <p:sp>
-        <p:nvSpPr>
-          <p:cNvPr id="4" name="Espace réservé de l'image des diapositives 3"/>
-          <p:cNvSpPr>
-            <a:spLocks noGrp="1" noRot="1" noChangeAspect="1"/>
-          </p:cNvSpPr>
-          <p:nvPr>
-            <p:ph type="sldImg" idx="2"/>
-          </p:nvPr>
-        </p:nvSpPr>
-        <p:spPr>
-          <a:xfrm>
-            <a:off x="1371600" y="1143000"/>
-            <a:ext cx="4114800" cy="3086100"/>
-          </a:xfrm>
-          <a:prstGeom prst="rect">
-            <a:avLst/>
-          </a:prstGeom>
-          <a:noFill/>
-          <a:ln w="12700">
-            <a:solidFill>
-              <a:prstClr val="black"/>
-            </a:solidFill>
-          </a:ln>
-        </p:spPr>
-        <p:txBody>
-          <a:bodyPr vert="horz" lIns="91440" tIns="45720" rIns="91440" bIns="45720" rtlCol="0" anchor="ctr"/>
-          <a:lstStyle/>
-          <a:p>
-            <a:endParaRPr lang="fr-FR"/>
-          </a:p>
-        </p:txBody>
-      </p:sp>
-      <p:sp>
-        <p:nvSpPr>
-          <p:cNvPr id="5" name="Espace réservé des notes 4"/>
-          <p:cNvSpPr>
-            <a:spLocks noGrp="1"/>
-          </p:cNvSpPr>
-          <p:nvPr>
-            <p:ph type="body" sz="quarter" idx="3"/>
-          </p:nvPr>
-        </p:nvSpPr>
-        <p:spPr>
-          <a:xfrm>
-            <a:off x="685800" y="4400550"/>
-            <a:ext cx="5486400" cy="3600450"/>
-          </a:xfrm>
-          <a:prstGeom prst="rect">
-            <a:avLst/>
-          </a:prstGeom>
-        </p:spPr>
-        <p:txBody>
-          <a:bodyPr vert="horz" lIns="91440" tIns="45720" rIns="91440" bIns="45720" rtlCol="0"/>
-          <a:lstStyle/>
-          <a:p>
-            <a:pPr lvl="0"/>
-            <a:r>
-              <a:rPr lang="fr-FR"/>
-              <a:t>Cliquez pour modifier les styles du texte du masque</a:t>
-            </a:r>
-          </a:p>
-          <a:p>
-            <a:pPr lvl="1"/>
-            <a:r>
-              <a:rPr lang="fr-FR"/>
-              <a:t>Deuxième niveau</a:t>
-            </a:r>
-          </a:p>
-          <a:p>
-            <a:pPr lvl="2"/>
-            <a:r>
-              <a:rPr lang="fr-FR"/>
-              <a:t>Troisième niveau</a:t>
-            </a:r>
-          </a:p>
-          <a:p>
-            <a:pPr lvl="3"/>
-            <a:r>
-              <a:rPr lang="fr-FR"/>
-              <a:t>Quatrième niveau</a:t>
-            </a:r>
-          </a:p>
-          <a:p>
-            <a:pPr lvl="4"/>
-            <a:r>
-              <a:rPr lang="fr-FR"/>
-              <a:t>Cinquième niveau</a:t>
-            </a:r>
-          </a:p>
-        </p:txBody>
-      </p:sp>
-      <p:sp>
-        <p:nvSpPr>
-          <p:cNvPr id="6" name="Espace réservé du pied de page 5"/>
-          <p:cNvSpPr>
-            <a:spLocks noGrp="1"/>
-          </p:cNvSpPr>
-          <p:nvPr>
-            <p:ph type="ftr" sz="quarter" idx="4"/>
-          </p:nvPr>
-        </p:nvSpPr>
-        <p:spPr>
-          <a:xfrm>
-            <a:off x="0" y="8685213"/>
-            <a:ext cx="2971800" cy="458787"/>
-          </a:xfrm>
-          <a:prstGeom prst="rect">
-            <a:avLst/>
-          </a:prstGeom>
-        </p:spPr>
-        <p:txBody>
-          <a:bodyPr vert="horz" lIns="91440" tIns="45720" rIns="91440" bIns="45720" rtlCol="0" anchor="b"/>
-          <a:lstStyle>
-            <a:lvl1pPr algn="l">
-              <a:defRPr sz="1200"/>
-            </a:lvl1pPr>
-          </a:lstStyle>
-          <a:p>
-            <a:endParaRPr lang="fr-FR"/>
-          </a:p>
-        </p:txBody>
-      </p:sp>
-      <p:sp>
-        <p:nvSpPr>
-          <p:cNvPr id="7" name="Espace réservé du numéro de diapositive 6"/>
-          <p:cNvSpPr>
-            <a:spLocks noGrp="1"/>
-          </p:cNvSpPr>
-          <p:nvPr>
-            <p:ph type="sldNum" sz="quarter" idx="5"/>
-          </p:nvPr>
-        </p:nvSpPr>
-        <p:spPr>
-          <a:xfrm>
-            <a:off x="3884613" y="8685213"/>
-            <a:ext cx="2971800" cy="458787"/>
-          </a:xfrm>
-          <a:prstGeom prst="rect">
-            <a:avLst/>
-          </a:prstGeom>
-        </p:spPr>
-        <p:txBody>
-          <a:bodyPr vert="horz" lIns="91440" tIns="45720" rIns="91440" bIns="45720" rtlCol="0" anchor="b"/>
-          <a:lstStyle>
-            <a:lvl1pPr algn="r">
-              <a:defRPr sz="1200"/>
-            </a:lvl1pPr>
-          </a:lstStyle>
-          <a:p>
-            <a:fld id="{EDB5666F-E79B-4A29-9A64-FA4855FAABBD}" type="slidenum">
-              <a:rPr lang="fr-FR" smtClean="0"/>
-              <a:t>‹N°›</a:t>
-            </a:fld>
-            <a:endParaRPr lang="fr-FR"/>
-          </a:p>
-        </p:txBody>
-      </p:sp>
-    </p:spTree>
-    <p:extLst>
-      <p:ext uri="{BB962C8B-B14F-4D97-AF65-F5344CB8AC3E}">
-        <p14:creationId xmlns:p14="http://schemas.microsoft.com/office/powerpoint/2010/main" val="4057233482"/>
-      </p:ext>
-    </p:extLst>
-  </p:cSld>
-  <p:clrMap bg1="lt1" tx1="dk1" bg2="lt2" tx2="dk2" accent1="accent1" accent2="accent2" accent3="accent3" accent4="accent4" accent5="accent5" accent6="accent6" hlink="hlink" folHlink="folHlink"/>
-  <p:notesStyle>
-    <a:lvl1pPr marL="0" algn="l" defTabSz="914400" rtl="0" eaLnBrk="1" latinLnBrk="0" hangingPunct="1">
-      <a:defRPr sz="1200" kern="1200">
-        <a:solidFill>
-          <a:schemeClr val="tx1"/>
-        </a:solidFill>
-        <a:latin typeface="+mn-lt"/>
-        <a:ea typeface="+mn-ea"/>
-        <a:cs typeface="+mn-cs"/>
-      </a:defRPr>
-    </a:lvl1pPr>
-    <a:lvl2pPr marL="457200" algn="l" defTabSz="914400" rtl="0" eaLnBrk="1" latinLnBrk="0" hangingPunct="1">
-      <a:defRPr sz="1200" kern="1200">
-        <a:solidFill>
-          <a:schemeClr val="tx1"/>
-        </a:solidFill>
-        <a:latin typeface="+mn-lt"/>
-        <a:ea typeface="+mn-ea"/>
-        <a:cs typeface="+mn-cs"/>
-      </a:defRPr>
-    </a:lvl2pPr>
-    <a:lvl3pPr marL="914400" algn="l" defTabSz="914400" rtl="0" eaLnBrk="1" latinLnBrk="0" hangingPunct="1">
-      <a:defRPr sz="1200" kern="1200">
-        <a:solidFill>
-          <a:schemeClr val="tx1"/>
-        </a:solidFill>
-        <a:latin typeface="+mn-lt"/>
-        <a:ea typeface="+mn-ea"/>
-        <a:cs typeface="+mn-cs"/>
-      </a:defRPr>
-    </a:lvl3pPr>
-    <a:lvl4pPr marL="1371600" algn="l" defTabSz="914400" rtl="0" eaLnBrk="1" latinLnBrk="0" hangingPunct="1">
-      <a:defRPr sz="1200" kern="1200">
-        <a:solidFill>
-          <a:schemeClr val="tx1"/>
-        </a:solidFill>
-        <a:latin typeface="+mn-lt"/>
-        <a:ea typeface="+mn-ea"/>
-        <a:cs typeface="+mn-cs"/>
-      </a:defRPr>
-    </a:lvl4pPr>
-    <a:lvl5pPr marL="1828800" algn="l" defTabSz="914400" rtl="0" eaLnBrk="1" latinLnBrk="0" hangingPunct="1">
-      <a:defRPr sz="1200" kern="1200">
-        <a:solidFill>
-          <a:schemeClr val="tx1"/>
-        </a:solidFill>
-        <a:latin typeface="+mn-lt"/>
-        <a:ea typeface="+mn-ea"/>
-        <a:cs typeface="+mn-cs"/>
-      </a:defRPr>
-    </a:lvl5pPr>
-    <a:lvl6pPr marL="2286000" algn="l" defTabSz="914400" rtl="0" eaLnBrk="1" latinLnBrk="0" hangingPunct="1">
-      <a:defRPr sz="1200" kern="1200">
-        <a:solidFill>
-          <a:schemeClr val="tx1"/>
-        </a:solidFill>
-        <a:latin typeface="+mn-lt"/>
-        <a:ea typeface="+mn-ea"/>
-        <a:cs typeface="+mn-cs"/>
-      </a:defRPr>
-    </a:lvl6pPr>
-    <a:lvl7pPr marL="2743200" algn="l" defTabSz="914400" rtl="0" eaLnBrk="1" latinLnBrk="0" hangingPunct="1">
-      <a:defRPr sz="1200" kern="1200">
-        <a:solidFill>
-          <a:schemeClr val="tx1"/>
-        </a:solidFill>
-        <a:latin typeface="+mn-lt"/>
-        <a:ea typeface="+mn-ea"/>
-        <a:cs typeface="+mn-cs"/>
-      </a:defRPr>
-    </a:lvl7pPr>
-    <a:lvl8pPr marL="3200400" algn="l" defTabSz="914400" rtl="0" eaLnBrk="1" latinLnBrk="0" hangingPunct="1">
-      <a:defRPr sz="1200" kern="1200">
-        <a:solidFill>
-          <a:schemeClr val="tx1"/>
-        </a:solidFill>
-        <a:latin typeface="+mn-lt"/>
-        <a:ea typeface="+mn-ea"/>
-        <a:cs typeface="+mn-cs"/>
-      </a:defRPr>
-    </a:lvl8pPr>
-    <a:lvl9pPr marL="3657600" algn="l" defTabSz="914400" rtl="0" eaLnBrk="1" latinLnBrk="0" hangingPunct="1">
-      <a:defRPr sz="1200" kern="1200">
-        <a:solidFill>
-          <a:schemeClr val="tx1"/>
-        </a:solidFill>
-        <a:latin typeface="+mn-lt"/>
-        <a:ea typeface="+mn-ea"/>
-        <a:cs typeface="+mn-cs"/>
-      </a:defRPr>
-    </a:lvl9pPr>
-  </p:notesStyle>
-</p:notesMaster>
 </file>
 
 <file path=ppt/slideLayouts/slideLayout1.xml><?xml version="1.0" encoding="utf-8"?>
@@ -522,9 +159,10 @@
           <a:lstStyle/>
           <a:p>
             <a:r>
-              <a:rPr lang="en-US"/>
+              <a:rPr lang="en-US" smtClean="0"/>
               <a:t>Click to edit Master title style</a:t>
             </a:r>
+            <a:endParaRPr lang="en-US"/>
           </a:p>
         </p:txBody>
       </p:sp>
@@ -640,9 +278,10 @@
           </a:lstStyle>
           <a:p>
             <a:r>
-              <a:rPr lang="en-US"/>
+              <a:rPr lang="en-US" smtClean="0"/>
               <a:t>Click to edit Master subtitle style</a:t>
             </a:r>
+            <a:endParaRPr lang="en-US"/>
           </a:p>
         </p:txBody>
       </p:sp>
@@ -663,7 +302,7 @@
           <a:p>
             <a:fld id="{5BCAD085-E8A6-8845-BD4E-CB4CCA059FC4}" type="datetimeFigureOut">
               <a:rPr lang="en-US" smtClean="0"/>
-              <a:t>5/16/2026</a:t>
+              <a:t>1/27/13</a:t>
             </a:fld>
             <a:endParaRPr lang="en-US"/>
           </a:p>
@@ -705,7 +344,7 @@
           <a:p>
             <a:fld id="{C1FF6DA9-008F-8B48-92A6-B652298478BF}" type="slidenum">
               <a:rPr lang="en-US" smtClean="0"/>
-              <a:t>‹N°›</a:t>
+              <a:t>‹#›</a:t>
             </a:fld>
             <a:endParaRPr lang="en-US"/>
           </a:p>
@@ -757,9 +396,10 @@
           <a:lstStyle/>
           <a:p>
             <a:r>
-              <a:rPr lang="en-US"/>
+              <a:rPr lang="en-US" smtClean="0"/>
               <a:t>Click to edit Master title style</a:t>
             </a:r>
+            <a:endParaRPr lang="en-US"/>
           </a:p>
         </p:txBody>
       </p:sp>
@@ -780,37 +420,38 @@
           <a:p>
             <a:pPr lvl="0"/>
             <a:r>
-              <a:rPr lang="en-US"/>
+              <a:rPr lang="en-US" smtClean="0"/>
               <a:t>Click to edit Master text styles</a:t>
             </a:r>
           </a:p>
           <a:p>
             <a:pPr lvl="1"/>
             <a:r>
-              <a:rPr lang="en-US"/>
+              <a:rPr lang="en-US" smtClean="0"/>
               <a:t>Second level</a:t>
             </a:r>
           </a:p>
           <a:p>
             <a:pPr lvl="2"/>
             <a:r>
-              <a:rPr lang="en-US"/>
+              <a:rPr lang="en-US" smtClean="0"/>
               <a:t>Third level</a:t>
             </a:r>
           </a:p>
           <a:p>
             <a:pPr lvl="3"/>
             <a:r>
-              <a:rPr lang="en-US"/>
+              <a:rPr lang="en-US" smtClean="0"/>
               <a:t>Fourth level</a:t>
             </a:r>
           </a:p>
           <a:p>
             <a:pPr lvl="4"/>
             <a:r>
-              <a:rPr lang="en-US"/>
+              <a:rPr lang="en-US" smtClean="0"/>
               <a:t>Fifth level</a:t>
             </a:r>
+            <a:endParaRPr lang="en-US"/>
           </a:p>
         </p:txBody>
       </p:sp>
@@ -831,7 +472,7 @@
           <a:p>
             <a:fld id="{5BCAD085-E8A6-8845-BD4E-CB4CCA059FC4}" type="datetimeFigureOut">
               <a:rPr lang="en-US" smtClean="0"/>
-              <a:t>5/16/2026</a:t>
+              <a:t>1/27/13</a:t>
             </a:fld>
             <a:endParaRPr lang="en-US"/>
           </a:p>
@@ -873,7 +514,7 @@
           <a:p>
             <a:fld id="{C1FF6DA9-008F-8B48-92A6-B652298478BF}" type="slidenum">
               <a:rPr lang="en-US" smtClean="0"/>
-              <a:t>‹N°›</a:t>
+              <a:t>‹#›</a:t>
             </a:fld>
             <a:endParaRPr lang="en-US"/>
           </a:p>
@@ -930,9 +571,10 @@
           <a:lstStyle/>
           <a:p>
             <a:r>
-              <a:rPr lang="en-US"/>
+              <a:rPr lang="en-US" smtClean="0"/>
               <a:t>Click to edit Master title style</a:t>
             </a:r>
+            <a:endParaRPr lang="en-US"/>
           </a:p>
         </p:txBody>
       </p:sp>
@@ -958,37 +600,38 @@
           <a:p>
             <a:pPr lvl="0"/>
             <a:r>
-              <a:rPr lang="en-US"/>
+              <a:rPr lang="en-US" smtClean="0"/>
               <a:t>Click to edit Master text styles</a:t>
             </a:r>
           </a:p>
           <a:p>
             <a:pPr lvl="1"/>
             <a:r>
-              <a:rPr lang="en-US"/>
+              <a:rPr lang="en-US" smtClean="0"/>
               <a:t>Second level</a:t>
             </a:r>
           </a:p>
           <a:p>
             <a:pPr lvl="2"/>
             <a:r>
-              <a:rPr lang="en-US"/>
+              <a:rPr lang="en-US" smtClean="0"/>
               <a:t>Third level</a:t>
             </a:r>
           </a:p>
           <a:p>
             <a:pPr lvl="3"/>
             <a:r>
-              <a:rPr lang="en-US"/>
+              <a:rPr lang="en-US" smtClean="0"/>
               <a:t>Fourth level</a:t>
             </a:r>
           </a:p>
           <a:p>
             <a:pPr lvl="4"/>
             <a:r>
-              <a:rPr lang="en-US"/>
+              <a:rPr lang="en-US" smtClean="0"/>
               <a:t>Fifth level</a:t>
             </a:r>
+            <a:endParaRPr lang="en-US"/>
           </a:p>
         </p:txBody>
       </p:sp>
@@ -1009,7 +652,7 @@
           <a:p>
             <a:fld id="{5BCAD085-E8A6-8845-BD4E-CB4CCA059FC4}" type="datetimeFigureOut">
               <a:rPr lang="en-US" smtClean="0"/>
-              <a:t>5/16/2026</a:t>
+              <a:t>1/27/13</a:t>
             </a:fld>
             <a:endParaRPr lang="en-US"/>
           </a:p>
@@ -1051,7 +694,7 @@
           <a:p>
             <a:fld id="{C1FF6DA9-008F-8B48-92A6-B652298478BF}" type="slidenum">
               <a:rPr lang="en-US" smtClean="0"/>
-              <a:t>‹N°›</a:t>
+              <a:t>‹#›</a:t>
             </a:fld>
             <a:endParaRPr lang="en-US"/>
           </a:p>
@@ -1103,9 +746,10 @@
           <a:lstStyle/>
           <a:p>
             <a:r>
-              <a:rPr lang="en-US"/>
+              <a:rPr lang="en-US" smtClean="0"/>
               <a:t>Click to edit Master title style</a:t>
             </a:r>
+            <a:endParaRPr lang="en-US"/>
           </a:p>
         </p:txBody>
       </p:sp>
@@ -1126,37 +770,38 @@
           <a:p>
             <a:pPr lvl="0"/>
             <a:r>
-              <a:rPr lang="en-US"/>
+              <a:rPr lang="en-US" smtClean="0"/>
               <a:t>Click to edit Master text styles</a:t>
             </a:r>
           </a:p>
           <a:p>
             <a:pPr lvl="1"/>
             <a:r>
-              <a:rPr lang="en-US"/>
+              <a:rPr lang="en-US" smtClean="0"/>
               <a:t>Second level</a:t>
             </a:r>
           </a:p>
           <a:p>
             <a:pPr lvl="2"/>
             <a:r>
-              <a:rPr lang="en-US"/>
+              <a:rPr lang="en-US" smtClean="0"/>
               <a:t>Third level</a:t>
             </a:r>
           </a:p>
           <a:p>
             <a:pPr lvl="3"/>
             <a:r>
-              <a:rPr lang="en-US"/>
+              <a:rPr lang="en-US" smtClean="0"/>
               <a:t>Fourth level</a:t>
             </a:r>
           </a:p>
           <a:p>
             <a:pPr lvl="4"/>
             <a:r>
-              <a:rPr lang="en-US"/>
+              <a:rPr lang="en-US" smtClean="0"/>
               <a:t>Fifth level</a:t>
             </a:r>
+            <a:endParaRPr lang="en-US"/>
           </a:p>
         </p:txBody>
       </p:sp>
@@ -1177,7 +822,7 @@
           <a:p>
             <a:fld id="{5BCAD085-E8A6-8845-BD4E-CB4CCA059FC4}" type="datetimeFigureOut">
               <a:rPr lang="en-US" smtClean="0"/>
-              <a:t>5/16/2026</a:t>
+              <a:t>1/27/13</a:t>
             </a:fld>
             <a:endParaRPr lang="en-US"/>
           </a:p>
@@ -1219,7 +864,7 @@
           <a:p>
             <a:fld id="{C1FF6DA9-008F-8B48-92A6-B652298478BF}" type="slidenum">
               <a:rPr lang="en-US" smtClean="0"/>
-              <a:t>‹N°›</a:t>
+              <a:t>‹#›</a:t>
             </a:fld>
             <a:endParaRPr lang="en-US"/>
           </a:p>
@@ -1280,9 +925,10 @@
           </a:lstStyle>
           <a:p>
             <a:r>
-              <a:rPr lang="en-US"/>
+              <a:rPr lang="en-US" smtClean="0"/>
               <a:t>Click to edit Master title style</a:t>
             </a:r>
+            <a:endParaRPr lang="en-US"/>
           </a:p>
         </p:txBody>
       </p:sp>
@@ -1399,7 +1045,7 @@
           <a:p>
             <a:pPr lvl="0"/>
             <a:r>
-              <a:rPr lang="en-US"/>
+              <a:rPr lang="en-US" smtClean="0"/>
               <a:t>Click to edit Master text styles</a:t>
             </a:r>
           </a:p>
@@ -1422,7 +1068,7 @@
           <a:p>
             <a:fld id="{5BCAD085-E8A6-8845-BD4E-CB4CCA059FC4}" type="datetimeFigureOut">
               <a:rPr lang="en-US" smtClean="0"/>
-              <a:t>5/16/2026</a:t>
+              <a:t>1/27/13</a:t>
             </a:fld>
             <a:endParaRPr lang="en-US"/>
           </a:p>
@@ -1464,7 +1110,7 @@
           <a:p>
             <a:fld id="{C1FF6DA9-008F-8B48-92A6-B652298478BF}" type="slidenum">
               <a:rPr lang="en-US" smtClean="0"/>
-              <a:t>‹N°›</a:t>
+              <a:t>‹#›</a:t>
             </a:fld>
             <a:endParaRPr lang="en-US"/>
           </a:p>
@@ -1516,9 +1162,10 @@
           <a:lstStyle/>
           <a:p>
             <a:r>
-              <a:rPr lang="en-US"/>
+              <a:rPr lang="en-US" smtClean="0"/>
               <a:t>Click to edit Master title style</a:t>
             </a:r>
+            <a:endParaRPr lang="en-US"/>
           </a:p>
         </p:txBody>
       </p:sp>
@@ -1572,37 +1219,38 @@
           <a:p>
             <a:pPr lvl="0"/>
             <a:r>
-              <a:rPr lang="en-US"/>
+              <a:rPr lang="en-US" smtClean="0"/>
               <a:t>Click to edit Master text styles</a:t>
             </a:r>
           </a:p>
           <a:p>
             <a:pPr lvl="1"/>
             <a:r>
-              <a:rPr lang="en-US"/>
+              <a:rPr lang="en-US" smtClean="0"/>
               <a:t>Second level</a:t>
             </a:r>
           </a:p>
           <a:p>
             <a:pPr lvl="2"/>
             <a:r>
-              <a:rPr lang="en-US"/>
+              <a:rPr lang="en-US" smtClean="0"/>
               <a:t>Third level</a:t>
             </a:r>
           </a:p>
           <a:p>
             <a:pPr lvl="3"/>
             <a:r>
-              <a:rPr lang="en-US"/>
+              <a:rPr lang="en-US" smtClean="0"/>
               <a:t>Fourth level</a:t>
             </a:r>
           </a:p>
           <a:p>
             <a:pPr lvl="4"/>
             <a:r>
-              <a:rPr lang="en-US"/>
+              <a:rPr lang="en-US" smtClean="0"/>
               <a:t>Fifth level</a:t>
             </a:r>
+            <a:endParaRPr lang="en-US"/>
           </a:p>
         </p:txBody>
       </p:sp>
@@ -1656,37 +1304,38 @@
           <a:p>
             <a:pPr lvl="0"/>
             <a:r>
-              <a:rPr lang="en-US"/>
+              <a:rPr lang="en-US" smtClean="0"/>
               <a:t>Click to edit Master text styles</a:t>
             </a:r>
           </a:p>
           <a:p>
             <a:pPr lvl="1"/>
             <a:r>
-              <a:rPr lang="en-US"/>
+              <a:rPr lang="en-US" smtClean="0"/>
               <a:t>Second level</a:t>
             </a:r>
           </a:p>
           <a:p>
             <a:pPr lvl="2"/>
             <a:r>
-              <a:rPr lang="en-US"/>
+              <a:rPr lang="en-US" smtClean="0"/>
               <a:t>Third level</a:t>
             </a:r>
           </a:p>
           <a:p>
             <a:pPr lvl="3"/>
             <a:r>
-              <a:rPr lang="en-US"/>
+              <a:rPr lang="en-US" smtClean="0"/>
               <a:t>Fourth level</a:t>
             </a:r>
           </a:p>
           <a:p>
             <a:pPr lvl="4"/>
             <a:r>
-              <a:rPr lang="en-US"/>
+              <a:rPr lang="en-US" smtClean="0"/>
               <a:t>Fifth level</a:t>
             </a:r>
+            <a:endParaRPr lang="en-US"/>
           </a:p>
         </p:txBody>
       </p:sp>
@@ -1707,7 +1356,7 @@
           <a:p>
             <a:fld id="{5BCAD085-E8A6-8845-BD4E-CB4CCA059FC4}" type="datetimeFigureOut">
               <a:rPr lang="en-US" smtClean="0"/>
-              <a:t>5/16/2026</a:t>
+              <a:t>1/27/13</a:t>
             </a:fld>
             <a:endParaRPr lang="en-US"/>
           </a:p>
@@ -1749,7 +1398,7 @@
           <a:p>
             <a:fld id="{C1FF6DA9-008F-8B48-92A6-B652298478BF}" type="slidenum">
               <a:rPr lang="en-US" smtClean="0"/>
-              <a:t>‹N°›</a:t>
+              <a:t>‹#›</a:t>
             </a:fld>
             <a:endParaRPr lang="en-US"/>
           </a:p>
@@ -1805,9 +1454,10 @@
           </a:lstStyle>
           <a:p>
             <a:r>
-              <a:rPr lang="en-US"/>
+              <a:rPr lang="en-US" smtClean="0"/>
               <a:t>Click to edit Master title style</a:t>
             </a:r>
+            <a:endParaRPr lang="en-US"/>
           </a:p>
         </p:txBody>
       </p:sp>
@@ -1870,7 +1520,7 @@
           <a:p>
             <a:pPr lvl="0"/>
             <a:r>
-              <a:rPr lang="en-US"/>
+              <a:rPr lang="en-US" smtClean="0"/>
               <a:t>Click to edit Master text styles</a:t>
             </a:r>
           </a:p>
@@ -1926,37 +1576,38 @@
           <a:p>
             <a:pPr lvl="0"/>
             <a:r>
-              <a:rPr lang="en-US"/>
+              <a:rPr lang="en-US" smtClean="0"/>
               <a:t>Click to edit Master text styles</a:t>
             </a:r>
           </a:p>
           <a:p>
             <a:pPr lvl="1"/>
             <a:r>
-              <a:rPr lang="en-US"/>
+              <a:rPr lang="en-US" smtClean="0"/>
               <a:t>Second level</a:t>
             </a:r>
           </a:p>
           <a:p>
             <a:pPr lvl="2"/>
             <a:r>
-              <a:rPr lang="en-US"/>
+              <a:rPr lang="en-US" smtClean="0"/>
               <a:t>Third level</a:t>
             </a:r>
           </a:p>
           <a:p>
             <a:pPr lvl="3"/>
             <a:r>
-              <a:rPr lang="en-US"/>
+              <a:rPr lang="en-US" smtClean="0"/>
               <a:t>Fourth level</a:t>
             </a:r>
           </a:p>
           <a:p>
             <a:pPr lvl="4"/>
             <a:r>
-              <a:rPr lang="en-US"/>
+              <a:rPr lang="en-US" smtClean="0"/>
               <a:t>Fifth level</a:t>
             </a:r>
+            <a:endParaRPr lang="en-US"/>
           </a:p>
         </p:txBody>
       </p:sp>
@@ -2019,7 +1670,7 @@
           <a:p>
             <a:pPr lvl="0"/>
             <a:r>
-              <a:rPr lang="en-US"/>
+              <a:rPr lang="en-US" smtClean="0"/>
               <a:t>Click to edit Master text styles</a:t>
             </a:r>
           </a:p>
@@ -2075,37 +1726,38 @@
           <a:p>
             <a:pPr lvl="0"/>
             <a:r>
-              <a:rPr lang="en-US"/>
+              <a:rPr lang="en-US" smtClean="0"/>
               <a:t>Click to edit Master text styles</a:t>
             </a:r>
           </a:p>
           <a:p>
             <a:pPr lvl="1"/>
             <a:r>
-              <a:rPr lang="en-US"/>
+              <a:rPr lang="en-US" smtClean="0"/>
               <a:t>Second level</a:t>
             </a:r>
           </a:p>
           <a:p>
             <a:pPr lvl="2"/>
             <a:r>
-              <a:rPr lang="en-US"/>
+              <a:rPr lang="en-US" smtClean="0"/>
               <a:t>Third level</a:t>
             </a:r>
           </a:p>
           <a:p>
             <a:pPr lvl="3"/>
             <a:r>
-              <a:rPr lang="en-US"/>
+              <a:rPr lang="en-US" smtClean="0"/>
               <a:t>Fourth level</a:t>
             </a:r>
           </a:p>
           <a:p>
             <a:pPr lvl="4"/>
             <a:r>
-              <a:rPr lang="en-US"/>
+              <a:rPr lang="en-US" smtClean="0"/>
               <a:t>Fifth level</a:t>
             </a:r>
+            <a:endParaRPr lang="en-US"/>
           </a:p>
         </p:txBody>
       </p:sp>
@@ -2126,7 +1778,7 @@
           <a:p>
             <a:fld id="{5BCAD085-E8A6-8845-BD4E-CB4CCA059FC4}" type="datetimeFigureOut">
               <a:rPr lang="en-US" smtClean="0"/>
-              <a:t>5/16/2026</a:t>
+              <a:t>1/27/13</a:t>
             </a:fld>
             <a:endParaRPr lang="en-US"/>
           </a:p>
@@ -2168,7 +1820,7 @@
           <a:p>
             <a:fld id="{C1FF6DA9-008F-8B48-92A6-B652298478BF}" type="slidenum">
               <a:rPr lang="en-US" smtClean="0"/>
-              <a:t>‹N°›</a:t>
+              <a:t>‹#›</a:t>
             </a:fld>
             <a:endParaRPr lang="en-US"/>
           </a:p>
@@ -2220,9 +1872,10 @@
           <a:lstStyle/>
           <a:p>
             <a:r>
-              <a:rPr lang="en-US"/>
+              <a:rPr lang="en-US" smtClean="0"/>
               <a:t>Click to edit Master title style</a:t>
             </a:r>
+            <a:endParaRPr lang="en-US"/>
           </a:p>
         </p:txBody>
       </p:sp>
@@ -2243,7 +1896,7 @@
           <a:p>
             <a:fld id="{5BCAD085-E8A6-8845-BD4E-CB4CCA059FC4}" type="datetimeFigureOut">
               <a:rPr lang="en-US" smtClean="0"/>
-              <a:t>5/16/2026</a:t>
+              <a:t>1/27/13</a:t>
             </a:fld>
             <a:endParaRPr lang="en-US"/>
           </a:p>
@@ -2285,7 +1938,7 @@
           <a:p>
             <a:fld id="{C1FF6DA9-008F-8B48-92A6-B652298478BF}" type="slidenum">
               <a:rPr lang="en-US" smtClean="0"/>
-              <a:t>‹N°›</a:t>
+              <a:t>‹#›</a:t>
             </a:fld>
             <a:endParaRPr lang="en-US"/>
           </a:p>
@@ -2338,7 +1991,7 @@
           <a:p>
             <a:fld id="{5BCAD085-E8A6-8845-BD4E-CB4CCA059FC4}" type="datetimeFigureOut">
               <a:rPr lang="en-US" smtClean="0"/>
-              <a:t>5/16/2026</a:t>
+              <a:t>1/27/13</a:t>
             </a:fld>
             <a:endParaRPr lang="en-US"/>
           </a:p>
@@ -2380,7 +2033,7 @@
           <a:p>
             <a:fld id="{C1FF6DA9-008F-8B48-92A6-B652298478BF}" type="slidenum">
               <a:rPr lang="en-US" smtClean="0"/>
-              <a:t>‹N°›</a:t>
+              <a:t>‹#›</a:t>
             </a:fld>
             <a:endParaRPr lang="en-US"/>
           </a:p>
@@ -2441,9 +2094,10 @@
           </a:lstStyle>
           <a:p>
             <a:r>
-              <a:rPr lang="en-US"/>
+              <a:rPr lang="en-US" smtClean="0"/>
               <a:t>Click to edit Master title style</a:t>
             </a:r>
+            <a:endParaRPr lang="en-US"/>
           </a:p>
         </p:txBody>
       </p:sp>
@@ -2497,37 +2151,38 @@
           <a:p>
             <a:pPr lvl="0"/>
             <a:r>
-              <a:rPr lang="en-US"/>
+              <a:rPr lang="en-US" smtClean="0"/>
               <a:t>Click to edit Master text styles</a:t>
             </a:r>
           </a:p>
           <a:p>
             <a:pPr lvl="1"/>
             <a:r>
-              <a:rPr lang="en-US"/>
+              <a:rPr lang="en-US" smtClean="0"/>
               <a:t>Second level</a:t>
             </a:r>
           </a:p>
           <a:p>
             <a:pPr lvl="2"/>
             <a:r>
-              <a:rPr lang="en-US"/>
+              <a:rPr lang="en-US" smtClean="0"/>
               <a:t>Third level</a:t>
             </a:r>
           </a:p>
           <a:p>
             <a:pPr lvl="3"/>
             <a:r>
-              <a:rPr lang="en-US"/>
+              <a:rPr lang="en-US" smtClean="0"/>
               <a:t>Fourth level</a:t>
             </a:r>
           </a:p>
           <a:p>
             <a:pPr lvl="4"/>
             <a:r>
-              <a:rPr lang="en-US"/>
+              <a:rPr lang="en-US" smtClean="0"/>
               <a:t>Fifth level</a:t>
             </a:r>
+            <a:endParaRPr lang="en-US"/>
           </a:p>
         </p:txBody>
       </p:sp>
@@ -2590,7 +2245,7 @@
           <a:p>
             <a:pPr lvl="0"/>
             <a:r>
-              <a:rPr lang="en-US"/>
+              <a:rPr lang="en-US" smtClean="0"/>
               <a:t>Click to edit Master text styles</a:t>
             </a:r>
           </a:p>
@@ -2613,7 +2268,7 @@
           <a:p>
             <a:fld id="{5BCAD085-E8A6-8845-BD4E-CB4CCA059FC4}" type="datetimeFigureOut">
               <a:rPr lang="en-US" smtClean="0"/>
-              <a:t>5/16/2026</a:t>
+              <a:t>1/27/13</a:t>
             </a:fld>
             <a:endParaRPr lang="en-US"/>
           </a:p>
@@ -2655,7 +2310,7 @@
           <a:p>
             <a:fld id="{C1FF6DA9-008F-8B48-92A6-B652298478BF}" type="slidenum">
               <a:rPr lang="en-US" smtClean="0"/>
-              <a:t>‹N°›</a:t>
+              <a:t>‹#›</a:t>
             </a:fld>
             <a:endParaRPr lang="en-US"/>
           </a:p>
@@ -2716,9 +2371,10 @@
           </a:lstStyle>
           <a:p>
             <a:r>
-              <a:rPr lang="en-US"/>
+              <a:rPr lang="en-US" smtClean="0"/>
               <a:t>Click to edit Master title style</a:t>
             </a:r>
+            <a:endParaRPr lang="en-US"/>
           </a:p>
         </p:txBody>
       </p:sp>
@@ -2842,7 +2498,7 @@
           <a:p>
             <a:pPr lvl="0"/>
             <a:r>
-              <a:rPr lang="en-US"/>
+              <a:rPr lang="en-US" smtClean="0"/>
               <a:t>Click to edit Master text styles</a:t>
             </a:r>
           </a:p>
@@ -2865,7 +2521,7 @@
           <a:p>
             <a:fld id="{5BCAD085-E8A6-8845-BD4E-CB4CCA059FC4}" type="datetimeFigureOut">
               <a:rPr lang="en-US" smtClean="0"/>
-              <a:t>5/16/2026</a:t>
+              <a:t>1/27/13</a:t>
             </a:fld>
             <a:endParaRPr lang="en-US"/>
           </a:p>
@@ -2907,7 +2563,7 @@
           <a:p>
             <a:fld id="{C1FF6DA9-008F-8B48-92A6-B652298478BF}" type="slidenum">
               <a:rPr lang="en-US" smtClean="0"/>
-              <a:t>‹N°›</a:t>
+              <a:t>‹#›</a:t>
             </a:fld>
             <a:endParaRPr lang="en-US"/>
           </a:p>
@@ -2974,9 +2630,10 @@
           <a:lstStyle/>
           <a:p>
             <a:r>
-              <a:rPr lang="en-US"/>
+              <a:rPr lang="en-US" smtClean="0"/>
               <a:t>Click to edit Master title style</a:t>
             </a:r>
+            <a:endParaRPr lang="en-US"/>
           </a:p>
         </p:txBody>
       </p:sp>
@@ -3007,37 +2664,38 @@
           <a:p>
             <a:pPr lvl="0"/>
             <a:r>
-              <a:rPr lang="en-US"/>
+              <a:rPr lang="en-US" smtClean="0"/>
               <a:t>Click to edit Master text styles</a:t>
             </a:r>
           </a:p>
           <a:p>
             <a:pPr lvl="1"/>
             <a:r>
-              <a:rPr lang="en-US"/>
+              <a:rPr lang="en-US" smtClean="0"/>
               <a:t>Second level</a:t>
             </a:r>
           </a:p>
           <a:p>
             <a:pPr lvl="2"/>
             <a:r>
-              <a:rPr lang="en-US"/>
+              <a:rPr lang="en-US" smtClean="0"/>
               <a:t>Third level</a:t>
             </a:r>
           </a:p>
           <a:p>
             <a:pPr lvl="3"/>
             <a:r>
-              <a:rPr lang="en-US"/>
+              <a:rPr lang="en-US" smtClean="0"/>
               <a:t>Fourth level</a:t>
             </a:r>
           </a:p>
           <a:p>
             <a:pPr lvl="4"/>
             <a:r>
-              <a:rPr lang="en-US"/>
+              <a:rPr lang="en-US" smtClean="0"/>
               <a:t>Fifth level</a:t>
             </a:r>
+            <a:endParaRPr lang="en-US"/>
           </a:p>
         </p:txBody>
       </p:sp>
@@ -3076,7 +2734,7 @@
           <a:p>
             <a:fld id="{5BCAD085-E8A6-8845-BD4E-CB4CCA059FC4}" type="datetimeFigureOut">
               <a:rPr lang="en-US" smtClean="0"/>
-              <a:t>5/16/2026</a:t>
+              <a:t>1/27/13</a:t>
             </a:fld>
             <a:endParaRPr lang="en-US"/>
           </a:p>
@@ -3154,7 +2812,7 @@
           <a:p>
             <a:fld id="{C1FF6DA9-008F-8B48-92A6-B652298478BF}" type="slidenum">
               <a:rPr lang="en-US" smtClean="0"/>
-              <a:t>‹N°›</a:t>
+              <a:t>‹#›</a:t>
             </a:fld>
             <a:endParaRPr lang="en-US"/>
           </a:p>
@@ -3437,6 +3095,14 @@
 <file path=ppt/slides/slide1.xml><?xml version="1.0" encoding="utf-8"?>
 <p:sld xmlns:a="http://schemas.openxmlformats.org/drawingml/2006/main" xmlns:p="http://schemas.openxmlformats.org/presentationml/2006/main" xmlns:r="http://schemas.openxmlformats.org/officeDocument/2006/relationships">
   <p:cSld>
+    <p:bg>
+      <p:bgPr>
+        <a:solidFill>
+          <a:srgbClr val="1A5C33"/>
+        </a:solidFill>
+        <a:effectLst/>
+      </p:bgPr>
+    </p:bg>
     <p:spTree>
       <p:nvGrpSpPr>
         <p:cNvPr id="1" name=""/>
@@ -3446,56 +3112,14 @@
       <p:grpSpPr/>
       <p:sp>
         <p:nvSpPr>
-          <p:cNvPr id="2" name="Title 1"/>
-          <p:cNvSpPr>
-            <a:spLocks noGrp="1"/>
-          </p:cNvSpPr>
-          <p:nvPr>
-            <p:ph type="ctrTitle"/>
-          </p:nvPr>
-        </p:nvSpPr>
-        <p:spPr/>
-        <p:txBody>
-          <a:bodyPr/>
-          <a:lstStyle/>
-          <a:p>
-            <a:r>
-              <a:t>Introduction aux TIC</a:t>
-            </a:r>
-          </a:p>
-        </p:txBody>
-      </p:sp>
-      <p:sp>
-        <p:nvSpPr>
-          <p:cNvPr id="3" name="Subtitle 2"/>
-          <p:cNvSpPr>
-            <a:spLocks noGrp="1"/>
-          </p:cNvSpPr>
-          <p:nvPr>
-            <p:ph type="subTitle" idx="1"/>
-          </p:nvPr>
-        </p:nvSpPr>
-        <p:spPr/>
-        <p:txBody>
-          <a:bodyPr/>
-          <a:lstStyle/>
-          <a:p>
-            <a:r>
-              <a:t>Cours TIC 01 | 1h30 (90 min) | BELACEL Madani</a:t>
-            </a:r>
-          </a:p>
-        </p:txBody>
-      </p:sp>
-      <p:sp>
-        <p:nvSpPr>
-          <p:cNvPr id="4" name="TextBox 3"/>
+          <p:cNvPr id="2" name="TextBox 1"/>
           <p:cNvSpPr txBox="1"/>
           <p:nvPr/>
         </p:nvSpPr>
         <p:spPr>
           <a:xfrm>
-            <a:off x="365760" y="6446520"/>
-            <a:ext cx="8412480" cy="320040"/>
+            <a:off x="731520" y="1371600"/>
+            <a:ext cx="7680960" cy="1371600"/>
           </a:xfrm>
           <a:prstGeom prst="rect">
             <a:avLst/>
@@ -3503,20 +3127,90 @@
           <a:noFill/>
         </p:spPr>
         <p:txBody>
-          <a:bodyPr wrap="none">
+          <a:bodyPr wrap="square">
             <a:spAutoFit/>
           </a:bodyPr>
           <a:lstStyle/>
           <a:p>
             <a:pPr algn="ctr">
-              <a:defRPr sz="900">
-                <a:solidFill>
-                  <a:srgbClr val="404040"/>
-                </a:solidFill>
-              </a:defRPr>
-            </a:pPr>
-            <a:r>
-              <a:t>Cours TIC 01  •  Diapositive 1/10</a:t>
+              <a:defRPr sz="3200" b="1">
+                <a:solidFill>
+                  <a:srgbClr val="FFFFFF"/>
+                </a:solidFill>
+              </a:defRPr>
+            </a:pPr>
+            <a:r>
+              <a:t>Cours TIC 01 — Introduction aux TIC (ENS)</a:t>
+            </a:r>
+          </a:p>
+        </p:txBody>
+      </p:sp>
+      <p:sp>
+        <p:nvSpPr>
+          <p:cNvPr id="3" name="TextBox 2"/>
+          <p:cNvSpPr txBox="1"/>
+          <p:nvPr/>
+        </p:nvSpPr>
+        <p:spPr>
+          <a:xfrm>
+            <a:off x="731520" y="2926080"/>
+            <a:ext cx="7680960" cy="548640"/>
+          </a:xfrm>
+          <a:prstGeom prst="rect">
+            <a:avLst/>
+          </a:prstGeom>
+          <a:noFill/>
+        </p:spPr>
+        <p:txBody>
+          <a:bodyPr wrap="square">
+            <a:spAutoFit/>
+          </a:bodyPr>
+          <a:lstStyle/>
+          <a:p>
+            <a:pPr algn="ctr">
+              <a:defRPr sz="2000" b="0">
+                <a:solidFill>
+                  <a:srgbClr val="C5D9C7"/>
+                </a:solidFill>
+              </a:defRPr>
+            </a:pPr>
+            <a:r>
+              <a:t>Module TIC — Dr. BELACEL Madani</a:t>
+            </a:r>
+          </a:p>
+        </p:txBody>
+      </p:sp>
+      <p:sp>
+        <p:nvSpPr>
+          <p:cNvPr id="4" name="TextBox 3"/>
+          <p:cNvSpPr txBox="1"/>
+          <p:nvPr/>
+        </p:nvSpPr>
+        <p:spPr>
+          <a:xfrm>
+            <a:off x="731520" y="3657600"/>
+            <a:ext cx="7680960" cy="457200"/>
+          </a:xfrm>
+          <a:prstGeom prst="rect">
+            <a:avLst/>
+          </a:prstGeom>
+          <a:noFill/>
+        </p:spPr>
+        <p:txBody>
+          <a:bodyPr wrap="square">
+            <a:spAutoFit/>
+          </a:bodyPr>
+          <a:lstStyle/>
+          <a:p>
+            <a:pPr algn="ctr">
+              <a:defRPr sz="1600" b="0">
+                <a:solidFill>
+                  <a:srgbClr val="A0CFA0"/>
+                </a:solidFill>
+              </a:defRPr>
+            </a:pPr>
+            <a:r>
+              <a:t>Université de Mostaganem — MCB</a:t>
             </a:r>
           </a:p>
         </p:txBody>
@@ -3526,15 +3220,20 @@
   <p:clrMapOvr>
     <a:masterClrMapping/>
   </p:clrMapOvr>
-  <p:transition spd="med">
-    <p:fade/>
-  </p:transition>
 </p:sld>
 </file>
 
 <file path=ppt/slides/slide10.xml><?xml version="1.0" encoding="utf-8"?>
 <p:sld xmlns:a="http://schemas.openxmlformats.org/drawingml/2006/main" xmlns:p="http://schemas.openxmlformats.org/presentationml/2006/main" xmlns:r="http://schemas.openxmlformats.org/officeDocument/2006/relationships">
   <p:cSld>
+    <p:bg>
+      <p:bgPr>
+        <a:solidFill>
+          <a:srgbClr val="FFFFFF"/>
+        </a:solidFill>
+        <a:effectLst/>
+      </p:bgPr>
+    </p:bg>
     <p:spTree>
       <p:nvGrpSpPr>
         <p:cNvPr id="1" name=""/>
@@ -3544,83 +3243,57 @@
       <p:grpSpPr/>
       <p:sp>
         <p:nvSpPr>
-          <p:cNvPr id="2" name="Title 1"/>
-          <p:cNvSpPr>
-            <a:spLocks noGrp="1"/>
-          </p:cNvSpPr>
-          <p:nvPr>
-            <p:ph type="title"/>
-          </p:nvPr>
-        </p:nvSpPr>
-        <p:spPr/>
-        <p:txBody>
-          <a:bodyPr/>
-          <a:lstStyle/>
-          <a:p>
-            <a:r>
-              <a:t>Conclusion</a:t>
-            </a:r>
-          </a:p>
-        </p:txBody>
-      </p:sp>
-      <p:sp>
-        <p:nvSpPr>
-          <p:cNvPr id="3" name="Content Placeholder 2"/>
-          <p:cNvSpPr>
-            <a:spLocks noGrp="1"/>
-          </p:cNvSpPr>
-          <p:nvPr>
-            <p:ph idx="1"/>
-          </p:nvPr>
-        </p:nvSpPr>
-        <p:spPr/>
-        <p:txBody>
-          <a:bodyPr/>
-          <a:lstStyle/>
-          <a:p>
-            <a:pPr>
-              <a:defRPr sz="2000"/>
-            </a:pPr>
-            <a:r>
-              <a:t>✅ Compétence transversale</a:t>
-            </a:r>
-          </a:p>
-          <a:p>
-            <a:pPr>
-              <a:defRPr sz="2000"/>
-            </a:pPr>
-            <a:r>
-              <a:t>✅ TD 01 — 1h30</a:t>
-            </a:r>
-          </a:p>
-          <a:p>
-            <a:pPr>
-              <a:defRPr sz="2000"/>
-            </a:pPr>
-            <a:r>
-              <a:t>✅ Prochain : Ordinateur</a:t>
-            </a:r>
-          </a:p>
-          <a:p>
-            <a:pPr>
-              <a:defRPr sz="2000"/>
-            </a:pPr>
-            <a:r>
-              <a:t>✅ Questions ?</a:t>
-            </a:r>
-          </a:p>
-        </p:txBody>
-      </p:sp>
-      <p:sp>
-        <p:nvSpPr>
-          <p:cNvPr id="4" name="TextBox 3"/>
+          <p:cNvPr id="2" name="Rectangle 1"/>
+          <p:cNvSpPr/>
+          <p:nvPr/>
+        </p:nvSpPr>
+        <p:spPr>
+          <a:xfrm>
+            <a:off x="0" y="0"/>
+            <a:ext cx="109728" cy="6858000"/>
+          </a:xfrm>
+          <a:prstGeom prst="rect">
+            <a:avLst/>
+          </a:prstGeom>
+          <a:solidFill>
+            <a:srgbClr val="2C6E49"/>
+          </a:solidFill>
+          <a:ln>
+            <a:noFill/>
+          </a:ln>
+        </p:spPr>
+        <p:style>
+          <a:lnRef idx="1">
+            <a:schemeClr val="accent1"/>
+          </a:lnRef>
+          <a:fillRef idx="3">
+            <a:schemeClr val="accent1"/>
+          </a:fillRef>
+          <a:effectRef idx="2">
+            <a:schemeClr val="accent1"/>
+          </a:effectRef>
+          <a:fontRef idx="minor">
+            <a:schemeClr val="lt1"/>
+          </a:fontRef>
+        </p:style>
+        <p:txBody>
+          <a:bodyPr rtlCol="0" anchor="ctr"/>
+          <a:lstStyle/>
+          <a:p>
+            <a:pPr algn="ctr"/>
+          </a:p>
+        </p:txBody>
+      </p:sp>
+      <p:sp>
+        <p:nvSpPr>
+          <p:cNvPr id="3" name="TextBox 2"/>
           <p:cNvSpPr txBox="1"/>
           <p:nvPr/>
         </p:nvSpPr>
         <p:spPr>
           <a:xfrm>
-            <a:off x="365760" y="6446520"/>
-            <a:ext cx="8412480" cy="320040"/>
+            <a:off x="457200" y="365760"/>
+            <a:ext cx="8229600" cy="640080"/>
           </a:xfrm>
           <a:prstGeom prst="rect">
             <a:avLst/>
@@ -3628,20 +3301,148 @@
           <a:noFill/>
         </p:spPr>
         <p:txBody>
-          <a:bodyPr wrap="none">
+          <a:bodyPr wrap="square">
             <a:spAutoFit/>
           </a:bodyPr>
           <a:lstStyle/>
           <a:p>
-            <a:pPr algn="ctr">
-              <a:defRPr sz="900">
-                <a:solidFill>
-                  <a:srgbClr val="404040"/>
-                </a:solidFill>
-              </a:defRPr>
-            </a:pPr>
-            <a:r>
-              <a:t>Cours TIC 01  •  Diapositive 10/10</a:t>
+            <a:pPr algn="l">
+              <a:defRPr sz="2200" b="1">
+                <a:solidFill>
+                  <a:srgbClr val="1A5C33"/>
+                </a:solidFill>
+              </a:defRPr>
+            </a:pPr>
+            <a:r>
+              <a:t>3. TIC et Pédagogie : Intégration en Classe de Langues(20 min)</a:t>
+            </a:r>
+          </a:p>
+        </p:txBody>
+      </p:sp>
+      <p:sp>
+        <p:nvSpPr>
+          <p:cNvPr id="4" name="TextBox 3"/>
+          <p:cNvSpPr txBox="1"/>
+          <p:nvPr/>
+        </p:nvSpPr>
+        <p:spPr>
+          <a:xfrm>
+            <a:off x="457200" y="1371600"/>
+            <a:ext cx="7772400" cy="4572000"/>
+          </a:xfrm>
+          <a:prstGeom prst="rect">
+            <a:avLst/>
+          </a:prstGeom>
+          <a:noFill/>
+        </p:spPr>
+        <p:txBody>
+          <a:bodyPr wrap="square">
+            <a:spAutoFit/>
+          </a:bodyPr>
+          <a:lstStyle/>
+          <a:p>
+            <a:pPr>
+              <a:spcAft>
+                <a:spcPts val="600"/>
+              </a:spcAft>
+              <a:defRPr sz="1400">
+                <a:solidFill>
+                  <a:srgbClr val="222222"/>
+                </a:solidFill>
+              </a:defRPr>
+            </a:pPr>
+            <a:r>
+              <a:t>• Pourquoi intégrer les TIC en classe de langues ?</a:t>
+            </a:r>
+          </a:p>
+          <a:p>
+            <a:pPr>
+              <a:spcAft>
+                <a:spcPts val="600"/>
+              </a:spcAft>
+              <a:defRPr sz="1400">
+                <a:solidFill>
+                  <a:srgbClr val="222222"/>
+                </a:solidFill>
+              </a:defRPr>
+            </a:pPr>
+            <a:r>
+              <a:t>• Motivation et engagementdes apprenants : les outils numériques captent l'attention et rendent l'apprentissage plus ludique</a:t>
+            </a:r>
+          </a:p>
+          <a:p>
+            <a:pPr>
+              <a:spcAft>
+                <a:spcPts val="600"/>
+              </a:spcAft>
+              <a:defRPr sz="1400">
+                <a:solidFill>
+                  <a:srgbClr val="222222"/>
+                </a:solidFill>
+              </a:defRPr>
+            </a:pPr>
+            <a:r>
+              <a:t>• Accès à des ressources authentiques: vidéos, articles de presse, podcasts, contenus natifs en langue cible</a:t>
+            </a:r>
+          </a:p>
+          <a:p>
+            <a:pPr>
+              <a:spcAft>
+                <a:spcPts val="600"/>
+              </a:spcAft>
+              <a:defRPr sz="1400">
+                <a:solidFill>
+                  <a:srgbClr val="222222"/>
+                </a:solidFill>
+              </a:defRPr>
+            </a:pPr>
+            <a:r>
+              <a:t>• Individualisation des parcours: chaque apprenant progresse à son rythme avec des exercices adaptés</a:t>
+            </a:r>
+          </a:p>
+          <a:p>
+            <a:pPr>
+              <a:spcAft>
+                <a:spcPts val="600"/>
+              </a:spcAft>
+              <a:defRPr sz="1400">
+                <a:solidFill>
+                  <a:srgbClr val="222222"/>
+                </a:solidFill>
+              </a:defRPr>
+            </a:pPr>
+            <a:r>
+              <a:t>• Développement de l'autonomie: l'apprenant devient acteur de son apprentissage</a:t>
+            </a:r>
+          </a:p>
+          <a:p>
+            <a:pPr>
+              <a:spcAft>
+                <a:spcPts val="600"/>
+              </a:spcAft>
+              <a:defRPr sz="1400">
+                <a:solidFill>
+                  <a:srgbClr val="222222"/>
+                </a:solidFill>
+              </a:defRPr>
+            </a:pPr>
+            <a:r>
+              <a:t>• Interaction élargie: communication avec d'autres apprenants ou locuteurs natifs via les outils de visioconférence</a:t>
+            </a:r>
+          </a:p>
+          <a:p>
+            <a:pPr>
+              <a:spcAft>
+                <a:spcPts val="600"/>
+              </a:spcAft>
+              <a:defRPr sz="1400">
+                <a:solidFill>
+                  <a:srgbClr val="222222"/>
+                </a:solidFill>
+              </a:defRPr>
+            </a:pPr>
+            <a:r>
+              <a:t>• Domaines d'application en didactique des langues :</a:t>
             </a:r>
           </a:p>
         </p:txBody>
@@ -3651,15 +3452,20 @@
   <p:clrMapOvr>
     <a:masterClrMapping/>
   </p:clrMapOvr>
-  <p:transition spd="med">
-    <p:fade/>
-  </p:transition>
 </p:sld>
 </file>
 
-<file path=ppt/slides/slide2.xml><?xml version="1.0" encoding="utf-8"?>
+<file path=ppt/slides/slide11.xml><?xml version="1.0" encoding="utf-8"?>
 <p:sld xmlns:a="http://schemas.openxmlformats.org/drawingml/2006/main" xmlns:p="http://schemas.openxmlformats.org/presentationml/2006/main" xmlns:r="http://schemas.openxmlformats.org/officeDocument/2006/relationships">
   <p:cSld>
+    <p:bg>
+      <p:bgPr>
+        <a:solidFill>
+          <a:srgbClr val="FFFFFF"/>
+        </a:solidFill>
+        <a:effectLst/>
+      </p:bgPr>
+    </p:bg>
     <p:spTree>
       <p:nvGrpSpPr>
         <p:cNvPr id="1" name=""/>
@@ -3669,83 +3475,57 @@
       <p:grpSpPr/>
       <p:sp>
         <p:nvSpPr>
-          <p:cNvPr id="2" name="Title 1"/>
-          <p:cNvSpPr>
-            <a:spLocks noGrp="1"/>
-          </p:cNvSpPr>
-          <p:nvPr>
-            <p:ph type="title"/>
-          </p:nvPr>
-        </p:nvSpPr>
-        <p:spPr/>
-        <p:txBody>
-          <a:bodyPr/>
-          <a:lstStyle/>
-          <a:p>
-            <a:r>
-              <a:t>Objectifs pédagogiques</a:t>
-            </a:r>
-          </a:p>
-        </p:txBody>
-      </p:sp>
-      <p:sp>
-        <p:nvSpPr>
-          <p:cNvPr id="3" name="Content Placeholder 2"/>
-          <p:cNvSpPr>
-            <a:spLocks noGrp="1"/>
-          </p:cNvSpPr>
-          <p:nvPr>
-            <p:ph idx="1"/>
-          </p:nvPr>
-        </p:nvSpPr>
-        <p:spPr/>
-        <p:txBody>
-          <a:bodyPr/>
-          <a:lstStyle/>
-          <a:p>
-            <a:pPr>
-              <a:defRPr sz="2000"/>
-            </a:pPr>
-            <a:r>
-              <a:t>🎯 Définir les TIC et leurs 3 dimensions</a:t>
-            </a:r>
-          </a:p>
-          <a:p>
-            <a:pPr>
-              <a:defRPr sz="2000"/>
-            </a:pPr>
-            <a:r>
-              <a:t>🎯 Comprendre traitement / transmission / sauvegarde</a:t>
-            </a:r>
-          </a:p>
-          <a:p>
-            <a:pPr>
-              <a:defRPr sz="2000"/>
-            </a:pPr>
-            <a:r>
-              <a:t>🎯 Identifier services et applications</a:t>
-            </a:r>
-          </a:p>
-          <a:p>
-            <a:pPr>
-              <a:defRPr sz="2000"/>
-            </a:pPr>
-            <a:r>
-              <a:t>🎯 Compétences numériques en langues</a:t>
-            </a:r>
-          </a:p>
-        </p:txBody>
-      </p:sp>
-      <p:sp>
-        <p:nvSpPr>
-          <p:cNvPr id="4" name="TextBox 3"/>
+          <p:cNvPr id="2" name="Rectangle 1"/>
+          <p:cNvSpPr/>
+          <p:nvPr/>
+        </p:nvSpPr>
+        <p:spPr>
+          <a:xfrm>
+            <a:off x="0" y="0"/>
+            <a:ext cx="109728" cy="6858000"/>
+          </a:xfrm>
+          <a:prstGeom prst="rect">
+            <a:avLst/>
+          </a:prstGeom>
+          <a:solidFill>
+            <a:srgbClr val="2C6E49"/>
+          </a:solidFill>
+          <a:ln>
+            <a:noFill/>
+          </a:ln>
+        </p:spPr>
+        <p:style>
+          <a:lnRef idx="1">
+            <a:schemeClr val="accent1"/>
+          </a:lnRef>
+          <a:fillRef idx="3">
+            <a:schemeClr val="accent1"/>
+          </a:fillRef>
+          <a:effectRef idx="2">
+            <a:schemeClr val="accent1"/>
+          </a:effectRef>
+          <a:fontRef idx="minor">
+            <a:schemeClr val="lt1"/>
+          </a:fontRef>
+        </p:style>
+        <p:txBody>
+          <a:bodyPr rtlCol="0" anchor="ctr"/>
+          <a:lstStyle/>
+          <a:p>
+            <a:pPr algn="ctr"/>
+          </a:p>
+        </p:txBody>
+      </p:sp>
+      <p:sp>
+        <p:nvSpPr>
+          <p:cNvPr id="3" name="TextBox 2"/>
           <p:cNvSpPr txBox="1"/>
           <p:nvPr/>
         </p:nvSpPr>
         <p:spPr>
           <a:xfrm>
-            <a:off x="365760" y="6446520"/>
-            <a:ext cx="8412480" cy="320040"/>
+            <a:off x="457200" y="365760"/>
+            <a:ext cx="8229600" cy="640080"/>
           </a:xfrm>
           <a:prstGeom prst="rect">
             <a:avLst/>
@@ -3753,20 +3533,73 @@
           <a:noFill/>
         </p:spPr>
         <p:txBody>
-          <a:bodyPr wrap="none">
+          <a:bodyPr wrap="square">
             <a:spAutoFit/>
           </a:bodyPr>
           <a:lstStyle/>
           <a:p>
-            <a:pPr algn="ctr">
-              <a:defRPr sz="900">
-                <a:solidFill>
-                  <a:srgbClr val="404040"/>
-                </a:solidFill>
-              </a:defRPr>
-            </a:pPr>
-            <a:r>
-              <a:t>Cours TIC 01  •  Diapositive 2/10</a:t>
+            <a:pPr algn="l">
+              <a:defRPr sz="2200" b="1">
+                <a:solidFill>
+                  <a:srgbClr val="1A5C33"/>
+                </a:solidFill>
+              </a:defRPr>
+            </a:pPr>
+            <a:r>
+              <a:t>4. Modèle SAMR et Taxonomie de Bloom Numérique(15 min)</a:t>
+            </a:r>
+          </a:p>
+        </p:txBody>
+      </p:sp>
+      <p:sp>
+        <p:nvSpPr>
+          <p:cNvPr id="4" name="TextBox 3"/>
+          <p:cNvSpPr txBox="1"/>
+          <p:nvPr/>
+        </p:nvSpPr>
+        <p:spPr>
+          <a:xfrm>
+            <a:off x="457200" y="1371600"/>
+            <a:ext cx="7772400" cy="4572000"/>
+          </a:xfrm>
+          <a:prstGeom prst="rect">
+            <a:avLst/>
+          </a:prstGeom>
+          <a:noFill/>
+        </p:spPr>
+        <p:txBody>
+          <a:bodyPr wrap="square">
+            <a:spAutoFit/>
+          </a:bodyPr>
+          <a:lstStyle/>
+          <a:p>
+            <a:pPr>
+              <a:spcAft>
+                <a:spcPts val="600"/>
+              </a:spcAft>
+              <a:defRPr sz="1400">
+                <a:solidFill>
+                  <a:srgbClr val="222222"/>
+                </a:solidFill>
+              </a:defRPr>
+            </a:pPr>
+            <a:r>
+              <a:t>• Le modèle SAMR (Puentedura, 2006) décrit quatre niveaux d'intégration technologique :</a:t>
+            </a:r>
+          </a:p>
+          <a:p>
+            <a:pPr>
+              <a:spcAft>
+                <a:spcPts val="600"/>
+              </a:spcAft>
+              <a:defRPr sz="1400">
+                <a:solidFill>
+                  <a:srgbClr val="222222"/>
+                </a:solidFill>
+              </a:defRPr>
+            </a:pPr>
+            <a:r>
+              <a:t>• Objectif pour l'enseignant :viser au moins les niveauxModificationetRedéfinitiondans la conception de ses séquences pédagogiques. Le niveau de Redéfinition est particulièrement pertinent en didactique des langues car il permet des interactions authentiques impossibles à réaliser dans une classe traditionnelle.</a:t>
             </a:r>
           </a:p>
         </p:txBody>
@@ -3776,15 +3609,20 @@
   <p:clrMapOvr>
     <a:masterClrMapping/>
   </p:clrMapOvr>
-  <p:transition spd="med">
-    <p:fade/>
-  </p:transition>
 </p:sld>
 </file>
 
-<file path=ppt/slides/slide3.xml><?xml version="1.0" encoding="utf-8"?>
+<file path=ppt/slides/slide12.xml><?xml version="1.0" encoding="utf-8"?>
 <p:sld xmlns:a="http://schemas.openxmlformats.org/drawingml/2006/main" xmlns:p="http://schemas.openxmlformats.org/presentationml/2006/main" xmlns:r="http://schemas.openxmlformats.org/officeDocument/2006/relationships">
   <p:cSld>
+    <p:bg>
+      <p:bgPr>
+        <a:solidFill>
+          <a:srgbClr val="FFFFFF"/>
+        </a:solidFill>
+        <a:effectLst/>
+      </p:bgPr>
+    </p:bg>
     <p:spTree>
       <p:nvGrpSpPr>
         <p:cNvPr id="1" name=""/>
@@ -3794,83 +3632,57 @@
       <p:grpSpPr/>
       <p:sp>
         <p:nvSpPr>
-          <p:cNvPr id="2" name="Title 1"/>
-          <p:cNvSpPr>
-            <a:spLocks noGrp="1"/>
-          </p:cNvSpPr>
-          <p:nvPr>
-            <p:ph type="title"/>
-          </p:nvPr>
-        </p:nvSpPr>
-        <p:spPr/>
-        <p:txBody>
-          <a:bodyPr/>
-          <a:lstStyle/>
-          <a:p>
-            <a:r>
-              <a:t>Plan du cours (1h30)</a:t>
-            </a:r>
-          </a:p>
-        </p:txBody>
-      </p:sp>
-      <p:sp>
-        <p:nvSpPr>
-          <p:cNvPr id="3" name="Content Placeholder 2"/>
-          <p:cNvSpPr>
-            <a:spLocks noGrp="1"/>
-          </p:cNvSpPr>
-          <p:nvPr>
-            <p:ph idx="1"/>
-          </p:nvPr>
-        </p:nvSpPr>
-        <p:spPr/>
-        <p:txBody>
-          <a:bodyPr/>
-          <a:lstStyle/>
-          <a:p>
-            <a:pPr>
-              <a:defRPr sz="2000"/>
-            </a:pPr>
-            <a:r>
-              <a:t>📋 9 parties — 90 minutes</a:t>
-            </a:r>
-          </a:p>
-          <a:p>
-            <a:pPr>
-              <a:defRPr sz="2000"/>
-            </a:pPr>
-            <a:r>
-              <a:t>📋 Intro → Définition → NTIC</a:t>
-            </a:r>
-          </a:p>
-          <a:p>
-            <a:pPr>
-              <a:defRPr sz="2000"/>
-            </a:pPr>
-            <a:r>
-              <a:t>📋 Dimensions → Fonctions → Services</a:t>
-            </a:r>
-          </a:p>
-          <a:p>
-            <a:pPr>
-              <a:defRPr sz="2000"/>
-            </a:pPr>
-            <a:r>
-              <a:t>📋 Éducation → Compétences → Conclusion</a:t>
-            </a:r>
-          </a:p>
-        </p:txBody>
-      </p:sp>
-      <p:sp>
-        <p:nvSpPr>
-          <p:cNvPr id="4" name="TextBox 3"/>
+          <p:cNvPr id="2" name="Rectangle 1"/>
+          <p:cNvSpPr/>
+          <p:nvPr/>
+        </p:nvSpPr>
+        <p:spPr>
+          <a:xfrm>
+            <a:off x="0" y="0"/>
+            <a:ext cx="109728" cy="6858000"/>
+          </a:xfrm>
+          <a:prstGeom prst="rect">
+            <a:avLst/>
+          </a:prstGeom>
+          <a:solidFill>
+            <a:srgbClr val="2C6E49"/>
+          </a:solidFill>
+          <a:ln>
+            <a:noFill/>
+          </a:ln>
+        </p:spPr>
+        <p:style>
+          <a:lnRef idx="1">
+            <a:schemeClr val="accent1"/>
+          </a:lnRef>
+          <a:fillRef idx="3">
+            <a:schemeClr val="accent1"/>
+          </a:fillRef>
+          <a:effectRef idx="2">
+            <a:schemeClr val="accent1"/>
+          </a:effectRef>
+          <a:fontRef idx="minor">
+            <a:schemeClr val="lt1"/>
+          </a:fontRef>
+        </p:style>
+        <p:txBody>
+          <a:bodyPr rtlCol="0" anchor="ctr"/>
+          <a:lstStyle/>
+          <a:p>
+            <a:pPr algn="ctr"/>
+          </a:p>
+        </p:txBody>
+      </p:sp>
+      <p:sp>
+        <p:nvSpPr>
+          <p:cNvPr id="3" name="TextBox 2"/>
           <p:cNvSpPr txBox="1"/>
           <p:nvPr/>
         </p:nvSpPr>
         <p:spPr>
           <a:xfrm>
-            <a:off x="365760" y="6446520"/>
-            <a:ext cx="8412480" cy="320040"/>
+            <a:off x="457200" y="365760"/>
+            <a:ext cx="8229600" cy="640080"/>
           </a:xfrm>
           <a:prstGeom prst="rect">
             <a:avLst/>
@@ -3878,20 +3690,163 @@
           <a:noFill/>
         </p:spPr>
         <p:txBody>
-          <a:bodyPr wrap="none">
+          <a:bodyPr wrap="square">
             <a:spAutoFit/>
           </a:bodyPr>
           <a:lstStyle/>
           <a:p>
-            <a:pPr algn="ctr">
-              <a:defRPr sz="900">
-                <a:solidFill>
-                  <a:srgbClr val="404040"/>
-                </a:solidFill>
-              </a:defRPr>
-            </a:pPr>
-            <a:r>
-              <a:t>Cours TIC 01  •  Diapositive 3/10</a:t>
+            <a:pPr algn="l">
+              <a:defRPr sz="2200" b="1">
+                <a:solidFill>
+                  <a:srgbClr val="1A5C33"/>
+                </a:solidFill>
+              </a:defRPr>
+            </a:pPr>
+            <a:r>
+              <a:t>6. Compétences Numériques de l'Enseignant(10 min)</a:t>
+            </a:r>
+          </a:p>
+        </p:txBody>
+      </p:sp>
+      <p:sp>
+        <p:nvSpPr>
+          <p:cNvPr id="4" name="TextBox 3"/>
+          <p:cNvSpPr txBox="1"/>
+          <p:nvPr/>
+        </p:nvSpPr>
+        <p:spPr>
+          <a:xfrm>
+            <a:off x="457200" y="1371600"/>
+            <a:ext cx="7772400" cy="4572000"/>
+          </a:xfrm>
+          <a:prstGeom prst="rect">
+            <a:avLst/>
+          </a:prstGeom>
+          <a:noFill/>
+        </p:spPr>
+        <p:txBody>
+          <a:bodyPr wrap="square">
+            <a:spAutoFit/>
+          </a:bodyPr>
+          <a:lstStyle/>
+          <a:p>
+            <a:pPr>
+              <a:spcAft>
+                <a:spcPts val="600"/>
+              </a:spcAft>
+              <a:defRPr sz="1400">
+                <a:solidFill>
+                  <a:srgbClr val="222222"/>
+                </a:solidFill>
+              </a:defRPr>
+            </a:pPr>
+            <a:r>
+              <a:t>• Référentiel de compétences numériques pour l'enseignement (C2i2e / PIX) :</a:t>
+            </a:r>
+          </a:p>
+          <a:p>
+            <a:pPr>
+              <a:spcAft>
+                <a:spcPts val="600"/>
+              </a:spcAft>
+              <a:defRPr sz="1400">
+                <a:solidFill>
+                  <a:srgbClr val="222222"/>
+                </a:solidFill>
+              </a:defRPr>
+            </a:pPr>
+            <a:r>
+              <a:t>• Concevoir des séquences pédagogiques intégrant le numérique de manière cohérente</a:t>
+            </a:r>
+          </a:p>
+          <a:p>
+            <a:pPr>
+              <a:spcAft>
+                <a:spcPts val="600"/>
+              </a:spcAft>
+              <a:defRPr sz="1400">
+                <a:solidFill>
+                  <a:srgbClr val="222222"/>
+                </a:solidFill>
+              </a:defRPr>
+            </a:pPr>
+            <a:r>
+              <a:t>• Mettre en œuvre des activités collaboratives en ligne avec les apprenants</a:t>
+            </a:r>
+          </a:p>
+          <a:p>
+            <a:pPr>
+              <a:spcAft>
+                <a:spcPts val="600"/>
+              </a:spcAft>
+              <a:defRPr sz="1400">
+                <a:solidFill>
+                  <a:srgbClr val="222222"/>
+                </a:solidFill>
+              </a:defRPr>
+            </a:pPr>
+            <a:r>
+              <a:t>• Évaluer les apprentissages à l'aide d'outils numériques (QCM, quiz, portfolios)</a:t>
+            </a:r>
+          </a:p>
+          <a:p>
+            <a:pPr>
+              <a:spcAft>
+                <a:spcPts val="600"/>
+              </a:spcAft>
+              <a:defRPr sz="1400">
+                <a:solidFill>
+                  <a:srgbClr val="222222"/>
+                </a:solidFill>
+              </a:defRPr>
+            </a:pPr>
+            <a:r>
+              <a:t>• Assurer la sécurité des données et l'éthique du numérique éducatif</a:t>
+            </a:r>
+          </a:p>
+          <a:p>
+            <a:pPr>
+              <a:spcAft>
+                <a:spcPts val="600"/>
+              </a:spcAft>
+              <a:defRPr sz="1400">
+                <a:solidFill>
+                  <a:srgbClr val="222222"/>
+                </a:solidFill>
+              </a:defRPr>
+            </a:pPr>
+            <a:r>
+              <a:t>• Développer une veille professionnelle continue sur les innovations EdTech</a:t>
+            </a:r>
+          </a:p>
+          <a:p>
+            <a:pPr>
+              <a:spcAft>
+                <a:spcPts val="600"/>
+              </a:spcAft>
+              <a:defRPr sz="1400">
+                <a:solidFill>
+                  <a:srgbClr val="222222"/>
+                </a:solidFill>
+              </a:defRPr>
+            </a:pPr>
+            <a:r>
+              <a:t>• Accompagner les apprenants dans le développement de leurs propres compétences numériques</a:t>
+            </a:r>
+          </a:p>
+          <a:p>
+            <a:pPr>
+              <a:spcAft>
+                <a:spcPts val="600"/>
+              </a:spcAft>
+              <a:defRPr sz="1400">
+                <a:solidFill>
+                  <a:srgbClr val="222222"/>
+                </a:solidFill>
+              </a:defRPr>
+            </a:pPr>
+            <a:r>
+              <a:t>• Utiliser les outils de communication institutionnelle (ENT, messagerie, cahier de textes numérique)</a:t>
             </a:r>
           </a:p>
         </p:txBody>
@@ -3901,15 +3856,20 @@
   <p:clrMapOvr>
     <a:masterClrMapping/>
   </p:clrMapOvr>
-  <p:transition spd="med">
-    <p:fade/>
-  </p:transition>
 </p:sld>
 </file>
 
-<file path=ppt/slides/slide4.xml><?xml version="1.0" encoding="utf-8"?>
+<file path=ppt/slides/slide13.xml><?xml version="1.0" encoding="utf-8"?>
 <p:sld xmlns:a="http://schemas.openxmlformats.org/drawingml/2006/main" xmlns:p="http://schemas.openxmlformats.org/presentationml/2006/main" xmlns:r="http://schemas.openxmlformats.org/officeDocument/2006/relationships">
   <p:cSld>
+    <p:bg>
+      <p:bgPr>
+        <a:solidFill>
+          <a:srgbClr val="E8F0E9"/>
+        </a:solidFill>
+        <a:effectLst/>
+      </p:bgPr>
+    </p:bg>
     <p:spTree>
       <p:nvGrpSpPr>
         <p:cNvPr id="1" name=""/>
@@ -3919,83 +3879,14 @@
       <p:grpSpPr/>
       <p:sp>
         <p:nvSpPr>
-          <p:cNvPr id="2" name="Title 1"/>
-          <p:cNvSpPr>
-            <a:spLocks noGrp="1"/>
-          </p:cNvSpPr>
-          <p:nvPr>
-            <p:ph type="title"/>
-          </p:nvPr>
-        </p:nvSpPr>
-        <p:spPr/>
-        <p:txBody>
-          <a:bodyPr/>
-          <a:lstStyle/>
-          <a:p>
-            <a:r>
-              <a:t>Définition des TIC</a:t>
-            </a:r>
-          </a:p>
-        </p:txBody>
-      </p:sp>
-      <p:sp>
-        <p:nvSpPr>
-          <p:cNvPr id="3" name="Content Placeholder 2"/>
-          <p:cNvSpPr>
-            <a:spLocks noGrp="1"/>
-          </p:cNvSpPr>
-          <p:nvPr>
-            <p:ph idx="1"/>
-          </p:nvPr>
-        </p:nvSpPr>
-        <p:spPr/>
-        <p:txBody>
-          <a:bodyPr/>
-          <a:lstStyle/>
-          <a:p>
-            <a:pPr>
-              <a:defRPr sz="2000"/>
-            </a:pPr>
-            <a:r>
-              <a:t>💡 Convergence numérique</a:t>
-            </a:r>
-          </a:p>
-          <a:p>
-            <a:pPr>
-              <a:defRPr sz="2000"/>
-            </a:pPr>
-            <a:r>
-              <a:t>💡 Créer, stocker, transmettre</a:t>
-            </a:r>
-          </a:p>
-          <a:p>
-            <a:pPr>
-              <a:defRPr sz="2000"/>
-            </a:pPr>
-            <a:r>
-              <a:t>💡 Définition UIT / UNESCO</a:t>
-            </a:r>
-          </a:p>
-          <a:p>
-            <a:pPr>
-              <a:defRPr sz="2000"/>
-            </a:pPr>
-            <a:r>
-              <a:t>💡 ICT en anglais</a:t>
-            </a:r>
-          </a:p>
-        </p:txBody>
-      </p:sp>
-      <p:sp>
-        <p:nvSpPr>
-          <p:cNvPr id="4" name="TextBox 3"/>
+          <p:cNvPr id="2" name="TextBox 1"/>
           <p:cNvSpPr txBox="1"/>
           <p:nvPr/>
         </p:nvSpPr>
         <p:spPr>
           <a:xfrm>
-            <a:off x="365760" y="6446520"/>
-            <a:ext cx="8412480" cy="320040"/>
+            <a:off x="548640" y="365760"/>
+            <a:ext cx="7772400" cy="640080"/>
           </a:xfrm>
           <a:prstGeom prst="rect">
             <a:avLst/>
@@ -4003,20 +3894,130 @@
           <a:noFill/>
         </p:spPr>
         <p:txBody>
-          <a:bodyPr wrap="none">
+          <a:bodyPr wrap="square">
             <a:spAutoFit/>
           </a:bodyPr>
           <a:lstStyle/>
           <a:p>
             <a:pPr algn="ctr">
-              <a:defRPr sz="900">
-                <a:solidFill>
-                  <a:srgbClr val="404040"/>
-                </a:solidFill>
-              </a:defRPr>
-            </a:pPr>
-            <a:r>
-              <a:t>Cours TIC 01  •  Diapositive 4/10</a:t>
+              <a:defRPr sz="2600" b="1">
+                <a:solidFill>
+                  <a:srgbClr val="1A5C33"/>
+                </a:solidFill>
+              </a:defRPr>
+            </a:pPr>
+            <a:r>
+              <a:t>📝 Points clés à retenir</a:t>
+            </a:r>
+          </a:p>
+        </p:txBody>
+      </p:sp>
+      <p:sp>
+        <p:nvSpPr>
+          <p:cNvPr id="3" name="TextBox 2"/>
+          <p:cNvSpPr txBox="1"/>
+          <p:nvPr/>
+        </p:nvSpPr>
+        <p:spPr>
+          <a:xfrm>
+            <a:off x="548640" y="1828800"/>
+            <a:ext cx="7772400" cy="4572000"/>
+          </a:xfrm>
+          <a:prstGeom prst="rect">
+            <a:avLst/>
+          </a:prstGeom>
+          <a:noFill/>
+        </p:spPr>
+        <p:txBody>
+          <a:bodyPr wrap="square">
+            <a:spAutoFit/>
+          </a:bodyPr>
+          <a:lstStyle/>
+          <a:p>
+            <a:pPr>
+              <a:spcAft>
+                <a:spcPts val="600"/>
+              </a:spcAft>
+              <a:defRPr sz="1600">
+                <a:solidFill>
+                  <a:srgbClr val="222222"/>
+                </a:solidFill>
+              </a:defRPr>
+            </a:pPr>
+            <a:r>
+              <a:t>• Public visé :Étudiants ENS — futurs enseignants de langues</a:t>
+            </a:r>
+          </a:p>
+          <a:p>
+            <a:pPr>
+              <a:spcAft>
+                <a:spcPts val="600"/>
+              </a:spcAft>
+              <a:defRPr sz="1600">
+                <a:solidFill>
+                  <a:srgbClr val="222222"/>
+                </a:solidFill>
+              </a:defRPr>
+            </a:pPr>
+            <a:r>
+              <a:t>• Savoir :- Définir les TIC, leur évolution et leurs trois dimensions constitutive</a:t>
+            </a:r>
+            <a:br/>
+            <a:r>
+              <a:t>- Distinguer les notions de technique, information et communication</a:t>
+            </a:r>
+            <a:br/>
+            <a:r>
+              <a:t>- Comprendre l'intégration pédagogique des TIC en didactique des langues</a:t>
+            </a:r>
+            <a:br/>
+            <a:r>
+              <a:t>- Connaître le modèle SAMR et la taxonomie de Bloom numérique</a:t>
+            </a:r>
+          </a:p>
+          <a:p>
+            <a:pPr>
+              <a:spcAft>
+                <a:spcPts val="600"/>
+              </a:spcAft>
+              <a:defRPr sz="1600">
+                <a:solidFill>
+                  <a:srgbClr val="222222"/>
+                </a:solidFill>
+              </a:defRPr>
+            </a:pPr>
+            <a:r>
+              <a:t>• Ce cours s'inscrit dans le cadre réglementaire algérien de la formation des enseignants :</a:t>
+            </a:r>
+          </a:p>
+          <a:p>
+            <a:pPr>
+              <a:spcAft>
+                <a:spcPts val="600"/>
+              </a:spcAft>
+              <a:defRPr sz="1600">
+                <a:solidFill>
+                  <a:srgbClr val="222222"/>
+                </a:solidFill>
+              </a:defRPr>
+            </a:pPr>
+            <a:r>
+              <a:t>• Définition et évolution des TIC(15 min)</a:t>
+            </a:r>
+          </a:p>
+          <a:p>
+            <a:pPr>
+              <a:spcAft>
+                <a:spcPts val="600"/>
+              </a:spcAft>
+              <a:defRPr sz="1600">
+                <a:solidFill>
+                  <a:srgbClr val="222222"/>
+                </a:solidFill>
+              </a:defRPr>
+            </a:pPr>
+            <a:r>
+              <a:t>• Les Technologies de l'Information et de la Communication (TIC) regroupent l'ensemble des technologies issues de la convergence de l'informatique, des télécommunications et du multimédia. Leur évolution rapide transforme en profondeur les pratiques d'enseignement et d'apprentissage, en particulier dans le domaine des langues étrangères.</a:t>
             </a:r>
           </a:p>
         </p:txBody>
@@ -4026,15 +4027,20 @@
   <p:clrMapOvr>
     <a:masterClrMapping/>
   </p:clrMapOvr>
-  <p:transition spd="med">
-    <p:fade/>
-  </p:transition>
 </p:sld>
 </file>
 
-<file path=ppt/slides/slide5.xml><?xml version="1.0" encoding="utf-8"?>
+<file path=ppt/slides/slide14.xml><?xml version="1.0" encoding="utf-8"?>
 <p:sld xmlns:a="http://schemas.openxmlformats.org/drawingml/2006/main" xmlns:p="http://schemas.openxmlformats.org/presentationml/2006/main" xmlns:r="http://schemas.openxmlformats.org/officeDocument/2006/relationships">
   <p:cSld>
+    <p:bg>
+      <p:bgPr>
+        <a:solidFill>
+          <a:srgbClr val="FFFFFF"/>
+        </a:solidFill>
+        <a:effectLst/>
+      </p:bgPr>
+    </p:bg>
     <p:spTree>
       <p:nvGrpSpPr>
         <p:cNvPr id="1" name=""/>
@@ -4044,83 +4050,14 @@
       <p:grpSpPr/>
       <p:sp>
         <p:nvSpPr>
-          <p:cNvPr id="2" name="Title 1"/>
-          <p:cNvSpPr>
-            <a:spLocks noGrp="1"/>
-          </p:cNvSpPr>
-          <p:nvPr>
-            <p:ph type="title"/>
-          </p:nvPr>
-        </p:nvSpPr>
-        <p:spPr/>
-        <p:txBody>
-          <a:bodyPr/>
-          <a:lstStyle/>
-          <a:p>
-            <a:r>
-              <a:t>NTIC → TIC</a:t>
-            </a:r>
-          </a:p>
-        </p:txBody>
-      </p:sp>
-      <p:sp>
-        <p:nvSpPr>
-          <p:cNvPr id="3" name="Content Placeholder 2"/>
-          <p:cNvSpPr>
-            <a:spLocks noGrp="1"/>
-          </p:cNvSpPr>
-          <p:nvPr>
-            <p:ph idx="1"/>
-          </p:nvPr>
-        </p:nvSpPr>
-        <p:spPr/>
-        <p:txBody>
-          <a:bodyPr/>
-          <a:lstStyle/>
-          <a:p>
-            <a:pPr>
-              <a:defRPr sz="2000"/>
-            </a:pPr>
-            <a:r>
-              <a:t>📖 1990-2005 : NTIC</a:t>
-            </a:r>
-          </a:p>
-          <a:p>
-            <a:pPr>
-              <a:defRPr sz="2000"/>
-            </a:pPr>
-            <a:r>
-              <a:t>📖 Aujourd'hui : TIC</a:t>
-            </a:r>
-          </a:p>
-          <a:p>
-            <a:pPr>
-              <a:defRPr sz="2000"/>
-            </a:pPr>
-            <a:r>
-              <a:t>📖 Transformation digitale</a:t>
-            </a:r>
-          </a:p>
-          <a:p>
-            <a:pPr>
-              <a:defRPr sz="2000"/>
-            </a:pPr>
-            <a:r>
-              <a:t>📖 Société de l'information</a:t>
-            </a:r>
-          </a:p>
-        </p:txBody>
-      </p:sp>
-      <p:sp>
-        <p:nvSpPr>
-          <p:cNvPr id="4" name="TextBox 3"/>
+          <p:cNvPr id="2" name="TextBox 1"/>
           <p:cNvSpPr txBox="1"/>
           <p:nvPr/>
         </p:nvSpPr>
         <p:spPr>
           <a:xfrm>
-            <a:off x="365760" y="6446520"/>
-            <a:ext cx="8412480" cy="320040"/>
+            <a:off x="548640" y="365760"/>
+            <a:ext cx="7772400" cy="640080"/>
           </a:xfrm>
           <a:prstGeom prst="rect">
             <a:avLst/>
@@ -4128,20 +4065,118 @@
           <a:noFill/>
         </p:spPr>
         <p:txBody>
-          <a:bodyPr wrap="none">
+          <a:bodyPr wrap="square">
             <a:spAutoFit/>
           </a:bodyPr>
           <a:lstStyle/>
           <a:p>
             <a:pPr algn="ctr">
-              <a:defRPr sz="900">
-                <a:solidFill>
-                  <a:srgbClr val="404040"/>
-                </a:solidFill>
-              </a:defRPr>
-            </a:pPr>
-            <a:r>
-              <a:t>Cours TIC 01  •  Diapositive 5/10</a:t>
+              <a:defRPr sz="2600" b="1">
+                <a:solidFill>
+                  <a:srgbClr val="1A5C33"/>
+                </a:solidFill>
+              </a:defRPr>
+            </a:pPr>
+            <a:r>
+              <a:t>✏️ Exercices d'application</a:t>
+            </a:r>
+          </a:p>
+        </p:txBody>
+      </p:sp>
+      <p:sp>
+        <p:nvSpPr>
+          <p:cNvPr id="3" name="TextBox 2"/>
+          <p:cNvSpPr txBox="1"/>
+          <p:nvPr/>
+        </p:nvSpPr>
+        <p:spPr>
+          <a:xfrm>
+            <a:off x="548640" y="1828800"/>
+            <a:ext cx="7772400" cy="4572000"/>
+          </a:xfrm>
+          <a:prstGeom prst="rect">
+            <a:avLst/>
+          </a:prstGeom>
+          <a:noFill/>
+        </p:spPr>
+        <p:txBody>
+          <a:bodyPr wrap="square">
+            <a:spAutoFit/>
+          </a:bodyPr>
+          <a:lstStyle/>
+          <a:p>
+            <a:pPr>
+              <a:spcAft>
+                <a:spcPts val="600"/>
+              </a:spcAft>
+              <a:defRPr sz="1500">
+                <a:solidFill>
+                  <a:srgbClr val="222222"/>
+                </a:solidFill>
+              </a:defRPr>
+            </a:pPr>
+            <a:r>
+              <a:t>• Définir les concepts principaux du cours</a:t>
+            </a:r>
+          </a:p>
+          <a:p>
+            <a:pPr>
+              <a:spcAft>
+                <a:spcPts val="600"/>
+              </a:spcAft>
+              <a:defRPr sz="1500">
+                <a:solidFill>
+                  <a:srgbClr val="222222"/>
+                </a:solidFill>
+              </a:defRPr>
+            </a:pPr>
+            <a:r>
+              <a:t>• Identifier les applications pratiques</a:t>
+            </a:r>
+          </a:p>
+          <a:p>
+            <a:pPr>
+              <a:spcAft>
+                <a:spcPts val="600"/>
+              </a:spcAft>
+              <a:defRPr sz="1500">
+                <a:solidFill>
+                  <a:srgbClr val="222222"/>
+                </a:solidFill>
+              </a:defRPr>
+            </a:pPr>
+            <a:r>
+              <a:t>• Résoudre les exercices du TD</a:t>
+            </a:r>
+          </a:p>
+          <a:p>
+            <a:pPr>
+              <a:spcAft>
+                <a:spcPts val="600"/>
+              </a:spcAft>
+              <a:defRPr sz="1500">
+                <a:solidFill>
+                  <a:srgbClr val="222222"/>
+                </a:solidFill>
+              </a:defRPr>
+            </a:pPr>
+            <a:r>
+              <a:t>• Synthétiser les points clés en un paragraphe</a:t>
+            </a:r>
+          </a:p>
+          <a:p>
+            <a:pPr>
+              <a:spcAft>
+                <a:spcPts val="600"/>
+              </a:spcAft>
+              <a:defRPr sz="1500">
+                <a:solidFill>
+                  <a:srgbClr val="222222"/>
+                </a:solidFill>
+              </a:defRPr>
+            </a:pPr>
+            <a:r>
+              <a:t>• Préparer une courte présentation orale</a:t>
             </a:r>
           </a:p>
         </p:txBody>
@@ -4151,15 +4186,20 @@
   <p:clrMapOvr>
     <a:masterClrMapping/>
   </p:clrMapOvr>
-  <p:transition spd="med">
-    <p:fade/>
-  </p:transition>
 </p:sld>
 </file>
 
-<file path=ppt/slides/slide6.xml><?xml version="1.0" encoding="utf-8"?>
+<file path=ppt/slides/slide15.xml><?xml version="1.0" encoding="utf-8"?>
 <p:sld xmlns:a="http://schemas.openxmlformats.org/drawingml/2006/main" xmlns:p="http://schemas.openxmlformats.org/presentationml/2006/main" xmlns:r="http://schemas.openxmlformats.org/officeDocument/2006/relationships">
   <p:cSld>
+    <p:bg>
+      <p:bgPr>
+        <a:solidFill>
+          <a:srgbClr val="1A5C33"/>
+        </a:solidFill>
+        <a:effectLst/>
+      </p:bgPr>
+    </p:bg>
     <p:spTree>
       <p:nvGrpSpPr>
         <p:cNvPr id="1" name=""/>
@@ -4169,83 +4209,14 @@
       <p:grpSpPr/>
       <p:sp>
         <p:nvSpPr>
-          <p:cNvPr id="2" name="Title 1"/>
-          <p:cNvSpPr>
-            <a:spLocks noGrp="1"/>
-          </p:cNvSpPr>
-          <p:nvPr>
-            <p:ph type="title"/>
-          </p:nvPr>
-        </p:nvSpPr>
-        <p:spPr/>
-        <p:txBody>
-          <a:bodyPr/>
-          <a:lstStyle/>
-          <a:p>
-            <a:r>
-              <a:t>Trois dimensions</a:t>
-            </a:r>
-          </a:p>
-        </p:txBody>
-      </p:sp>
-      <p:sp>
-        <p:nvSpPr>
-          <p:cNvPr id="3" name="Content Placeholder 2"/>
-          <p:cNvSpPr>
-            <a:spLocks noGrp="1"/>
-          </p:cNvSpPr>
-          <p:nvPr>
-            <p:ph idx="1"/>
-          </p:nvPr>
-        </p:nvSpPr>
-        <p:spPr/>
-        <p:txBody>
-          <a:bodyPr/>
-          <a:lstStyle/>
-          <a:p>
-            <a:pPr>
-              <a:defRPr sz="2000"/>
-            </a:pPr>
-            <a:r>
-              <a:t>🔺 Techniques (outils)</a:t>
-            </a:r>
-          </a:p>
-          <a:p>
-            <a:pPr>
-              <a:defRPr sz="2000"/>
-            </a:pPr>
-            <a:r>
-              <a:t>🔺 Information (données)</a:t>
-            </a:r>
-          </a:p>
-          <a:p>
-            <a:pPr>
-              <a:defRPr sz="2000"/>
-            </a:pPr>
-            <a:r>
-              <a:t>🔺 Communication (échange)</a:t>
-            </a:r>
-          </a:p>
-          <a:p>
-            <a:pPr>
-              <a:defRPr sz="2000"/>
-            </a:pPr>
-            <a:r>
-              <a:t>🔺 Schéma triangulaire</a:t>
-            </a:r>
-          </a:p>
-        </p:txBody>
-      </p:sp>
-      <p:sp>
-        <p:nvSpPr>
-          <p:cNvPr id="4" name="TextBox 3"/>
+          <p:cNvPr id="2" name="TextBox 1"/>
           <p:cNvSpPr txBox="1"/>
           <p:nvPr/>
         </p:nvSpPr>
         <p:spPr>
           <a:xfrm>
-            <a:off x="365760" y="6446520"/>
-            <a:ext cx="8412480" cy="320040"/>
+            <a:off x="731520" y="1371600"/>
+            <a:ext cx="7680960" cy="914400"/>
           </a:xfrm>
           <a:prstGeom prst="rect">
             <a:avLst/>
@@ -4253,20 +4224,67 @@
           <a:noFill/>
         </p:spPr>
         <p:txBody>
-          <a:bodyPr wrap="none">
+          <a:bodyPr wrap="square">
             <a:spAutoFit/>
           </a:bodyPr>
           <a:lstStyle/>
           <a:p>
             <a:pPr algn="ctr">
-              <a:defRPr sz="900">
-                <a:solidFill>
-                  <a:srgbClr val="404040"/>
-                </a:solidFill>
-              </a:defRPr>
-            </a:pPr>
-            <a:r>
-              <a:t>Cours TIC 01  •  Diapositive 6/10</a:t>
+              <a:defRPr sz="2800" b="1">
+                <a:solidFill>
+                  <a:srgbClr val="FFFFFF"/>
+                </a:solidFill>
+              </a:defRPr>
+            </a:pPr>
+            <a:r>
+              <a:t>🎓 Conclusion</a:t>
+            </a:r>
+          </a:p>
+        </p:txBody>
+      </p:sp>
+      <p:sp>
+        <p:nvSpPr>
+          <p:cNvPr id="3" name="TextBox 2"/>
+          <p:cNvSpPr txBox="1"/>
+          <p:nvPr/>
+        </p:nvSpPr>
+        <p:spPr>
+          <a:xfrm>
+            <a:off x="731520" y="2743200"/>
+            <a:ext cx="7680960" cy="1828800"/>
+          </a:xfrm>
+          <a:prstGeom prst="rect">
+            <a:avLst/>
+          </a:prstGeom>
+          <a:noFill/>
+        </p:spPr>
+        <p:txBody>
+          <a:bodyPr wrap="square">
+            <a:spAutoFit/>
+          </a:bodyPr>
+          <a:lstStyle/>
+          <a:p>
+            <a:pPr algn="ctr">
+              <a:defRPr sz="1800" b="0">
+                <a:solidFill>
+                  <a:srgbClr val="C5D9C7"/>
+                </a:solidFill>
+              </a:defRPr>
+            </a:pPr>
+            <a:r>
+              <a:t>Dr. BELACEL Madani</a:t>
+            </a:r>
+            <a:br/>
+            <a:r>
+              <a:t>Maître de Conférences B</a:t>
+            </a:r>
+            <a:br/>
+            <a:r>
+              <a:t>Université de Mostaganem</a:t>
+            </a:r>
+            <a:br/>
+            <a:r>
+              <a:t>madani.belacel@univ-mosta.dz</a:t>
             </a:r>
           </a:p>
         </p:txBody>
@@ -4276,15 +4294,20 @@
   <p:clrMapOvr>
     <a:masterClrMapping/>
   </p:clrMapOvr>
-  <p:transition spd="med">
-    <p:fade/>
-  </p:transition>
 </p:sld>
 </file>
 
-<file path=ppt/slides/slide7.xml><?xml version="1.0" encoding="utf-8"?>
+<file path=ppt/slides/slide2.xml><?xml version="1.0" encoding="utf-8"?>
 <p:sld xmlns:a="http://schemas.openxmlformats.org/drawingml/2006/main" xmlns:p="http://schemas.openxmlformats.org/presentationml/2006/main" xmlns:r="http://schemas.openxmlformats.org/officeDocument/2006/relationships">
   <p:cSld>
+    <p:bg>
+      <p:bgPr>
+        <a:solidFill>
+          <a:srgbClr val="FFFFFF"/>
+        </a:solidFill>
+        <a:effectLst/>
+      </p:bgPr>
+    </p:bg>
     <p:spTree>
       <p:nvGrpSpPr>
         <p:cNvPr id="1" name=""/>
@@ -4294,83 +4317,14 @@
       <p:grpSpPr/>
       <p:sp>
         <p:nvSpPr>
-          <p:cNvPr id="2" name="Title 1"/>
-          <p:cNvSpPr>
-            <a:spLocks noGrp="1"/>
-          </p:cNvSpPr>
-          <p:nvPr>
-            <p:ph type="title"/>
-          </p:nvPr>
-        </p:nvSpPr>
-        <p:spPr/>
-        <p:txBody>
-          <a:bodyPr/>
-          <a:lstStyle/>
-          <a:p>
-            <a:r>
-              <a:t>Trois fonctions</a:t>
-            </a:r>
-          </a:p>
-        </p:txBody>
-      </p:sp>
-      <p:sp>
-        <p:nvSpPr>
-          <p:cNvPr id="3" name="Content Placeholder 2"/>
-          <p:cNvSpPr>
-            <a:spLocks noGrp="1"/>
-          </p:cNvSpPr>
-          <p:nvPr>
-            <p:ph idx="1"/>
-          </p:nvPr>
-        </p:nvSpPr>
-        <p:spPr/>
-        <p:txBody>
-          <a:bodyPr/>
-          <a:lstStyle/>
-          <a:p>
-            <a:pPr>
-              <a:defRPr sz="2000"/>
-            </a:pPr>
-            <a:r>
-              <a:t>⚙️ Traitement (Word)</a:t>
-            </a:r>
-          </a:p>
-          <a:p>
-            <a:pPr>
-              <a:defRPr sz="2000"/>
-            </a:pPr>
-            <a:r>
-              <a:t>⚙️ Transmission (email)</a:t>
-            </a:r>
-          </a:p>
-          <a:p>
-            <a:pPr>
-              <a:defRPr sz="2000"/>
-            </a:pPr>
-            <a:r>
-              <a:t>⚙️ Sauvegarde (cloud)</a:t>
-            </a:r>
-          </a:p>
-          <a:p>
-            <a:pPr>
-              <a:defRPr sz="2000"/>
-            </a:pPr>
-            <a:r>
-              <a:t>⚙️ Exemple étudiant</a:t>
-            </a:r>
-          </a:p>
-        </p:txBody>
-      </p:sp>
-      <p:sp>
-        <p:nvSpPr>
-          <p:cNvPr id="4" name="TextBox 3"/>
+          <p:cNvPr id="2" name="TextBox 1"/>
           <p:cNvSpPr txBox="1"/>
           <p:nvPr/>
         </p:nvSpPr>
         <p:spPr>
           <a:xfrm>
-            <a:off x="365760" y="6446520"/>
-            <a:ext cx="8412480" cy="320040"/>
+            <a:off x="548640" y="365760"/>
+            <a:ext cx="7772400" cy="640080"/>
           </a:xfrm>
           <a:prstGeom prst="rect">
             <a:avLst/>
@@ -4378,20 +4332,135 @@
           <a:noFill/>
         </p:spPr>
         <p:txBody>
-          <a:bodyPr wrap="none">
+          <a:bodyPr wrap="square">
             <a:spAutoFit/>
           </a:bodyPr>
           <a:lstStyle/>
           <a:p>
-            <a:pPr algn="ctr">
-              <a:defRPr sz="900">
-                <a:solidFill>
-                  <a:srgbClr val="404040"/>
-                </a:solidFill>
-              </a:defRPr>
-            </a:pPr>
-            <a:r>
-              <a:t>Cours TIC 01  •  Diapositive 7/10</a:t>
+            <a:pPr algn="l">
+              <a:defRPr sz="2600" b="1">
+                <a:solidFill>
+                  <a:srgbClr val="1A5C33"/>
+                </a:solidFill>
+              </a:defRPr>
+            </a:pPr>
+            <a:r>
+              <a:t>🎯 Objectifs pédagogiques</a:t>
+            </a:r>
+          </a:p>
+        </p:txBody>
+      </p:sp>
+      <p:sp>
+        <p:nvSpPr>
+          <p:cNvPr id="3" name="TextBox 2"/>
+          <p:cNvSpPr txBox="1"/>
+          <p:nvPr/>
+        </p:nvSpPr>
+        <p:spPr>
+          <a:xfrm>
+            <a:off x="548640" y="1828800"/>
+            <a:ext cx="7772400" cy="4572000"/>
+          </a:xfrm>
+          <a:prstGeom prst="rect">
+            <a:avLst/>
+          </a:prstGeom>
+          <a:noFill/>
+        </p:spPr>
+        <p:txBody>
+          <a:bodyPr wrap="square">
+            <a:spAutoFit/>
+          </a:bodyPr>
+          <a:lstStyle/>
+          <a:p>
+            <a:pPr>
+              <a:spcAft>
+                <a:spcPts val="600"/>
+              </a:spcAft>
+              <a:defRPr sz="1500">
+                <a:solidFill>
+                  <a:srgbClr val="222222"/>
+                </a:solidFill>
+              </a:defRPr>
+            </a:pPr>
+            <a:r>
+              <a:t>• Savoir :- Définir les TIC, leur évolution et leurs trois dimensions constitutive</a:t>
+            </a:r>
+            <a:br/>
+            <a:r>
+              <a:t>- Distinguer les notions de technique, information et communication</a:t>
+            </a:r>
+            <a:br/>
+            <a:r>
+              <a:t>- Comprendre l'intégration pédagogique des TIC en didactique des langues</a:t>
+            </a:r>
+            <a:br/>
+            <a:r>
+              <a:t>- Connaître le modèle SAMR et la taxonomie de Bloom numérique</a:t>
+            </a:r>
+          </a:p>
+          <a:p>
+            <a:pPr>
+              <a:spcAft>
+                <a:spcPts val="600"/>
+              </a:spcAft>
+              <a:defRPr sz="1500">
+                <a:solidFill>
+                  <a:srgbClr val="222222"/>
+                </a:solidFill>
+              </a:defRPr>
+            </a:pPr>
+            <a:r>
+              <a:t>• Savoir-faire :- Utiliser les outils TIC pour concevoir des séquences pédagogiques</a:t>
+            </a:r>
+            <a:br/>
+            <a:r>
+              <a:t>- Évaluer et sélectionner des ressources numériques adaptées à la classe de langues</a:t>
+            </a:r>
+            <a:br/>
+            <a:r>
+              <a:t>- Créer des supports de cours interactifs avec les outils disponibles</a:t>
+            </a:r>
+            <a:br/>
+            <a:r>
+              <a:t>- Analyser une situation pédagogique selon le modèle SAMR</a:t>
+            </a:r>
+          </a:p>
+          <a:p>
+            <a:pPr>
+              <a:spcAft>
+                <a:spcPts val="600"/>
+              </a:spcAft>
+              <a:defRPr sz="1500">
+                <a:solidFill>
+                  <a:srgbClr val="222222"/>
+                </a:solidFill>
+              </a:defRPr>
+            </a:pPr>
+            <a:r>
+              <a:t>• Savoir-être :- Adopter une posture critique face aux outils numériques</a:t>
+            </a:r>
+            <a:br/>
+            <a:r>
+              <a:t>- Intégrer les TIC de manière éthique et responsable dans sa pratique</a:t>
+            </a:r>
+            <a:br/>
+            <a:r>
+              <a:t>- Développer une veille professionnelle sur les innovations EdTech</a:t>
+            </a:r>
+          </a:p>
+          <a:p>
+            <a:pPr>
+              <a:spcAft>
+                <a:spcPts val="600"/>
+              </a:spcAft>
+              <a:defRPr sz="1500">
+                <a:solidFill>
+                  <a:srgbClr val="222222"/>
+                </a:solidFill>
+              </a:defRPr>
+            </a:pPr>
+            <a:r>
+              <a:t>• Mode d'évaluation :TD 40 % + Projet pédagogique TIC 30 % + Examen 30 %</a:t>
             </a:r>
           </a:p>
         </p:txBody>
@@ -4401,15 +4470,20 @@
   <p:clrMapOvr>
     <a:masterClrMapping/>
   </p:clrMapOvr>
-  <p:transition spd="med">
-    <p:fade/>
-  </p:transition>
 </p:sld>
 </file>
 
-<file path=ppt/slides/slide8.xml><?xml version="1.0" encoding="utf-8"?>
+<file path=ppt/slides/slide3.xml><?xml version="1.0" encoding="utf-8"?>
 <p:sld xmlns:a="http://schemas.openxmlformats.org/drawingml/2006/main" xmlns:p="http://schemas.openxmlformats.org/presentationml/2006/main" xmlns:r="http://schemas.openxmlformats.org/officeDocument/2006/relationships">
   <p:cSld>
+    <p:bg>
+      <p:bgPr>
+        <a:solidFill>
+          <a:srgbClr val="FFFFFF"/>
+        </a:solidFill>
+        <a:effectLst/>
+      </p:bgPr>
+    </p:bg>
     <p:spTree>
       <p:nvGrpSpPr>
         <p:cNvPr id="1" name=""/>
@@ -4419,83 +4493,14 @@
       <p:grpSpPr/>
       <p:sp>
         <p:nvSpPr>
-          <p:cNvPr id="2" name="Title 1"/>
-          <p:cNvSpPr>
-            <a:spLocks noGrp="1"/>
-          </p:cNvSpPr>
-          <p:nvPr>
-            <p:ph type="title"/>
-          </p:nvPr>
-        </p:nvSpPr>
-        <p:spPr/>
-        <p:txBody>
-          <a:bodyPr/>
-          <a:lstStyle/>
-          <a:p>
-            <a:r>
-              <a:t>Services et éducation</a:t>
-            </a:r>
-          </a:p>
-        </p:txBody>
-      </p:sp>
-      <p:sp>
-        <p:nvSpPr>
-          <p:cNvPr id="3" name="Content Placeholder 2"/>
-          <p:cNvSpPr>
-            <a:spLocks noGrp="1"/>
-          </p:cNvSpPr>
-          <p:nvPr>
-            <p:ph idx="1"/>
-          </p:nvPr>
-        </p:nvSpPr>
-        <p:spPr/>
-        <p:txBody>
-          <a:bodyPr/>
-          <a:lstStyle/>
-          <a:p>
-            <a:pPr>
-              <a:defRPr sz="2000"/>
-            </a:pPr>
-            <a:r>
-              <a:t>🎓 Courriel, Web, visio</a:t>
-            </a:r>
-          </a:p>
-          <a:p>
-            <a:pPr>
-              <a:defRPr sz="2000"/>
-            </a:pPr>
-            <a:r>
-              <a:t>🎓 Moodle / Classroom</a:t>
-            </a:r>
-          </a:p>
-          <a:p>
-            <a:pPr>
-              <a:defRPr sz="2000"/>
-            </a:pPr>
-            <a:r>
-              <a:t>🎓 E-learning hybride</a:t>
-            </a:r>
-          </a:p>
-          <a:p>
-            <a:pPr>
-              <a:defRPr sz="2000"/>
-            </a:pPr>
-            <a:r>
-              <a:t>🎓 Ressources multilingues</a:t>
-            </a:r>
-          </a:p>
-        </p:txBody>
-      </p:sp>
-      <p:sp>
-        <p:nvSpPr>
-          <p:cNvPr id="4" name="TextBox 3"/>
+          <p:cNvPr id="2" name="TextBox 1"/>
           <p:cNvSpPr txBox="1"/>
           <p:nvPr/>
         </p:nvSpPr>
         <p:spPr>
           <a:xfrm>
-            <a:off x="365760" y="6446520"/>
-            <a:ext cx="8412480" cy="320040"/>
+            <a:off x="548640" y="365760"/>
+            <a:ext cx="7772400" cy="640080"/>
           </a:xfrm>
           <a:prstGeom prst="rect">
             <a:avLst/>
@@ -4503,20 +4508,193 @@
           <a:noFill/>
         </p:spPr>
         <p:txBody>
-          <a:bodyPr wrap="none">
+          <a:bodyPr wrap="square">
             <a:spAutoFit/>
           </a:bodyPr>
           <a:lstStyle/>
           <a:p>
-            <a:pPr algn="ctr">
-              <a:defRPr sz="900">
-                <a:solidFill>
-                  <a:srgbClr val="404040"/>
-                </a:solidFill>
-              </a:defRPr>
-            </a:pPr>
-            <a:r>
-              <a:t>Cours TIC 01  •  Diapositive 8/10</a:t>
+            <a:pPr algn="l">
+              <a:defRPr sz="2600" b="1">
+                <a:solidFill>
+                  <a:srgbClr val="1A5C33"/>
+                </a:solidFill>
+              </a:defRPr>
+            </a:pPr>
+            <a:r>
+              <a:t>📋 Plan du cours</a:t>
+            </a:r>
+          </a:p>
+        </p:txBody>
+      </p:sp>
+      <p:sp>
+        <p:nvSpPr>
+          <p:cNvPr id="3" name="TextBox 2"/>
+          <p:cNvSpPr txBox="1"/>
+          <p:nvPr/>
+        </p:nvSpPr>
+        <p:spPr>
+          <a:xfrm>
+            <a:off x="548640" y="1828800"/>
+            <a:ext cx="7772400" cy="4572000"/>
+          </a:xfrm>
+          <a:prstGeom prst="rect">
+            <a:avLst/>
+          </a:prstGeom>
+          <a:noFill/>
+        </p:spPr>
+        <p:txBody>
+          <a:bodyPr wrap="square">
+            <a:spAutoFit/>
+          </a:bodyPr>
+          <a:lstStyle/>
+          <a:p>
+            <a:pPr>
+              <a:spcAft>
+                <a:spcPts val="600"/>
+              </a:spcAft>
+              <a:defRPr sz="1600">
+                <a:solidFill>
+                  <a:srgbClr val="222222"/>
+                </a:solidFill>
+              </a:defRPr>
+            </a:pPr>
+            <a:r>
+              <a:t>• Fiche cours — Plateforme e-learning (Moodle)</a:t>
+            </a:r>
+          </a:p>
+          <a:p>
+            <a:pPr>
+              <a:spcAft>
+                <a:spcPts val="600"/>
+              </a:spcAft>
+              <a:defRPr sz="1600">
+                <a:solidFill>
+                  <a:srgbClr val="222222"/>
+                </a:solidFill>
+              </a:defRPr>
+            </a:pPr>
+            <a:r>
+              <a:t>• Objectifs de l'enseignement</a:t>
+            </a:r>
+          </a:p>
+          <a:p>
+            <a:pPr>
+              <a:spcAft>
+                <a:spcPts val="600"/>
+              </a:spcAft>
+              <a:defRPr sz="1600">
+                <a:solidFill>
+                  <a:srgbClr val="222222"/>
+                </a:solidFill>
+              </a:defRPr>
+            </a:pPr>
+            <a:r>
+              <a:t>• Contexte réglementaire algérien</a:t>
+            </a:r>
+          </a:p>
+          <a:p>
+            <a:pPr>
+              <a:spcAft>
+                <a:spcPts val="600"/>
+              </a:spcAft>
+              <a:defRPr sz="1600">
+                <a:solidFill>
+                  <a:srgbClr val="222222"/>
+                </a:solidFill>
+              </a:defRPr>
+            </a:pPr>
+            <a:r>
+              <a:t>• Plan du Cours</a:t>
+            </a:r>
+          </a:p>
+          <a:p>
+            <a:pPr>
+              <a:spcAft>
+                <a:spcPts val="600"/>
+              </a:spcAft>
+              <a:defRPr sz="1600">
+                <a:solidFill>
+                  <a:srgbClr val="222222"/>
+                </a:solidFill>
+              </a:defRPr>
+            </a:pPr>
+            <a:r>
+              <a:t>• 1. Définition et Évolution des TIC(15 min)</a:t>
+            </a:r>
+          </a:p>
+          <a:p>
+            <a:pPr>
+              <a:spcAft>
+                <a:spcPts val="600"/>
+              </a:spcAft>
+              <a:defRPr sz="1600">
+                <a:solidFill>
+                  <a:srgbClr val="222222"/>
+                </a:solidFill>
+              </a:defRPr>
+            </a:pPr>
+            <a:r>
+              <a:t>• 2. Les Trois Dimensions des TIC(10 min)</a:t>
+            </a:r>
+          </a:p>
+          <a:p>
+            <a:pPr>
+              <a:spcAft>
+                <a:spcPts val="600"/>
+              </a:spcAft>
+              <a:defRPr sz="1600">
+                <a:solidFill>
+                  <a:srgbClr val="222222"/>
+                </a:solidFill>
+              </a:defRPr>
+            </a:pPr>
+            <a:r>
+              <a:t>• 3. TIC et Pédagogie : Intégration en Classe de Langues(20 min)</a:t>
+            </a:r>
+          </a:p>
+          <a:p>
+            <a:pPr>
+              <a:spcAft>
+                <a:spcPts val="600"/>
+              </a:spcAft>
+              <a:defRPr sz="1600">
+                <a:solidFill>
+                  <a:srgbClr val="222222"/>
+                </a:solidFill>
+              </a:defRPr>
+            </a:pPr>
+            <a:r>
+              <a:t>• 4. Modèle SAMR et Taxonomie de Bloom Numérique(15 min)</a:t>
+            </a:r>
+          </a:p>
+          <a:p>
+            <a:pPr>
+              <a:spcAft>
+                <a:spcPts val="600"/>
+              </a:spcAft>
+              <a:defRPr sz="1600">
+                <a:solidFill>
+                  <a:srgbClr val="222222"/>
+                </a:solidFill>
+              </a:defRPr>
+            </a:pPr>
+            <a:r>
+              <a:t>• 6. Compétences Numériques de l'Enseignant(10 min)</a:t>
+            </a:r>
+          </a:p>
+          <a:p>
+            <a:pPr>
+              <a:spcAft>
+                <a:spcPts val="600"/>
+              </a:spcAft>
+              <a:defRPr sz="1600">
+                <a:solidFill>
+                  <a:srgbClr val="222222"/>
+                </a:solidFill>
+              </a:defRPr>
+            </a:pPr>
+            <a:r>
+              <a:t>• 7. Éthique et Sécurité en Contexte Pédagogique(5 min)</a:t>
             </a:r>
           </a:p>
         </p:txBody>
@@ -4526,15 +4704,20 @@
   <p:clrMapOvr>
     <a:masterClrMapping/>
   </p:clrMapOvr>
-  <p:transition spd="med">
-    <p:fade/>
-  </p:transition>
 </p:sld>
 </file>
 
-<file path=ppt/slides/slide9.xml><?xml version="1.0" encoding="utf-8"?>
+<file path=ppt/slides/slide4.xml><?xml version="1.0" encoding="utf-8"?>
 <p:sld xmlns:a="http://schemas.openxmlformats.org/drawingml/2006/main" xmlns:p="http://schemas.openxmlformats.org/presentationml/2006/main" xmlns:r="http://schemas.openxmlformats.org/officeDocument/2006/relationships">
   <p:cSld>
+    <p:bg>
+      <p:bgPr>
+        <a:solidFill>
+          <a:srgbClr val="FFFFFF"/>
+        </a:solidFill>
+        <a:effectLst/>
+      </p:bgPr>
+    </p:bg>
     <p:spTree>
       <p:nvGrpSpPr>
         <p:cNvPr id="1" name=""/>
@@ -4544,83 +4727,57 @@
       <p:grpSpPr/>
       <p:sp>
         <p:nvSpPr>
-          <p:cNvPr id="2" name="Title 1"/>
-          <p:cNvSpPr>
-            <a:spLocks noGrp="1"/>
-          </p:cNvSpPr>
-          <p:nvPr>
-            <p:ph type="title"/>
-          </p:nvPr>
-        </p:nvSpPr>
-        <p:spPr/>
-        <p:txBody>
-          <a:bodyPr/>
-          <a:lstStyle/>
-          <a:p>
-            <a:r>
-              <a:t>Compétences attendues</a:t>
-            </a:r>
-          </a:p>
-        </p:txBody>
-      </p:sp>
-      <p:sp>
-        <p:nvSpPr>
-          <p:cNvPr id="3" name="Content Placeholder 2"/>
-          <p:cNvSpPr>
-            <a:spLocks noGrp="1"/>
-          </p:cNvSpPr>
-          <p:nvPr>
-            <p:ph idx="1"/>
-          </p:nvPr>
-        </p:nvSpPr>
-        <p:spPr/>
-        <p:txBody>
-          <a:bodyPr/>
-          <a:lstStyle/>
-          <a:p>
-            <a:pPr>
-              <a:defRPr sz="2000"/>
-            </a:pPr>
-            <a:r>
-              <a:t>✔️ Bureautique académique</a:t>
-            </a:r>
-          </a:p>
-          <a:p>
-            <a:pPr>
-              <a:defRPr sz="2000"/>
-            </a:pPr>
-            <a:r>
-              <a:t>✔️ Recherche documentaire</a:t>
-            </a:r>
-          </a:p>
-          <a:p>
-            <a:pPr>
-              <a:defRPr sz="2000"/>
-            </a:pPr>
-            <a:r>
-              <a:t>✔️ Fichiers et sauvegardes</a:t>
-            </a:r>
-          </a:p>
-          <a:p>
-            <a:pPr>
-              <a:defRPr sz="2000"/>
-            </a:pPr>
-            <a:r>
-              <a:t>✔️ Éthique numérique</a:t>
-            </a:r>
-          </a:p>
-        </p:txBody>
-      </p:sp>
-      <p:sp>
-        <p:nvSpPr>
-          <p:cNvPr id="4" name="TextBox 3"/>
+          <p:cNvPr id="2" name="Rectangle 1"/>
+          <p:cNvSpPr/>
+          <p:nvPr/>
+        </p:nvSpPr>
+        <p:spPr>
+          <a:xfrm>
+            <a:off x="0" y="0"/>
+            <a:ext cx="109728" cy="6858000"/>
+          </a:xfrm>
+          <a:prstGeom prst="rect">
+            <a:avLst/>
+          </a:prstGeom>
+          <a:solidFill>
+            <a:srgbClr val="2C6E49"/>
+          </a:solidFill>
+          <a:ln>
+            <a:noFill/>
+          </a:ln>
+        </p:spPr>
+        <p:style>
+          <a:lnRef idx="1">
+            <a:schemeClr val="accent1"/>
+          </a:lnRef>
+          <a:fillRef idx="3">
+            <a:schemeClr val="accent1"/>
+          </a:fillRef>
+          <a:effectRef idx="2">
+            <a:schemeClr val="accent1"/>
+          </a:effectRef>
+          <a:fontRef idx="minor">
+            <a:schemeClr val="lt1"/>
+          </a:fontRef>
+        </p:style>
+        <p:txBody>
+          <a:bodyPr rtlCol="0" anchor="ctr"/>
+          <a:lstStyle/>
+          <a:p>
+            <a:pPr algn="ctr"/>
+          </a:p>
+        </p:txBody>
+      </p:sp>
+      <p:sp>
+        <p:nvSpPr>
+          <p:cNvPr id="3" name="TextBox 2"/>
           <p:cNvSpPr txBox="1"/>
           <p:nvPr/>
         </p:nvSpPr>
         <p:spPr>
           <a:xfrm>
-            <a:off x="365760" y="6446520"/>
-            <a:ext cx="8412480" cy="320040"/>
+            <a:off x="457200" y="365760"/>
+            <a:ext cx="8229600" cy="640080"/>
           </a:xfrm>
           <a:prstGeom prst="rect">
             <a:avLst/>
@@ -4628,20 +4785,73 @@
           <a:noFill/>
         </p:spPr>
         <p:txBody>
-          <a:bodyPr wrap="none">
+          <a:bodyPr wrap="square">
             <a:spAutoFit/>
           </a:bodyPr>
           <a:lstStyle/>
           <a:p>
-            <a:pPr algn="ctr">
-              <a:defRPr sz="900">
-                <a:solidFill>
-                  <a:srgbClr val="404040"/>
-                </a:solidFill>
-              </a:defRPr>
-            </a:pPr>
-            <a:r>
-              <a:t>Cours TIC 01  •  Diapositive 9/10</a:t>
+            <a:pPr algn="l">
+              <a:defRPr sz="2200" b="1">
+                <a:solidFill>
+                  <a:srgbClr val="1A5C33"/>
+                </a:solidFill>
+              </a:defRPr>
+            </a:pPr>
+            <a:r>
+              <a:t>Fiche cours — Plateforme e-learning (Moodle)</a:t>
+            </a:r>
+          </a:p>
+        </p:txBody>
+      </p:sp>
+      <p:sp>
+        <p:nvSpPr>
+          <p:cNvPr id="4" name="TextBox 3"/>
+          <p:cNvSpPr txBox="1"/>
+          <p:nvPr/>
+        </p:nvSpPr>
+        <p:spPr>
+          <a:xfrm>
+            <a:off x="457200" y="1371600"/>
+            <a:ext cx="7772400" cy="4572000"/>
+          </a:xfrm>
+          <a:prstGeom prst="rect">
+            <a:avLst/>
+          </a:prstGeom>
+          <a:noFill/>
+        </p:spPr>
+        <p:txBody>
+          <a:bodyPr wrap="square">
+            <a:spAutoFit/>
+          </a:bodyPr>
+          <a:lstStyle/>
+          <a:p>
+            <a:pPr>
+              <a:spcAft>
+                <a:spcPts val="600"/>
+              </a:spcAft>
+              <a:defRPr sz="1400">
+                <a:solidFill>
+                  <a:srgbClr val="222222"/>
+                </a:solidFill>
+              </a:defRPr>
+            </a:pPr>
+            <a:r>
+              <a:t>• Public visé :Étudiants ENS — futurs enseignants de langues</a:t>
+            </a:r>
+          </a:p>
+          <a:p>
+            <a:pPr>
+              <a:spcAft>
+                <a:spcPts val="600"/>
+              </a:spcAft>
+              <a:defRPr sz="1400">
+                <a:solidFill>
+                  <a:srgbClr val="222222"/>
+                </a:solidFill>
+              </a:defRPr>
+            </a:pPr>
+            <a:r>
+              <a:t>• Compétences pré-requises :Notions de base en informatique (L1 validée)</a:t>
             </a:r>
           </a:p>
         </p:txBody>
@@ -4651,9 +4861,1003 @@
   <p:clrMapOvr>
     <a:masterClrMapping/>
   </p:clrMapOvr>
-  <p:transition spd="med">
-    <p:fade/>
-  </p:transition>
+</p:sld>
+</file>
+
+<file path=ppt/slides/slide5.xml><?xml version="1.0" encoding="utf-8"?>
+<p:sld xmlns:a="http://schemas.openxmlformats.org/drawingml/2006/main" xmlns:p="http://schemas.openxmlformats.org/presentationml/2006/main" xmlns:r="http://schemas.openxmlformats.org/officeDocument/2006/relationships">
+  <p:cSld>
+    <p:bg>
+      <p:bgPr>
+        <a:solidFill>
+          <a:srgbClr val="FFFFFF"/>
+        </a:solidFill>
+        <a:effectLst/>
+      </p:bgPr>
+    </p:bg>
+    <p:spTree>
+      <p:nvGrpSpPr>
+        <p:cNvPr id="1" name=""/>
+        <p:cNvGrpSpPr/>
+        <p:nvPr/>
+      </p:nvGrpSpPr>
+      <p:grpSpPr/>
+      <p:sp>
+        <p:nvSpPr>
+          <p:cNvPr id="2" name="Rectangle 1"/>
+          <p:cNvSpPr/>
+          <p:nvPr/>
+        </p:nvSpPr>
+        <p:spPr>
+          <a:xfrm>
+            <a:off x="0" y="0"/>
+            <a:ext cx="109728" cy="6858000"/>
+          </a:xfrm>
+          <a:prstGeom prst="rect">
+            <a:avLst/>
+          </a:prstGeom>
+          <a:solidFill>
+            <a:srgbClr val="2C6E49"/>
+          </a:solidFill>
+          <a:ln>
+            <a:noFill/>
+          </a:ln>
+        </p:spPr>
+        <p:style>
+          <a:lnRef idx="1">
+            <a:schemeClr val="accent1"/>
+          </a:lnRef>
+          <a:fillRef idx="3">
+            <a:schemeClr val="accent1"/>
+          </a:fillRef>
+          <a:effectRef idx="2">
+            <a:schemeClr val="accent1"/>
+          </a:effectRef>
+          <a:fontRef idx="minor">
+            <a:schemeClr val="lt1"/>
+          </a:fontRef>
+        </p:style>
+        <p:txBody>
+          <a:bodyPr rtlCol="0" anchor="ctr"/>
+          <a:lstStyle/>
+          <a:p>
+            <a:pPr algn="ctr"/>
+          </a:p>
+        </p:txBody>
+      </p:sp>
+      <p:sp>
+        <p:nvSpPr>
+          <p:cNvPr id="3" name="TextBox 2"/>
+          <p:cNvSpPr txBox="1"/>
+          <p:nvPr/>
+        </p:nvSpPr>
+        <p:spPr>
+          <a:xfrm>
+            <a:off x="457200" y="365760"/>
+            <a:ext cx="8229600" cy="640080"/>
+          </a:xfrm>
+          <a:prstGeom prst="rect">
+            <a:avLst/>
+          </a:prstGeom>
+          <a:noFill/>
+        </p:spPr>
+        <p:txBody>
+          <a:bodyPr wrap="square">
+            <a:spAutoFit/>
+          </a:bodyPr>
+          <a:lstStyle/>
+          <a:p>
+            <a:pPr algn="l">
+              <a:defRPr sz="2200" b="1">
+                <a:solidFill>
+                  <a:srgbClr val="1A5C33"/>
+                </a:solidFill>
+              </a:defRPr>
+            </a:pPr>
+            <a:r>
+              <a:t>Objectifs de l'enseignement</a:t>
+            </a:r>
+          </a:p>
+        </p:txBody>
+      </p:sp>
+      <p:sp>
+        <p:nvSpPr>
+          <p:cNvPr id="4" name="TextBox 3"/>
+          <p:cNvSpPr txBox="1"/>
+          <p:nvPr/>
+        </p:nvSpPr>
+        <p:spPr>
+          <a:xfrm>
+            <a:off x="457200" y="1371600"/>
+            <a:ext cx="7772400" cy="4572000"/>
+          </a:xfrm>
+          <a:prstGeom prst="rect">
+            <a:avLst/>
+          </a:prstGeom>
+          <a:noFill/>
+        </p:spPr>
+        <p:txBody>
+          <a:bodyPr wrap="square">
+            <a:spAutoFit/>
+          </a:bodyPr>
+          <a:lstStyle/>
+          <a:p>
+            <a:pPr>
+              <a:spcAft>
+                <a:spcPts val="600"/>
+              </a:spcAft>
+              <a:defRPr sz="1400">
+                <a:solidFill>
+                  <a:srgbClr val="222222"/>
+                </a:solidFill>
+              </a:defRPr>
+            </a:pPr>
+            <a:r>
+              <a:t>• Savoir :- Définir les TIC, leur évolution et leurs trois dimensions constitutive</a:t>
+            </a:r>
+            <a:br/>
+            <a:r>
+              <a:t>- Distinguer les notions de technique, information et communication</a:t>
+            </a:r>
+            <a:br/>
+            <a:r>
+              <a:t>- Comprendre l'intégration pédagogique des TIC en didactique des langues</a:t>
+            </a:r>
+            <a:br/>
+            <a:r>
+              <a:t>- Connaître le modèle SAMR et la taxonomie de Bloom numérique</a:t>
+            </a:r>
+          </a:p>
+          <a:p>
+            <a:pPr>
+              <a:spcAft>
+                <a:spcPts val="600"/>
+              </a:spcAft>
+              <a:defRPr sz="1400">
+                <a:solidFill>
+                  <a:srgbClr val="222222"/>
+                </a:solidFill>
+              </a:defRPr>
+            </a:pPr>
+            <a:r>
+              <a:t>• Savoir-faire :- Utiliser les outils TIC pour concevoir des séquences pédagogiques</a:t>
+            </a:r>
+            <a:br/>
+            <a:r>
+              <a:t>- Évaluer et sélectionner des ressources numériques adaptées à la classe de langues</a:t>
+            </a:r>
+            <a:br/>
+            <a:r>
+              <a:t>- Créer des supports de cours interactifs avec les outils disponibles</a:t>
+            </a:r>
+            <a:br/>
+            <a:r>
+              <a:t>- Analyser une situation pédagogique selon le modèle SAMR</a:t>
+            </a:r>
+          </a:p>
+          <a:p>
+            <a:pPr>
+              <a:spcAft>
+                <a:spcPts val="600"/>
+              </a:spcAft>
+              <a:defRPr sz="1400">
+                <a:solidFill>
+                  <a:srgbClr val="222222"/>
+                </a:solidFill>
+              </a:defRPr>
+            </a:pPr>
+            <a:r>
+              <a:t>• Savoir-être :- Adopter une posture critique face aux outils numériques</a:t>
+            </a:r>
+            <a:br/>
+            <a:r>
+              <a:t>- Intégrer les TIC de manière éthique et responsable dans sa pratique</a:t>
+            </a:r>
+            <a:br/>
+            <a:r>
+              <a:t>- Développer une veille professionnelle sur les innovations EdTech</a:t>
+            </a:r>
+          </a:p>
+          <a:p>
+            <a:pPr>
+              <a:spcAft>
+                <a:spcPts val="600"/>
+              </a:spcAft>
+              <a:defRPr sz="1400">
+                <a:solidFill>
+                  <a:srgbClr val="222222"/>
+                </a:solidFill>
+              </a:defRPr>
+            </a:pPr>
+            <a:r>
+              <a:t>• Mode d'évaluation :TD 40 % + Projet pédagogique TIC 30 % + Examen 30 %</a:t>
+            </a:r>
+          </a:p>
+        </p:txBody>
+      </p:sp>
+    </p:spTree>
+  </p:cSld>
+  <p:clrMapOvr>
+    <a:masterClrMapping/>
+  </p:clrMapOvr>
+</p:sld>
+</file>
+
+<file path=ppt/slides/slide6.xml><?xml version="1.0" encoding="utf-8"?>
+<p:sld xmlns:a="http://schemas.openxmlformats.org/drawingml/2006/main" xmlns:p="http://schemas.openxmlformats.org/presentationml/2006/main" xmlns:r="http://schemas.openxmlformats.org/officeDocument/2006/relationships">
+  <p:cSld>
+    <p:bg>
+      <p:bgPr>
+        <a:solidFill>
+          <a:srgbClr val="FFFFFF"/>
+        </a:solidFill>
+        <a:effectLst/>
+      </p:bgPr>
+    </p:bg>
+    <p:spTree>
+      <p:nvGrpSpPr>
+        <p:cNvPr id="1" name=""/>
+        <p:cNvGrpSpPr/>
+        <p:nvPr/>
+      </p:nvGrpSpPr>
+      <p:grpSpPr/>
+      <p:sp>
+        <p:nvSpPr>
+          <p:cNvPr id="2" name="Rectangle 1"/>
+          <p:cNvSpPr/>
+          <p:nvPr/>
+        </p:nvSpPr>
+        <p:spPr>
+          <a:xfrm>
+            <a:off x="0" y="0"/>
+            <a:ext cx="109728" cy="6858000"/>
+          </a:xfrm>
+          <a:prstGeom prst="rect">
+            <a:avLst/>
+          </a:prstGeom>
+          <a:solidFill>
+            <a:srgbClr val="2C6E49"/>
+          </a:solidFill>
+          <a:ln>
+            <a:noFill/>
+          </a:ln>
+        </p:spPr>
+        <p:style>
+          <a:lnRef idx="1">
+            <a:schemeClr val="accent1"/>
+          </a:lnRef>
+          <a:fillRef idx="3">
+            <a:schemeClr val="accent1"/>
+          </a:fillRef>
+          <a:effectRef idx="2">
+            <a:schemeClr val="accent1"/>
+          </a:effectRef>
+          <a:fontRef idx="minor">
+            <a:schemeClr val="lt1"/>
+          </a:fontRef>
+        </p:style>
+        <p:txBody>
+          <a:bodyPr rtlCol="0" anchor="ctr"/>
+          <a:lstStyle/>
+          <a:p>
+            <a:pPr algn="ctr"/>
+          </a:p>
+        </p:txBody>
+      </p:sp>
+      <p:sp>
+        <p:nvSpPr>
+          <p:cNvPr id="3" name="TextBox 2"/>
+          <p:cNvSpPr txBox="1"/>
+          <p:nvPr/>
+        </p:nvSpPr>
+        <p:spPr>
+          <a:xfrm>
+            <a:off x="457200" y="365760"/>
+            <a:ext cx="8229600" cy="640080"/>
+          </a:xfrm>
+          <a:prstGeom prst="rect">
+            <a:avLst/>
+          </a:prstGeom>
+          <a:noFill/>
+        </p:spPr>
+        <p:txBody>
+          <a:bodyPr wrap="square">
+            <a:spAutoFit/>
+          </a:bodyPr>
+          <a:lstStyle/>
+          <a:p>
+            <a:pPr algn="l">
+              <a:defRPr sz="2200" b="1">
+                <a:solidFill>
+                  <a:srgbClr val="1A5C33"/>
+                </a:solidFill>
+              </a:defRPr>
+            </a:pPr>
+            <a:r>
+              <a:t>Contexte réglementaire algérien</a:t>
+            </a:r>
+          </a:p>
+        </p:txBody>
+      </p:sp>
+      <p:sp>
+        <p:nvSpPr>
+          <p:cNvPr id="4" name="TextBox 3"/>
+          <p:cNvSpPr txBox="1"/>
+          <p:nvPr/>
+        </p:nvSpPr>
+        <p:spPr>
+          <a:xfrm>
+            <a:off x="457200" y="1371600"/>
+            <a:ext cx="7772400" cy="4572000"/>
+          </a:xfrm>
+          <a:prstGeom prst="rect">
+            <a:avLst/>
+          </a:prstGeom>
+          <a:noFill/>
+        </p:spPr>
+        <p:txBody>
+          <a:bodyPr wrap="square">
+            <a:spAutoFit/>
+          </a:bodyPr>
+          <a:lstStyle/>
+          <a:p>
+            <a:pPr>
+              <a:spcAft>
+                <a:spcPts val="600"/>
+              </a:spcAft>
+              <a:defRPr sz="1400">
+                <a:solidFill>
+                  <a:srgbClr val="222222"/>
+                </a:solidFill>
+              </a:defRPr>
+            </a:pPr>
+            <a:r>
+              <a:t>• Ce cours s'inscrit dans le cadre réglementaire algérien de la formation des enseignants :</a:t>
+            </a:r>
+          </a:p>
+          <a:p>
+            <a:pPr>
+              <a:spcAft>
+                <a:spcPts val="600"/>
+              </a:spcAft>
+              <a:defRPr sz="1400">
+                <a:solidFill>
+                  <a:srgbClr val="222222"/>
+                </a:solidFill>
+              </a:defRPr>
+            </a:pPr>
+            <a:r>
+              <a:t>• Arrêté ministériel portant création des ENS (cycle Licence/Master)— définit le cadre institutionnel des Écoles Normales Supérieures et leur mission de formation des enseignants.</a:t>
+            </a:r>
+          </a:p>
+          <a:p>
+            <a:pPr>
+              <a:spcAft>
+                <a:spcPts val="600"/>
+              </a:spcAft>
+              <a:defRPr sz="1400">
+                <a:solidFill>
+                  <a:srgbClr val="222222"/>
+                </a:solidFill>
+              </a:defRPr>
+            </a:pPr>
+            <a:r>
+              <a:t>• Arrêté 712 fixant le programme des concours ENS— détermine les épreuves et les programmes des concours d'accès aux ENS, en cohérence avec les contenus enseignés.</a:t>
+            </a:r>
+          </a:p>
+          <a:p>
+            <a:pPr>
+              <a:spcAft>
+                <a:spcPts val="600"/>
+              </a:spcAft>
+              <a:defRPr sz="1400">
+                <a:solidFill>
+                  <a:srgbClr val="222222"/>
+                </a:solidFill>
+              </a:defRPr>
+            </a:pPr>
+            <a:r>
+              <a:t>• Programme national de TIC pour les filières de langues étrangères— fixe les objectifs, contenus et volumes horaires du module TIC dans la formation initiale des enseignants.</a:t>
+            </a:r>
+          </a:p>
+          <a:p>
+            <a:pPr>
+              <a:spcAft>
+                <a:spcPts val="600"/>
+              </a:spcAft>
+              <a:defRPr sz="1400">
+                <a:solidFill>
+                  <a:srgbClr val="222222"/>
+                </a:solidFill>
+              </a:defRPr>
+            </a:pPr>
+            <a:r>
+              <a:t>• Référentiel des compétences numériques algérien— cadre national (en cours d'élaboration) définissant les compétences numériques attendues des enseignants et des étudiants.</a:t>
+            </a:r>
+          </a:p>
+          <a:p>
+            <a:pPr>
+              <a:spcAft>
+                <a:spcPts val="600"/>
+              </a:spcAft>
+              <a:defRPr sz="1400">
+                <a:solidFill>
+                  <a:srgbClr val="222222"/>
+                </a:solidFill>
+              </a:defRPr>
+            </a:pPr>
+            <a:r>
+              <a:t>• Benchmark des 10 universités algériennes— étude comparative des pratiques d'enseignement des TIC, consultée pour aligner ce cours sur les standards nationaux (BENCHMARK_10_UNIVERSITES_ELEARNING.md).</a:t>
+            </a:r>
+          </a:p>
+        </p:txBody>
+      </p:sp>
+    </p:spTree>
+  </p:cSld>
+  <p:clrMapOvr>
+    <a:masterClrMapping/>
+  </p:clrMapOvr>
+</p:sld>
+</file>
+
+<file path=ppt/slides/slide7.xml><?xml version="1.0" encoding="utf-8"?>
+<p:sld xmlns:a="http://schemas.openxmlformats.org/drawingml/2006/main" xmlns:p="http://schemas.openxmlformats.org/presentationml/2006/main" xmlns:r="http://schemas.openxmlformats.org/officeDocument/2006/relationships">
+  <p:cSld>
+    <p:bg>
+      <p:bgPr>
+        <a:solidFill>
+          <a:srgbClr val="FFFFFF"/>
+        </a:solidFill>
+        <a:effectLst/>
+      </p:bgPr>
+    </p:bg>
+    <p:spTree>
+      <p:nvGrpSpPr>
+        <p:cNvPr id="1" name=""/>
+        <p:cNvGrpSpPr/>
+        <p:nvPr/>
+      </p:nvGrpSpPr>
+      <p:grpSpPr/>
+      <p:sp>
+        <p:nvSpPr>
+          <p:cNvPr id="2" name="Rectangle 1"/>
+          <p:cNvSpPr/>
+          <p:nvPr/>
+        </p:nvSpPr>
+        <p:spPr>
+          <a:xfrm>
+            <a:off x="0" y="0"/>
+            <a:ext cx="109728" cy="6858000"/>
+          </a:xfrm>
+          <a:prstGeom prst="rect">
+            <a:avLst/>
+          </a:prstGeom>
+          <a:solidFill>
+            <a:srgbClr val="2C6E49"/>
+          </a:solidFill>
+          <a:ln>
+            <a:noFill/>
+          </a:ln>
+        </p:spPr>
+        <p:style>
+          <a:lnRef idx="1">
+            <a:schemeClr val="accent1"/>
+          </a:lnRef>
+          <a:fillRef idx="3">
+            <a:schemeClr val="accent1"/>
+          </a:fillRef>
+          <a:effectRef idx="2">
+            <a:schemeClr val="accent1"/>
+          </a:effectRef>
+          <a:fontRef idx="minor">
+            <a:schemeClr val="lt1"/>
+          </a:fontRef>
+        </p:style>
+        <p:txBody>
+          <a:bodyPr rtlCol="0" anchor="ctr"/>
+          <a:lstStyle/>
+          <a:p>
+            <a:pPr algn="ctr"/>
+          </a:p>
+        </p:txBody>
+      </p:sp>
+      <p:sp>
+        <p:nvSpPr>
+          <p:cNvPr id="3" name="TextBox 2"/>
+          <p:cNvSpPr txBox="1"/>
+          <p:nvPr/>
+        </p:nvSpPr>
+        <p:spPr>
+          <a:xfrm>
+            <a:off x="457200" y="365760"/>
+            <a:ext cx="8229600" cy="640080"/>
+          </a:xfrm>
+          <a:prstGeom prst="rect">
+            <a:avLst/>
+          </a:prstGeom>
+          <a:noFill/>
+        </p:spPr>
+        <p:txBody>
+          <a:bodyPr wrap="square">
+            <a:spAutoFit/>
+          </a:bodyPr>
+          <a:lstStyle/>
+          <a:p>
+            <a:pPr algn="l">
+              <a:defRPr sz="2200" b="1">
+                <a:solidFill>
+                  <a:srgbClr val="1A5C33"/>
+                </a:solidFill>
+              </a:defRPr>
+            </a:pPr>
+            <a:r>
+              <a:t>Plan du Cours</a:t>
+            </a:r>
+          </a:p>
+        </p:txBody>
+      </p:sp>
+      <p:sp>
+        <p:nvSpPr>
+          <p:cNvPr id="4" name="TextBox 3"/>
+          <p:cNvSpPr txBox="1"/>
+          <p:nvPr/>
+        </p:nvSpPr>
+        <p:spPr>
+          <a:xfrm>
+            <a:off x="457200" y="1371600"/>
+            <a:ext cx="7772400" cy="4572000"/>
+          </a:xfrm>
+          <a:prstGeom prst="rect">
+            <a:avLst/>
+          </a:prstGeom>
+          <a:noFill/>
+        </p:spPr>
+        <p:txBody>
+          <a:bodyPr wrap="square">
+            <a:spAutoFit/>
+          </a:bodyPr>
+          <a:lstStyle/>
+          <a:p>
+            <a:pPr>
+              <a:spcAft>
+                <a:spcPts val="600"/>
+              </a:spcAft>
+              <a:defRPr sz="1400">
+                <a:solidFill>
+                  <a:srgbClr val="222222"/>
+                </a:solidFill>
+              </a:defRPr>
+            </a:pPr>
+            <a:r>
+              <a:t>• Définition et évolution des TIC(15 min)</a:t>
+            </a:r>
+          </a:p>
+          <a:p>
+            <a:pPr>
+              <a:spcAft>
+                <a:spcPts val="600"/>
+              </a:spcAft>
+              <a:defRPr sz="1400">
+                <a:solidFill>
+                  <a:srgbClr val="222222"/>
+                </a:solidFill>
+              </a:defRPr>
+            </a:pPr>
+            <a:r>
+              <a:t>• Les trois dimensions des TIC(10 min)</a:t>
+            </a:r>
+          </a:p>
+          <a:p>
+            <a:pPr>
+              <a:spcAft>
+                <a:spcPts val="600"/>
+              </a:spcAft>
+              <a:defRPr sz="1400">
+                <a:solidFill>
+                  <a:srgbClr val="222222"/>
+                </a:solidFill>
+              </a:defRPr>
+            </a:pPr>
+            <a:r>
+              <a:t>• TIC et pédagogie : intégration en classe de langues(20 min)</a:t>
+            </a:r>
+          </a:p>
+          <a:p>
+            <a:pPr>
+              <a:spcAft>
+                <a:spcPts val="600"/>
+              </a:spcAft>
+              <a:defRPr sz="1400">
+                <a:solidFill>
+                  <a:srgbClr val="222222"/>
+                </a:solidFill>
+              </a:defRPr>
+            </a:pPr>
+            <a:r>
+              <a:t>• Modèle SAMR et Taxonomie de Bloom numérique(15 min)</a:t>
+            </a:r>
+          </a:p>
+          <a:p>
+            <a:pPr>
+              <a:spcAft>
+                <a:spcPts val="600"/>
+              </a:spcAft>
+              <a:defRPr sz="1400">
+                <a:solidFill>
+                  <a:srgbClr val="222222"/>
+                </a:solidFill>
+              </a:defRPr>
+            </a:pPr>
+            <a:r>
+              <a:t>• Outils TIC pour l'enseignant de langues(15 min)</a:t>
+            </a:r>
+          </a:p>
+          <a:p>
+            <a:pPr>
+              <a:spcAft>
+                <a:spcPts val="600"/>
+              </a:spcAft>
+              <a:defRPr sz="1400">
+                <a:solidFill>
+                  <a:srgbClr val="222222"/>
+                </a:solidFill>
+              </a:defRPr>
+            </a:pPr>
+            <a:r>
+              <a:t>• Compétences numériques du référentiel enseignant(10 min)</a:t>
+            </a:r>
+          </a:p>
+          <a:p>
+            <a:pPr>
+              <a:spcAft>
+                <a:spcPts val="600"/>
+              </a:spcAft>
+              <a:defRPr sz="1400">
+                <a:solidFill>
+                  <a:srgbClr val="222222"/>
+                </a:solidFill>
+              </a:defRPr>
+            </a:pPr>
+            <a:r>
+              <a:t>• Éthique et sécurité en contexte pédagogique(5 min)</a:t>
+            </a:r>
+          </a:p>
+        </p:txBody>
+      </p:sp>
+    </p:spTree>
+  </p:cSld>
+  <p:clrMapOvr>
+    <a:masterClrMapping/>
+  </p:clrMapOvr>
+</p:sld>
+</file>
+
+<file path=ppt/slides/slide8.xml><?xml version="1.0" encoding="utf-8"?>
+<p:sld xmlns:a="http://schemas.openxmlformats.org/drawingml/2006/main" xmlns:p="http://schemas.openxmlformats.org/presentationml/2006/main" xmlns:r="http://schemas.openxmlformats.org/officeDocument/2006/relationships">
+  <p:cSld>
+    <p:bg>
+      <p:bgPr>
+        <a:solidFill>
+          <a:srgbClr val="FFFFFF"/>
+        </a:solidFill>
+        <a:effectLst/>
+      </p:bgPr>
+    </p:bg>
+    <p:spTree>
+      <p:nvGrpSpPr>
+        <p:cNvPr id="1" name=""/>
+        <p:cNvGrpSpPr/>
+        <p:nvPr/>
+      </p:nvGrpSpPr>
+      <p:grpSpPr/>
+      <p:sp>
+        <p:nvSpPr>
+          <p:cNvPr id="2" name="Rectangle 1"/>
+          <p:cNvSpPr/>
+          <p:nvPr/>
+        </p:nvSpPr>
+        <p:spPr>
+          <a:xfrm>
+            <a:off x="0" y="0"/>
+            <a:ext cx="109728" cy="6858000"/>
+          </a:xfrm>
+          <a:prstGeom prst="rect">
+            <a:avLst/>
+          </a:prstGeom>
+          <a:solidFill>
+            <a:srgbClr val="2C6E49"/>
+          </a:solidFill>
+          <a:ln>
+            <a:noFill/>
+          </a:ln>
+        </p:spPr>
+        <p:style>
+          <a:lnRef idx="1">
+            <a:schemeClr val="accent1"/>
+          </a:lnRef>
+          <a:fillRef idx="3">
+            <a:schemeClr val="accent1"/>
+          </a:fillRef>
+          <a:effectRef idx="2">
+            <a:schemeClr val="accent1"/>
+          </a:effectRef>
+          <a:fontRef idx="minor">
+            <a:schemeClr val="lt1"/>
+          </a:fontRef>
+        </p:style>
+        <p:txBody>
+          <a:bodyPr rtlCol="0" anchor="ctr"/>
+          <a:lstStyle/>
+          <a:p>
+            <a:pPr algn="ctr"/>
+          </a:p>
+        </p:txBody>
+      </p:sp>
+      <p:sp>
+        <p:nvSpPr>
+          <p:cNvPr id="3" name="TextBox 2"/>
+          <p:cNvSpPr txBox="1"/>
+          <p:nvPr/>
+        </p:nvSpPr>
+        <p:spPr>
+          <a:xfrm>
+            <a:off x="457200" y="365760"/>
+            <a:ext cx="8229600" cy="640080"/>
+          </a:xfrm>
+          <a:prstGeom prst="rect">
+            <a:avLst/>
+          </a:prstGeom>
+          <a:noFill/>
+        </p:spPr>
+        <p:txBody>
+          <a:bodyPr wrap="square">
+            <a:spAutoFit/>
+          </a:bodyPr>
+          <a:lstStyle/>
+          <a:p>
+            <a:pPr algn="l">
+              <a:defRPr sz="2200" b="1">
+                <a:solidFill>
+                  <a:srgbClr val="1A5C33"/>
+                </a:solidFill>
+              </a:defRPr>
+            </a:pPr>
+            <a:r>
+              <a:t>1. Définition et Évolution des TIC(15 min)</a:t>
+            </a:r>
+          </a:p>
+        </p:txBody>
+      </p:sp>
+      <p:sp>
+        <p:nvSpPr>
+          <p:cNvPr id="4" name="TextBox 3"/>
+          <p:cNvSpPr txBox="1"/>
+          <p:nvPr/>
+        </p:nvSpPr>
+        <p:spPr>
+          <a:xfrm>
+            <a:off x="457200" y="1371600"/>
+            <a:ext cx="7772400" cy="4572000"/>
+          </a:xfrm>
+          <a:prstGeom prst="rect">
+            <a:avLst/>
+          </a:prstGeom>
+          <a:noFill/>
+        </p:spPr>
+        <p:txBody>
+          <a:bodyPr wrap="square">
+            <a:spAutoFit/>
+          </a:bodyPr>
+          <a:lstStyle/>
+          <a:p>
+            <a:pPr>
+              <a:spcAft>
+                <a:spcPts val="600"/>
+              </a:spcAft>
+              <a:defRPr sz="1400">
+                <a:solidFill>
+                  <a:srgbClr val="222222"/>
+                </a:solidFill>
+              </a:defRPr>
+            </a:pPr>
+            <a:r>
+              <a:t>• Les Technologies de l'Information et de la Communication (TIC) regroupent l'ensemble des technologies issues de la convergence de l'informatique, des télécommunications et du multimédia. Leur évolution rapide transforme en profondeur les pratiques d'enseignement et d'apprentissage, en particulier dans le domaine des langues étrangères.</a:t>
+            </a:r>
+          </a:p>
+          <a:p>
+            <a:pPr>
+              <a:spcAft>
+                <a:spcPts val="600"/>
+              </a:spcAft>
+              <a:defRPr sz="1400">
+                <a:solidFill>
+                  <a:srgbClr val="222222"/>
+                </a:solidFill>
+              </a:defRPr>
+            </a:pPr>
+            <a:r>
+              <a:t>• Évolution historique des TIC en contexte pédagogique :</a:t>
+            </a:r>
+          </a:p>
+          <a:p>
+            <a:pPr>
+              <a:spcAft>
+                <a:spcPts val="600"/>
+              </a:spcAft>
+              <a:defRPr sz="1400">
+                <a:solidFill>
+                  <a:srgbClr val="222222"/>
+                </a:solidFill>
+              </a:defRPr>
+            </a:pPr>
+            <a:r>
+              <a:t>• Pour le futur enseignant de langues, les TIC ne sont pas seulement des outils personnels mais des instruments pédagogiques à intégrer dans sa pratique quotidienne. La maîtrise de ces technologies est devenue une compétence professionnelle fondamentale, au même titre que la didactique ou la linguistique.</a:t>
+            </a:r>
+          </a:p>
+        </p:txBody>
+      </p:sp>
+    </p:spTree>
+  </p:cSld>
+  <p:clrMapOvr>
+    <a:masterClrMapping/>
+  </p:clrMapOvr>
+</p:sld>
+</file>
+
+<file path=ppt/slides/slide9.xml><?xml version="1.0" encoding="utf-8"?>
+<p:sld xmlns:a="http://schemas.openxmlformats.org/drawingml/2006/main" xmlns:p="http://schemas.openxmlformats.org/presentationml/2006/main" xmlns:r="http://schemas.openxmlformats.org/officeDocument/2006/relationships">
+  <p:cSld>
+    <p:bg>
+      <p:bgPr>
+        <a:solidFill>
+          <a:srgbClr val="FFFFFF"/>
+        </a:solidFill>
+        <a:effectLst/>
+      </p:bgPr>
+    </p:bg>
+    <p:spTree>
+      <p:nvGrpSpPr>
+        <p:cNvPr id="1" name=""/>
+        <p:cNvGrpSpPr/>
+        <p:nvPr/>
+      </p:nvGrpSpPr>
+      <p:grpSpPr/>
+      <p:sp>
+        <p:nvSpPr>
+          <p:cNvPr id="2" name="Rectangle 1"/>
+          <p:cNvSpPr/>
+          <p:nvPr/>
+        </p:nvSpPr>
+        <p:spPr>
+          <a:xfrm>
+            <a:off x="0" y="0"/>
+            <a:ext cx="109728" cy="6858000"/>
+          </a:xfrm>
+          <a:prstGeom prst="rect">
+            <a:avLst/>
+          </a:prstGeom>
+          <a:solidFill>
+            <a:srgbClr val="2C6E49"/>
+          </a:solidFill>
+          <a:ln>
+            <a:noFill/>
+          </a:ln>
+        </p:spPr>
+        <p:style>
+          <a:lnRef idx="1">
+            <a:schemeClr val="accent1"/>
+          </a:lnRef>
+          <a:fillRef idx="3">
+            <a:schemeClr val="accent1"/>
+          </a:fillRef>
+          <a:effectRef idx="2">
+            <a:schemeClr val="accent1"/>
+          </a:effectRef>
+          <a:fontRef idx="minor">
+            <a:schemeClr val="lt1"/>
+          </a:fontRef>
+        </p:style>
+        <p:txBody>
+          <a:bodyPr rtlCol="0" anchor="ctr"/>
+          <a:lstStyle/>
+          <a:p>
+            <a:pPr algn="ctr"/>
+          </a:p>
+        </p:txBody>
+      </p:sp>
+      <p:sp>
+        <p:nvSpPr>
+          <p:cNvPr id="3" name="TextBox 2"/>
+          <p:cNvSpPr txBox="1"/>
+          <p:nvPr/>
+        </p:nvSpPr>
+        <p:spPr>
+          <a:xfrm>
+            <a:off x="457200" y="365760"/>
+            <a:ext cx="8229600" cy="640080"/>
+          </a:xfrm>
+          <a:prstGeom prst="rect">
+            <a:avLst/>
+          </a:prstGeom>
+          <a:noFill/>
+        </p:spPr>
+        <p:txBody>
+          <a:bodyPr wrap="square">
+            <a:spAutoFit/>
+          </a:bodyPr>
+          <a:lstStyle/>
+          <a:p>
+            <a:pPr algn="l">
+              <a:defRPr sz="2200" b="1">
+                <a:solidFill>
+                  <a:srgbClr val="1A5C33"/>
+                </a:solidFill>
+              </a:defRPr>
+            </a:pPr>
+            <a:r>
+              <a:t>2. Les Trois Dimensions des TIC(10 min)</a:t>
+            </a:r>
+          </a:p>
+        </p:txBody>
+      </p:sp>
+      <p:sp>
+        <p:nvSpPr>
+          <p:cNvPr id="4" name="TextBox 3"/>
+          <p:cNvSpPr txBox="1"/>
+          <p:nvPr/>
+        </p:nvSpPr>
+        <p:spPr>
+          <a:xfrm>
+            <a:off x="457200" y="1371600"/>
+            <a:ext cx="7772400" cy="4572000"/>
+          </a:xfrm>
+          <a:prstGeom prst="rect">
+            <a:avLst/>
+          </a:prstGeom>
+          <a:noFill/>
+        </p:spPr>
+        <p:txBody>
+          <a:bodyPr wrap="square">
+            <a:spAutoFit/>
+          </a:bodyPr>
+          <a:lstStyle/>
+          <a:p>
+            <a:pPr>
+              <a:spcAft>
+                <a:spcPts val="600"/>
+              </a:spcAft>
+              <a:defRPr sz="1400">
+                <a:solidFill>
+                  <a:srgbClr val="222222"/>
+                </a:solidFill>
+              </a:defRPr>
+            </a:pPr>
+            <a:r>
+              <a:t>• Les TIC se décomposent en trois dimensions interdépendantes :</a:t>
+            </a:r>
+          </a:p>
+          <a:p>
+            <a:pPr>
+              <a:spcAft>
+                <a:spcPts val="600"/>
+              </a:spcAft>
+              <a:defRPr sz="1400">
+                <a:solidFill>
+                  <a:srgbClr val="222222"/>
+                </a:solidFill>
+              </a:defRPr>
+            </a:pPr>
+            <a:r>
+              <a:t>• L'enseignant de langues doit maîtriser ces trois dimensions pour concevoir des séquences pédagogiques efficaces. La dimension communication est particulièrement importante en didactique des langues car elle permet l'interaction authentique entre apprenants et avec des locuteurs natifs.</a:t>
+            </a:r>
+          </a:p>
+        </p:txBody>
+      </p:sp>
+    </p:spTree>
+  </p:cSld>
+  <p:clrMapOvr>
+    <a:masterClrMapping/>
+  </p:clrMapOvr>
 </p:sld>
 </file>
 
@@ -4975,319 +6179,4 @@
   </a:objectDefaults>
   <a:extraClrSchemeLst/>
 </a:theme>
-</file>
-
-<file path=ppt/theme/theme2.xml><?xml version="1.0" encoding="utf-8"?>
-<a:theme xmlns:a="http://schemas.openxmlformats.org/drawingml/2006/main" name="Thème Office">
-  <a:themeElements>
-    <a:clrScheme name="Office">
-      <a:dk1>
-        <a:sysClr val="windowText" lastClr="000000"/>
-      </a:dk1>
-      <a:lt1>
-        <a:sysClr val="window" lastClr="FFFFFF"/>
-      </a:lt1>
-      <a:dk2>
-        <a:srgbClr val="0E2841"/>
-      </a:dk2>
-      <a:lt2>
-        <a:srgbClr val="E8E8E8"/>
-      </a:lt2>
-      <a:accent1>
-        <a:srgbClr val="156082"/>
-      </a:accent1>
-      <a:accent2>
-        <a:srgbClr val="E97132"/>
-      </a:accent2>
-      <a:accent3>
-        <a:srgbClr val="196B24"/>
-      </a:accent3>
-      <a:accent4>
-        <a:srgbClr val="0F9ED5"/>
-      </a:accent4>
-      <a:accent5>
-        <a:srgbClr val="A02B93"/>
-      </a:accent5>
-      <a:accent6>
-        <a:srgbClr val="4EA72E"/>
-      </a:accent6>
-      <a:hlink>
-        <a:srgbClr val="467886"/>
-      </a:hlink>
-      <a:folHlink>
-        <a:srgbClr val="96607D"/>
-      </a:folHlink>
-    </a:clrScheme>
-    <a:fontScheme name="Office">
-      <a:majorFont>
-        <a:latin typeface="Aptos Display" panose="02110004020202020204"/>
-        <a:ea typeface=""/>
-        <a:cs typeface=""/>
-        <a:font script="Jpan" typeface="游ゴシック Light"/>
-        <a:font script="Hang" typeface="맑은 고딕"/>
-        <a:font script="Hans" typeface="等线 Light"/>
-        <a:font script="Hant" typeface="新細明體"/>
-        <a:font script="Arab" typeface="Times New Roman"/>
-        <a:font script="Hebr" typeface="Times New Roman"/>
-        <a:font script="Thai" typeface="Angsana New"/>
-        <a:font script="Ethi" typeface="Nyala"/>
-        <a:font script="Beng" typeface="Vrinda"/>
-        <a:font script="Gujr" typeface="Shruti"/>
-        <a:font script="Khmr" typeface="MoolBoran"/>
-        <a:font script="Knda" typeface="Tunga"/>
-        <a:font script="Guru" typeface="Raavi"/>
-        <a:font script="Cans" typeface="Euphemia"/>
-        <a:font script="Cher" typeface="Plantagenet Cherokee"/>
-        <a:font script="Yiii" typeface="Microsoft Yi Baiti"/>
-        <a:font script="Tibt" typeface="Microsoft Himalaya"/>
-        <a:font script="Thaa" typeface="MV Boli"/>
-        <a:font script="Deva" typeface="Mangal"/>
-        <a:font script="Telu" typeface="Gautami"/>
-        <a:font script="Taml" typeface="Latha"/>
-        <a:font script="Syrc" typeface="Estrangelo Edessa"/>
-        <a:font script="Orya" typeface="Kalinga"/>
-        <a:font script="Mlym" typeface="Kartika"/>
-        <a:font script="Laoo" typeface="DokChampa"/>
-        <a:font script="Sinh" typeface="Iskoola Pota"/>
-        <a:font script="Mong" typeface="Mongolian Baiti"/>
-        <a:font script="Viet" typeface="Times New Roman"/>
-        <a:font script="Uigh" typeface="Microsoft Uighur"/>
-        <a:font script="Geor" typeface="Sylfaen"/>
-        <a:font script="Armn" typeface="Arial"/>
-        <a:font script="Bugi" typeface="Leelawadee UI"/>
-        <a:font script="Bopo" typeface="Microsoft JhengHei"/>
-        <a:font script="Java" typeface="Javanese Text"/>
-        <a:font script="Lisu" typeface="Segoe UI"/>
-        <a:font script="Mymr" typeface="Myanmar Text"/>
-        <a:font script="Nkoo" typeface="Ebrima"/>
-        <a:font script="Olck" typeface="Nirmala UI"/>
-        <a:font script="Osma" typeface="Ebrima"/>
-        <a:font script="Phag" typeface="Phagspa"/>
-        <a:font script="Syrn" typeface="Estrangelo Edessa"/>
-        <a:font script="Syrj" typeface="Estrangelo Edessa"/>
-        <a:font script="Syre" typeface="Estrangelo Edessa"/>
-        <a:font script="Sora" typeface="Nirmala UI"/>
-        <a:font script="Tale" typeface="Microsoft Tai Le"/>
-        <a:font script="Talu" typeface="Microsoft New Tai Lue"/>
-        <a:font script="Tfng" typeface="Ebrima"/>
-      </a:majorFont>
-      <a:minorFont>
-        <a:latin typeface="Aptos" panose="02110004020202020204"/>
-        <a:ea typeface=""/>
-        <a:cs typeface=""/>
-        <a:font script="Jpan" typeface="游ゴシック"/>
-        <a:font script="Hang" typeface="맑은 고딕"/>
-        <a:font script="Hans" typeface="等线"/>
-        <a:font script="Hant" typeface="新細明體"/>
-        <a:font script="Arab" typeface="Arial"/>
-        <a:font script="Hebr" typeface="Arial"/>
-        <a:font script="Thai" typeface="Cordia New"/>
-        <a:font script="Ethi" typeface="Nyala"/>
-        <a:font script="Beng" typeface="Vrinda"/>
-        <a:font script="Gujr" typeface="Shruti"/>
-        <a:font script="Khmr" typeface="DaunPenh"/>
-        <a:font script="Knda" typeface="Tunga"/>
-        <a:font script="Guru" typeface="Raavi"/>
-        <a:font script="Cans" typeface="Euphemia"/>
-        <a:font script="Cher" typeface="Plantagenet Cherokee"/>
-        <a:font script="Yiii" typeface="Microsoft Yi Baiti"/>
-        <a:font script="Tibt" typeface="Microsoft Himalaya"/>
-        <a:font script="Thaa" typeface="MV Boli"/>
-        <a:font script="Deva" typeface="Mangal"/>
-        <a:font script="Telu" typeface="Gautami"/>
-        <a:font script="Taml" typeface="Latha"/>
-        <a:font script="Syrc" typeface="Estrangelo Edessa"/>
-        <a:font script="Orya" typeface="Kalinga"/>
-        <a:font script="Mlym" typeface="Kartika"/>
-        <a:font script="Laoo" typeface="DokChampa"/>
-        <a:font script="Sinh" typeface="Iskoola Pota"/>
-        <a:font script="Mong" typeface="Mongolian Baiti"/>
-        <a:font script="Viet" typeface="Arial"/>
-        <a:font script="Uigh" typeface="Microsoft Uighur"/>
-        <a:font script="Geor" typeface="Sylfaen"/>
-        <a:font script="Armn" typeface="Arial"/>
-        <a:font script="Bugi" typeface="Leelawadee UI"/>
-        <a:font script="Bopo" typeface="Microsoft JhengHei"/>
-        <a:font script="Java" typeface="Javanese Text"/>
-        <a:font script="Lisu" typeface="Segoe UI"/>
-        <a:font script="Mymr" typeface="Myanmar Text"/>
-        <a:font script="Nkoo" typeface="Ebrima"/>
-        <a:font script="Olck" typeface="Nirmala UI"/>
-        <a:font script="Osma" typeface="Ebrima"/>
-        <a:font script="Phag" typeface="Phagspa"/>
-        <a:font script="Syrn" typeface="Estrangelo Edessa"/>
-        <a:font script="Syrj" typeface="Estrangelo Edessa"/>
-        <a:font script="Syre" typeface="Estrangelo Edessa"/>
-        <a:font script="Sora" typeface="Nirmala UI"/>
-        <a:font script="Tale" typeface="Microsoft Tai Le"/>
-        <a:font script="Talu" typeface="Microsoft New Tai Lue"/>
-        <a:font script="Tfng" typeface="Ebrima"/>
-      </a:minorFont>
-    </a:fontScheme>
-    <a:fmtScheme name="Office">
-      <a:fillStyleLst>
-        <a:solidFill>
-          <a:schemeClr val="phClr"/>
-        </a:solidFill>
-        <a:gradFill rotWithShape="1">
-          <a:gsLst>
-            <a:gs pos="0">
-              <a:schemeClr val="phClr">
-                <a:lumMod val="110000"/>
-                <a:satMod val="105000"/>
-                <a:tint val="67000"/>
-              </a:schemeClr>
-            </a:gs>
-            <a:gs pos="50000">
-              <a:schemeClr val="phClr">
-                <a:lumMod val="105000"/>
-                <a:satMod val="103000"/>
-                <a:tint val="73000"/>
-              </a:schemeClr>
-            </a:gs>
-            <a:gs pos="100000">
-              <a:schemeClr val="phClr">
-                <a:lumMod val="105000"/>
-                <a:satMod val="109000"/>
-                <a:tint val="81000"/>
-              </a:schemeClr>
-            </a:gs>
-          </a:gsLst>
-          <a:lin ang="5400000" scaled="0"/>
-        </a:gradFill>
-        <a:gradFill rotWithShape="1">
-          <a:gsLst>
-            <a:gs pos="0">
-              <a:schemeClr val="phClr">
-                <a:satMod val="103000"/>
-                <a:lumMod val="102000"/>
-                <a:tint val="94000"/>
-              </a:schemeClr>
-            </a:gs>
-            <a:gs pos="50000">
-              <a:schemeClr val="phClr">
-                <a:satMod val="110000"/>
-                <a:lumMod val="100000"/>
-                <a:shade val="100000"/>
-              </a:schemeClr>
-            </a:gs>
-            <a:gs pos="100000">
-              <a:schemeClr val="phClr">
-                <a:lumMod val="99000"/>
-                <a:satMod val="120000"/>
-                <a:shade val="78000"/>
-              </a:schemeClr>
-            </a:gs>
-          </a:gsLst>
-          <a:lin ang="5400000" scaled="0"/>
-        </a:gradFill>
-      </a:fillStyleLst>
-      <a:lnStyleLst>
-        <a:ln w="12700" cap="flat" cmpd="sng" algn="ctr">
-          <a:solidFill>
-            <a:schemeClr val="phClr"/>
-          </a:solidFill>
-          <a:prstDash val="solid"/>
-          <a:miter lim="800000"/>
-        </a:ln>
-        <a:ln w="19050" cap="flat" cmpd="sng" algn="ctr">
-          <a:solidFill>
-            <a:schemeClr val="phClr"/>
-          </a:solidFill>
-          <a:prstDash val="solid"/>
-          <a:miter lim="800000"/>
-        </a:ln>
-        <a:ln w="25400" cap="flat" cmpd="sng" algn="ctr">
-          <a:solidFill>
-            <a:schemeClr val="phClr"/>
-          </a:solidFill>
-          <a:prstDash val="solid"/>
-          <a:miter lim="800000"/>
-        </a:ln>
-      </a:lnStyleLst>
-      <a:effectStyleLst>
-        <a:effectStyle>
-          <a:effectLst/>
-        </a:effectStyle>
-        <a:effectStyle>
-          <a:effectLst/>
-        </a:effectStyle>
-        <a:effectStyle>
-          <a:effectLst>
-            <a:outerShdw blurRad="57150" dist="19050" dir="5400000" algn="ctr" rotWithShape="0">
-              <a:srgbClr val="000000">
-                <a:alpha val="63000"/>
-              </a:srgbClr>
-            </a:outerShdw>
-          </a:effectLst>
-        </a:effectStyle>
-      </a:effectStyleLst>
-      <a:bgFillStyleLst>
-        <a:solidFill>
-          <a:schemeClr val="phClr"/>
-        </a:solidFill>
-        <a:solidFill>
-          <a:schemeClr val="phClr">
-            <a:tint val="95000"/>
-            <a:satMod val="170000"/>
-          </a:schemeClr>
-        </a:solidFill>
-        <a:gradFill rotWithShape="1">
-          <a:gsLst>
-            <a:gs pos="0">
-              <a:schemeClr val="phClr">
-                <a:tint val="93000"/>
-                <a:satMod val="150000"/>
-                <a:shade val="98000"/>
-                <a:lumMod val="102000"/>
-              </a:schemeClr>
-            </a:gs>
-            <a:gs pos="50000">
-              <a:schemeClr val="phClr">
-                <a:tint val="98000"/>
-                <a:satMod val="130000"/>
-                <a:shade val="90000"/>
-                <a:lumMod val="103000"/>
-              </a:schemeClr>
-            </a:gs>
-            <a:gs pos="100000">
-              <a:schemeClr val="phClr">
-                <a:shade val="63000"/>
-                <a:satMod val="120000"/>
-              </a:schemeClr>
-            </a:gs>
-          </a:gsLst>
-          <a:lin ang="5400000" scaled="0"/>
-        </a:gradFill>
-      </a:bgFillStyleLst>
-    </a:fmtScheme>
-  </a:themeElements>
-  <a:objectDefaults>
-    <a:lnDef>
-      <a:spPr/>
-      <a:bodyPr/>
-      <a:lstStyle/>
-      <a:style>
-        <a:lnRef idx="2">
-          <a:schemeClr val="accent1"/>
-        </a:lnRef>
-        <a:fillRef idx="0">
-          <a:schemeClr val="accent1"/>
-        </a:fillRef>
-        <a:effectRef idx="1">
-          <a:schemeClr val="accent1"/>
-        </a:effectRef>
-        <a:fontRef idx="minor">
-          <a:schemeClr val="tx1"/>
-        </a:fontRef>
-      </a:style>
-    </a:lnDef>
-  </a:objectDefaults>
-  <a:extraClrSchemeLst/>
-  <a:extLst>
-    <a:ext uri="{05A4C25C-085E-4340-85A3-A5531E510DB2}">
-      <thm15:themeFamily xmlns:thm15="http://schemas.microsoft.com/office/thememl/2012/main" name="Office Theme" id="{2E142A2C-CD16-42D6-873A-C26D2A0506FA}" vid="{1BDDFF52-6CD6-40A5-AB3C-68EB2F1E4D0A}"/>
-    </a:ext>
-  </a:extLst>
-</a:theme>
 </file>
--- a/cours/Module TIC/Département Français/ENS 2ème année/Cours_TIC_01_Introduction_aux_TIC_FR.pptx
+++ b/cours/Module TIC/Département Français/ENS 2ème année/Cours_TIC_01_Introduction_aux_TIC_FR.pptx
@@ -2850,7 +2850,7 @@
           <a:solidFill>
             <a:schemeClr val="tx1"/>
           </a:solidFill>
-          <a:latin typeface="+mj-lt"/>
+          <a:latin typeface="Poppins"/>
           <a:ea typeface="+mj-ea"/>
           <a:cs typeface="+mj-cs"/>
         </a:defRPr>
@@ -2867,7 +2867,7 @@
           <a:solidFill>
             <a:schemeClr val="tx1"/>
           </a:solidFill>
-          <a:latin typeface="+mn-lt"/>
+          <a:latin typeface="Poppins"/>
           <a:ea typeface="+mn-ea"/>
           <a:cs typeface="+mn-cs"/>
         </a:defRPr>
@@ -2882,7 +2882,7 @@
           <a:solidFill>
             <a:schemeClr val="tx1"/>
           </a:solidFill>
-          <a:latin typeface="+mn-lt"/>
+          <a:latin typeface="Poppins"/>
           <a:ea typeface="+mn-ea"/>
           <a:cs typeface="+mn-cs"/>
         </a:defRPr>
@@ -2897,7 +2897,7 @@
           <a:solidFill>
             <a:schemeClr val="tx1"/>
           </a:solidFill>
-          <a:latin typeface="+mn-lt"/>
+          <a:latin typeface="Poppins"/>
           <a:ea typeface="+mn-ea"/>
           <a:cs typeface="+mn-cs"/>
         </a:defRPr>
@@ -2912,7 +2912,7 @@
           <a:solidFill>
             <a:schemeClr val="tx1"/>
           </a:solidFill>
-          <a:latin typeface="+mn-lt"/>
+          <a:latin typeface="Poppins"/>
           <a:ea typeface="+mn-ea"/>
           <a:cs typeface="+mn-cs"/>
         </a:defRPr>
@@ -2927,7 +2927,7 @@
           <a:solidFill>
             <a:schemeClr val="tx1"/>
           </a:solidFill>
-          <a:latin typeface="+mn-lt"/>
+          <a:latin typeface="Poppins"/>
           <a:ea typeface="+mn-ea"/>
           <a:cs typeface="+mn-cs"/>
         </a:defRPr>
@@ -2942,7 +2942,7 @@
           <a:solidFill>
             <a:schemeClr val="tx1"/>
           </a:solidFill>
-          <a:latin typeface="+mn-lt"/>
+          <a:latin typeface="Poppins"/>
           <a:ea typeface="+mn-ea"/>
           <a:cs typeface="+mn-cs"/>
         </a:defRPr>
@@ -2957,7 +2957,7 @@
           <a:solidFill>
             <a:schemeClr val="tx1"/>
           </a:solidFill>
-          <a:latin typeface="+mn-lt"/>
+          <a:latin typeface="Poppins"/>
           <a:ea typeface="+mn-ea"/>
           <a:cs typeface="+mn-cs"/>
         </a:defRPr>
@@ -2972,7 +2972,7 @@
           <a:solidFill>
             <a:schemeClr val="tx1"/>
           </a:solidFill>
-          <a:latin typeface="+mn-lt"/>
+          <a:latin typeface="Poppins"/>
           <a:ea typeface="+mn-ea"/>
           <a:cs typeface="+mn-cs"/>
         </a:defRPr>
@@ -2987,7 +2987,7 @@
           <a:solidFill>
             <a:schemeClr val="tx1"/>
           </a:solidFill>
-          <a:latin typeface="+mn-lt"/>
+          <a:latin typeface="Poppins"/>
           <a:ea typeface="+mn-ea"/>
           <a:cs typeface="+mn-cs"/>
         </a:defRPr>
@@ -3002,7 +3002,7 @@
           <a:solidFill>
             <a:schemeClr val="tx1"/>
           </a:solidFill>
-          <a:latin typeface="+mn-lt"/>
+          <a:latin typeface="Poppins"/>
           <a:ea typeface="+mn-ea"/>
           <a:cs typeface="+mn-cs"/>
         </a:defRPr>
@@ -3012,7 +3012,7 @@
           <a:solidFill>
             <a:schemeClr val="tx1"/>
           </a:solidFill>
-          <a:latin typeface="+mn-lt"/>
+          <a:latin typeface="Poppins"/>
           <a:ea typeface="+mn-ea"/>
           <a:cs typeface="+mn-cs"/>
         </a:defRPr>
@@ -3022,7 +3022,7 @@
           <a:solidFill>
             <a:schemeClr val="tx1"/>
           </a:solidFill>
-          <a:latin typeface="+mn-lt"/>
+          <a:latin typeface="Poppins"/>
           <a:ea typeface="+mn-ea"/>
           <a:cs typeface="+mn-cs"/>
         </a:defRPr>
@@ -3032,7 +3032,7 @@
           <a:solidFill>
             <a:schemeClr val="tx1"/>
           </a:solidFill>
-          <a:latin typeface="+mn-lt"/>
+          <a:latin typeface="Poppins"/>
           <a:ea typeface="+mn-ea"/>
           <a:cs typeface="+mn-cs"/>
         </a:defRPr>
@@ -3042,7 +3042,7 @@
           <a:solidFill>
             <a:schemeClr val="tx1"/>
           </a:solidFill>
-          <a:latin typeface="+mn-lt"/>
+          <a:latin typeface="Poppins"/>
           <a:ea typeface="+mn-ea"/>
           <a:cs typeface="+mn-cs"/>
         </a:defRPr>
@@ -3052,7 +3052,7 @@
           <a:solidFill>
             <a:schemeClr val="tx1"/>
           </a:solidFill>
-          <a:latin typeface="+mn-lt"/>
+          <a:latin typeface="Poppins"/>
           <a:ea typeface="+mn-ea"/>
           <a:cs typeface="+mn-cs"/>
         </a:defRPr>
@@ -3062,7 +3062,7 @@
           <a:solidFill>
             <a:schemeClr val="tx1"/>
           </a:solidFill>
-          <a:latin typeface="+mn-lt"/>
+          <a:latin typeface="Poppins"/>
           <a:ea typeface="+mn-ea"/>
           <a:cs typeface="+mn-cs"/>
         </a:defRPr>
@@ -3072,7 +3072,7 @@
           <a:solidFill>
             <a:schemeClr val="tx1"/>
           </a:solidFill>
-          <a:latin typeface="+mn-lt"/>
+          <a:latin typeface="Poppins"/>
           <a:ea typeface="+mn-ea"/>
           <a:cs typeface="+mn-cs"/>
         </a:defRPr>
@@ -3082,7 +3082,7 @@
           <a:solidFill>
             <a:schemeClr val="tx1"/>
           </a:solidFill>
-          <a:latin typeface="+mn-lt"/>
+          <a:latin typeface="Poppins"/>
           <a:ea typeface="+mn-ea"/>
           <a:cs typeface="+mn-cs"/>
         </a:defRPr>
@@ -3097,9 +3097,7 @@
   <p:cSld>
     <p:bg>
       <p:bgPr>
-        <a:solidFill>
-          <a:srgbClr val="1A5C33"/>
-        </a:solidFill>
+        <a:solidFill>val="006847"/&gt;</a:solidFill>
         <a:effectLst/>
       </p:bgPr>
     </p:bg>
@@ -3134,9 +3132,7 @@
           <a:p>
             <a:pPr algn="ctr">
               <a:defRPr sz="3200" b="1">
-                <a:solidFill>
-                  <a:srgbClr val="FFFFFF"/>
-                </a:solidFill>
+                <a:solidFill>val="FFFFFF"/&gt;</a:solidFill>
               </a:defRPr>
             </a:pPr>
             <a:r>
@@ -3169,9 +3165,7 @@
           <a:p>
             <a:pPr algn="ctr">
               <a:defRPr sz="2000" b="0">
-                <a:solidFill>
-                  <a:srgbClr val="C5D9C7"/>
-                </a:solidFill>
+                <a:solidFill>val="DFE5EA"/&gt;</a:solidFill>
               </a:defRPr>
             </a:pPr>
             <a:r>
@@ -3204,13 +3198,52 @@
           <a:p>
             <a:pPr algn="ctr">
               <a:defRPr sz="1600" b="0">
+                <a:solidFill>val="B7C9BE"/&gt;</a:solidFill>
+              </a:defRPr>
+            </a:pPr>
+            <a:r>
+              <a:t>Université de Mostaganem — MCB</a:t>
+            </a:r>
+          </a:p>
+        </p:txBody>
+      </p:sp>
+      <p:sp>
+        <p:nvSpPr>
+          <p:cNvPr id="990001" name="Pied de page FLE"/>
+          <p:cNvSpPr>
+            <a:spLocks noGrp="1"/>
+          </p:cNvSpPr>
+          <p:nvPr/>
+        </p:nvSpPr>
+        <p:spPr>
+          <a:xfrm>
+            <a:off x="2880360" y="914400"/>
+            <a:ext cx="4572000" cy="274320"/>
+          </a:xfrm>
+          <a:prstGeom prst="rect">
+            <a:avLst/>
+          </a:prstGeom>
+        </p:spPr>
+        <p:txBody>
+          <a:bodyPr anchor="b"/>
+          <a:lstStyle/>
+          <a:p>
+            <a:pPr algn="r">
+              <a:defRPr sz="900">
                 <a:solidFill>
-                  <a:srgbClr val="A0CFA0"/>
+                  <a:srgbClr val="9AA7B6"/>
                 </a:solidFill>
-              </a:defRPr>
-            </a:pPr>
-            <a:r>
-              <a:t>Université de Mostaganem — MCB</a:t>
+                <a:latin typeface="Poppins"/>
+              </a:defRPr>
+            </a:pPr>
+            <a:r>
+              <a:rPr lang="fr-FR" sz="900">
+                <a:solidFill>
+                  <a:srgbClr val="9AA7B6"/>
+                </a:solidFill>
+                <a:latin typeface="Poppins"/>
+              </a:rPr>
+              <a:t>Université de Mostaganem — Dr. Madani BELACEL</a:t>
             </a:r>
           </a:p>
         </p:txBody>
@@ -3228,9 +3261,7 @@
   <p:cSld>
     <p:bg>
       <p:bgPr>
-        <a:solidFill>
-          <a:srgbClr val="FFFFFF"/>
-        </a:solidFill>
+        <a:solidFill>val="FFFFFF"/&gt;</a:solidFill>
         <a:effectLst/>
       </p:bgPr>
     </p:bg>
@@ -3255,9 +3286,7 @@
           <a:prstGeom prst="rect">
             <a:avLst/>
           </a:prstGeom>
-          <a:solidFill>
-            <a:srgbClr val="2C6E49"/>
-          </a:solidFill>
+          <a:solidFill>val="00875B"/&gt;</a:solidFill>
           <a:ln>
             <a:noFill/>
           </a:ln>
@@ -3308,9 +3337,7 @@
           <a:p>
             <a:pPr algn="l">
               <a:defRPr sz="2200" b="1">
-                <a:solidFill>
-                  <a:srgbClr val="1A5C33"/>
-                </a:solidFill>
+                <a:solidFill>val="006847"/&gt;</a:solidFill>
               </a:defRPr>
             </a:pPr>
             <a:r>
@@ -3346,9 +3373,7 @@
                 <a:spcPts val="600"/>
               </a:spcAft>
               <a:defRPr sz="1400">
-                <a:solidFill>
-                  <a:srgbClr val="222222"/>
-                </a:solidFill>
+                <a:solidFill>val="22344A"/&gt;</a:solidFill>
               </a:defRPr>
             </a:pPr>
             <a:r>
@@ -3361,9 +3386,7 @@
                 <a:spcPts val="600"/>
               </a:spcAft>
               <a:defRPr sz="1400">
-                <a:solidFill>
-                  <a:srgbClr val="222222"/>
-                </a:solidFill>
+                <a:solidFill>val="22344A"/&gt;</a:solidFill>
               </a:defRPr>
             </a:pPr>
             <a:r>
@@ -3376,9 +3399,7 @@
                 <a:spcPts val="600"/>
               </a:spcAft>
               <a:defRPr sz="1400">
-                <a:solidFill>
-                  <a:srgbClr val="222222"/>
-                </a:solidFill>
+                <a:solidFill>val="22344A"/&gt;</a:solidFill>
               </a:defRPr>
             </a:pPr>
             <a:r>
@@ -3391,9 +3412,7 @@
                 <a:spcPts val="600"/>
               </a:spcAft>
               <a:defRPr sz="1400">
-                <a:solidFill>
-                  <a:srgbClr val="222222"/>
-                </a:solidFill>
+                <a:solidFill>val="22344A"/&gt;</a:solidFill>
               </a:defRPr>
             </a:pPr>
             <a:r>
@@ -3406,9 +3425,7 @@
                 <a:spcPts val="600"/>
               </a:spcAft>
               <a:defRPr sz="1400">
-                <a:solidFill>
-                  <a:srgbClr val="222222"/>
-                </a:solidFill>
+                <a:solidFill>val="22344A"/&gt;</a:solidFill>
               </a:defRPr>
             </a:pPr>
             <a:r>
@@ -3421,9 +3438,7 @@
                 <a:spcPts val="600"/>
               </a:spcAft>
               <a:defRPr sz="1400">
-                <a:solidFill>
-                  <a:srgbClr val="222222"/>
-                </a:solidFill>
+                <a:solidFill>val="22344A"/&gt;</a:solidFill>
               </a:defRPr>
             </a:pPr>
             <a:r>
@@ -3436,13 +3451,52 @@
                 <a:spcPts val="600"/>
               </a:spcAft>
               <a:defRPr sz="1400">
+                <a:solidFill>val="22344A"/&gt;</a:solidFill>
+              </a:defRPr>
+            </a:pPr>
+            <a:r>
+              <a:t>• Domaines d'application en didactique des langues :</a:t>
+            </a:r>
+          </a:p>
+        </p:txBody>
+      </p:sp>
+      <p:sp>
+        <p:nvSpPr>
+          <p:cNvPr id="990001" name="Pied de page FLE"/>
+          <p:cNvSpPr>
+            <a:spLocks noGrp="1"/>
+          </p:cNvSpPr>
+          <p:nvPr/>
+        </p:nvSpPr>
+        <p:spPr>
+          <a:xfrm>
+            <a:off x="-228600" y="6400800"/>
+            <a:ext cx="109728" cy="274320"/>
+          </a:xfrm>
+          <a:prstGeom prst="rect">
+            <a:avLst/>
+          </a:prstGeom>
+        </p:spPr>
+        <p:txBody>
+          <a:bodyPr anchor="b"/>
+          <a:lstStyle/>
+          <a:p>
+            <a:pPr algn="r">
+              <a:defRPr sz="900">
                 <a:solidFill>
-                  <a:srgbClr val="222222"/>
+                  <a:srgbClr val="9AA7B6"/>
                 </a:solidFill>
-              </a:defRPr>
-            </a:pPr>
-            <a:r>
-              <a:t>• Domaines d'application en didactique des langues :</a:t>
+                <a:latin typeface="Poppins"/>
+              </a:defRPr>
+            </a:pPr>
+            <a:r>
+              <a:rPr lang="fr-FR" sz="900">
+                <a:solidFill>
+                  <a:srgbClr val="9AA7B6"/>
+                </a:solidFill>
+                <a:latin typeface="Poppins"/>
+              </a:rPr>
+              <a:t>Université de Mostaganem — Dr. Madani BELACEL</a:t>
             </a:r>
           </a:p>
         </p:txBody>
@@ -3460,9 +3514,7 @@
   <p:cSld>
     <p:bg>
       <p:bgPr>
-        <a:solidFill>
-          <a:srgbClr val="FFFFFF"/>
-        </a:solidFill>
+        <a:solidFill>val="FFFFFF"/&gt;</a:solidFill>
         <a:effectLst/>
       </p:bgPr>
     </p:bg>
@@ -3487,9 +3539,7 @@
           <a:prstGeom prst="rect">
             <a:avLst/>
           </a:prstGeom>
-          <a:solidFill>
-            <a:srgbClr val="2C6E49"/>
-          </a:solidFill>
+          <a:solidFill>val="00875B"/&gt;</a:solidFill>
           <a:ln>
             <a:noFill/>
           </a:ln>
@@ -3540,9 +3590,7 @@
           <a:p>
             <a:pPr algn="l">
               <a:defRPr sz="2200" b="1">
-                <a:solidFill>
-                  <a:srgbClr val="1A5C33"/>
-                </a:solidFill>
+                <a:solidFill>val="006847"/&gt;</a:solidFill>
               </a:defRPr>
             </a:pPr>
             <a:r>
@@ -3578,9 +3626,7 @@
                 <a:spcPts val="600"/>
               </a:spcAft>
               <a:defRPr sz="1400">
-                <a:solidFill>
-                  <a:srgbClr val="222222"/>
-                </a:solidFill>
+                <a:solidFill>val="22344A"/&gt;</a:solidFill>
               </a:defRPr>
             </a:pPr>
             <a:r>
@@ -3593,13 +3639,52 @@
                 <a:spcPts val="600"/>
               </a:spcAft>
               <a:defRPr sz="1400">
+                <a:solidFill>val="22344A"/&gt;</a:solidFill>
+              </a:defRPr>
+            </a:pPr>
+            <a:r>
+              <a:t>• Objectif pour l'enseignant :viser au moins les niveauxModificationetRedéfinitiondans la conception de ses séquences pédagogiques. Le niveau de Redéfinition est particulièrement pertinent en didactique des langues car il permet des interactions authentiques impossibles à réaliser dans une classe traditionnelle.</a:t>
+            </a:r>
+          </a:p>
+        </p:txBody>
+      </p:sp>
+      <p:sp>
+        <p:nvSpPr>
+          <p:cNvPr id="990001" name="Pied de page FLE"/>
+          <p:cNvSpPr>
+            <a:spLocks noGrp="1"/>
+          </p:cNvSpPr>
+          <p:nvPr/>
+        </p:nvSpPr>
+        <p:spPr>
+          <a:xfrm>
+            <a:off x="-228600" y="6400800"/>
+            <a:ext cx="109728" cy="274320"/>
+          </a:xfrm>
+          <a:prstGeom prst="rect">
+            <a:avLst/>
+          </a:prstGeom>
+        </p:spPr>
+        <p:txBody>
+          <a:bodyPr anchor="b"/>
+          <a:lstStyle/>
+          <a:p>
+            <a:pPr algn="r">
+              <a:defRPr sz="900">
                 <a:solidFill>
-                  <a:srgbClr val="222222"/>
+                  <a:srgbClr val="9AA7B6"/>
                 </a:solidFill>
-              </a:defRPr>
-            </a:pPr>
-            <a:r>
-              <a:t>• Objectif pour l'enseignant :viser au moins les niveauxModificationetRedéfinitiondans la conception de ses séquences pédagogiques. Le niveau de Redéfinition est particulièrement pertinent en didactique des langues car il permet des interactions authentiques impossibles à réaliser dans une classe traditionnelle.</a:t>
+                <a:latin typeface="Poppins"/>
+              </a:defRPr>
+            </a:pPr>
+            <a:r>
+              <a:rPr lang="fr-FR" sz="900">
+                <a:solidFill>
+                  <a:srgbClr val="9AA7B6"/>
+                </a:solidFill>
+                <a:latin typeface="Poppins"/>
+              </a:rPr>
+              <a:t>Université de Mostaganem — Dr. Madani BELACEL</a:t>
             </a:r>
           </a:p>
         </p:txBody>
@@ -3617,9 +3702,7 @@
   <p:cSld>
     <p:bg>
       <p:bgPr>
-        <a:solidFill>
-          <a:srgbClr val="FFFFFF"/>
-        </a:solidFill>
+        <a:solidFill>val="FFFFFF"/&gt;</a:solidFill>
         <a:effectLst/>
       </p:bgPr>
     </p:bg>
@@ -3644,9 +3727,7 @@
           <a:prstGeom prst="rect">
             <a:avLst/>
           </a:prstGeom>
-          <a:solidFill>
-            <a:srgbClr val="2C6E49"/>
-          </a:solidFill>
+          <a:solidFill>val="00875B"/&gt;</a:solidFill>
           <a:ln>
             <a:noFill/>
           </a:ln>
@@ -3697,9 +3778,7 @@
           <a:p>
             <a:pPr algn="l">
               <a:defRPr sz="2200" b="1">
-                <a:solidFill>
-                  <a:srgbClr val="1A5C33"/>
-                </a:solidFill>
+                <a:solidFill>val="006847"/&gt;</a:solidFill>
               </a:defRPr>
             </a:pPr>
             <a:r>
@@ -3735,9 +3814,7 @@
                 <a:spcPts val="600"/>
               </a:spcAft>
               <a:defRPr sz="1400">
-                <a:solidFill>
-                  <a:srgbClr val="222222"/>
-                </a:solidFill>
+                <a:solidFill>val="22344A"/&gt;</a:solidFill>
               </a:defRPr>
             </a:pPr>
             <a:r>
@@ -3750,9 +3827,7 @@
                 <a:spcPts val="600"/>
               </a:spcAft>
               <a:defRPr sz="1400">
-                <a:solidFill>
-                  <a:srgbClr val="222222"/>
-                </a:solidFill>
+                <a:solidFill>val="22344A"/&gt;</a:solidFill>
               </a:defRPr>
             </a:pPr>
             <a:r>
@@ -3765,9 +3840,7 @@
                 <a:spcPts val="600"/>
               </a:spcAft>
               <a:defRPr sz="1400">
-                <a:solidFill>
-                  <a:srgbClr val="222222"/>
-                </a:solidFill>
+                <a:solidFill>val="22344A"/&gt;</a:solidFill>
               </a:defRPr>
             </a:pPr>
             <a:r>
@@ -3780,9 +3853,7 @@
                 <a:spcPts val="600"/>
               </a:spcAft>
               <a:defRPr sz="1400">
-                <a:solidFill>
-                  <a:srgbClr val="222222"/>
-                </a:solidFill>
+                <a:solidFill>val="22344A"/&gt;</a:solidFill>
               </a:defRPr>
             </a:pPr>
             <a:r>
@@ -3795,9 +3866,7 @@
                 <a:spcPts val="600"/>
               </a:spcAft>
               <a:defRPr sz="1400">
-                <a:solidFill>
-                  <a:srgbClr val="222222"/>
-                </a:solidFill>
+                <a:solidFill>val="22344A"/&gt;</a:solidFill>
               </a:defRPr>
             </a:pPr>
             <a:r>
@@ -3810,9 +3879,7 @@
                 <a:spcPts val="600"/>
               </a:spcAft>
               <a:defRPr sz="1400">
-                <a:solidFill>
-                  <a:srgbClr val="222222"/>
-                </a:solidFill>
+                <a:solidFill>val="22344A"/&gt;</a:solidFill>
               </a:defRPr>
             </a:pPr>
             <a:r>
@@ -3825,9 +3892,7 @@
                 <a:spcPts val="600"/>
               </a:spcAft>
               <a:defRPr sz="1400">
-                <a:solidFill>
-                  <a:srgbClr val="222222"/>
-                </a:solidFill>
+                <a:solidFill>val="22344A"/&gt;</a:solidFill>
               </a:defRPr>
             </a:pPr>
             <a:r>
@@ -3840,13 +3905,52 @@
                 <a:spcPts val="600"/>
               </a:spcAft>
               <a:defRPr sz="1400">
+                <a:solidFill>val="22344A"/&gt;</a:solidFill>
+              </a:defRPr>
+            </a:pPr>
+            <a:r>
+              <a:t>• Utiliser les outils de communication institutionnelle (ENT, messagerie, cahier de textes numérique)</a:t>
+            </a:r>
+          </a:p>
+        </p:txBody>
+      </p:sp>
+      <p:sp>
+        <p:nvSpPr>
+          <p:cNvPr id="990001" name="Pied de page FLE"/>
+          <p:cNvSpPr>
+            <a:spLocks noGrp="1"/>
+          </p:cNvSpPr>
+          <p:nvPr/>
+        </p:nvSpPr>
+        <p:spPr>
+          <a:xfrm>
+            <a:off x="-228600" y="6400800"/>
+            <a:ext cx="109728" cy="274320"/>
+          </a:xfrm>
+          <a:prstGeom prst="rect">
+            <a:avLst/>
+          </a:prstGeom>
+        </p:spPr>
+        <p:txBody>
+          <a:bodyPr anchor="b"/>
+          <a:lstStyle/>
+          <a:p>
+            <a:pPr algn="r">
+              <a:defRPr sz="900">
                 <a:solidFill>
-                  <a:srgbClr val="222222"/>
+                  <a:srgbClr val="9AA7B6"/>
                 </a:solidFill>
-              </a:defRPr>
-            </a:pPr>
-            <a:r>
-              <a:t>• Utiliser les outils de communication institutionnelle (ENT, messagerie, cahier de textes numérique)</a:t>
+                <a:latin typeface="Poppins"/>
+              </a:defRPr>
+            </a:pPr>
+            <a:r>
+              <a:rPr lang="fr-FR" sz="900">
+                <a:solidFill>
+                  <a:srgbClr val="9AA7B6"/>
+                </a:solidFill>
+                <a:latin typeface="Poppins"/>
+              </a:rPr>
+              <a:t>Université de Mostaganem — Dr. Madani BELACEL</a:t>
             </a:r>
           </a:p>
         </p:txBody>
@@ -3864,9 +3968,7 @@
   <p:cSld>
     <p:bg>
       <p:bgPr>
-        <a:solidFill>
-          <a:srgbClr val="E8F0E9"/>
-        </a:solidFill>
+        <a:solidFill>val="F4F6F8"/&gt;</a:solidFill>
         <a:effectLst/>
       </p:bgPr>
     </p:bg>
@@ -3901,9 +4003,7 @@
           <a:p>
             <a:pPr algn="ctr">
               <a:defRPr sz="2600" b="1">
-                <a:solidFill>
-                  <a:srgbClr val="1A5C33"/>
-                </a:solidFill>
+                <a:solidFill>val="006847"/&gt;</a:solidFill>
               </a:defRPr>
             </a:pPr>
             <a:r>
@@ -3939,9 +4039,7 @@
                 <a:spcPts val="600"/>
               </a:spcAft>
               <a:defRPr sz="1600">
-                <a:solidFill>
-                  <a:srgbClr val="222222"/>
-                </a:solidFill>
+                <a:solidFill>val="22344A"/&gt;</a:solidFill>
               </a:defRPr>
             </a:pPr>
             <a:r>
@@ -3954,9 +4052,7 @@
                 <a:spcPts val="600"/>
               </a:spcAft>
               <a:defRPr sz="1600">
-                <a:solidFill>
-                  <a:srgbClr val="222222"/>
-                </a:solidFill>
+                <a:solidFill>val="22344A"/&gt;</a:solidFill>
               </a:defRPr>
             </a:pPr>
             <a:r>
@@ -3981,9 +4077,7 @@
                 <a:spcPts val="600"/>
               </a:spcAft>
               <a:defRPr sz="1600">
-                <a:solidFill>
-                  <a:srgbClr val="222222"/>
-                </a:solidFill>
+                <a:solidFill>val="22344A"/&gt;</a:solidFill>
               </a:defRPr>
             </a:pPr>
             <a:r>
@@ -3996,9 +4090,7 @@
                 <a:spcPts val="600"/>
               </a:spcAft>
               <a:defRPr sz="1600">
-                <a:solidFill>
-                  <a:srgbClr val="222222"/>
-                </a:solidFill>
+                <a:solidFill>val="22344A"/&gt;</a:solidFill>
               </a:defRPr>
             </a:pPr>
             <a:r>
@@ -4011,13 +4103,52 @@
                 <a:spcPts val="600"/>
               </a:spcAft>
               <a:defRPr sz="1600">
+                <a:solidFill>val="22344A"/&gt;</a:solidFill>
+              </a:defRPr>
+            </a:pPr>
+            <a:r>
+              <a:t>• Les Technologies de l'Information et de la Communication (TIC) regroupent l'ensemble des technologies issues de la convergence de l'informatique, des télécommunications et du multimédia. Leur évolution rapide transforme en profondeur les pratiques d'enseignement et d'apprentissage, en particulier dans le domaine des langues étrangères.</a:t>
+            </a:r>
+          </a:p>
+        </p:txBody>
+      </p:sp>
+      <p:sp>
+        <p:nvSpPr>
+          <p:cNvPr id="990001" name="Pied de page FLE"/>
+          <p:cNvSpPr>
+            <a:spLocks noGrp="1"/>
+          </p:cNvSpPr>
+          <p:nvPr/>
+        </p:nvSpPr>
+        <p:spPr>
+          <a:xfrm>
+            <a:off x="2971800" y="182880"/>
+            <a:ext cx="4572000" cy="274320"/>
+          </a:xfrm>
+          <a:prstGeom prst="rect">
+            <a:avLst/>
+          </a:prstGeom>
+        </p:spPr>
+        <p:txBody>
+          <a:bodyPr anchor="b"/>
+          <a:lstStyle/>
+          <a:p>
+            <a:pPr algn="r">
+              <a:defRPr sz="900">
                 <a:solidFill>
-                  <a:srgbClr val="222222"/>
+                  <a:srgbClr val="9AA7B6"/>
                 </a:solidFill>
-              </a:defRPr>
-            </a:pPr>
-            <a:r>
-              <a:t>• Les Technologies de l'Information et de la Communication (TIC) regroupent l'ensemble des technologies issues de la convergence de l'informatique, des télécommunications et du multimédia. Leur évolution rapide transforme en profondeur les pratiques d'enseignement et d'apprentissage, en particulier dans le domaine des langues étrangères.</a:t>
+                <a:latin typeface="Poppins"/>
+              </a:defRPr>
+            </a:pPr>
+            <a:r>
+              <a:rPr lang="fr-FR" sz="900">
+                <a:solidFill>
+                  <a:srgbClr val="9AA7B6"/>
+                </a:solidFill>
+                <a:latin typeface="Poppins"/>
+              </a:rPr>
+              <a:t>Université de Mostaganem — Dr. Madani BELACEL</a:t>
             </a:r>
           </a:p>
         </p:txBody>
@@ -4035,9 +4166,7 @@
   <p:cSld>
     <p:bg>
       <p:bgPr>
-        <a:solidFill>
-          <a:srgbClr val="FFFFFF"/>
-        </a:solidFill>
+        <a:solidFill>val="FFFFFF"/&gt;</a:solidFill>
         <a:effectLst/>
       </p:bgPr>
     </p:bg>
@@ -4072,9 +4201,7 @@
           <a:p>
             <a:pPr algn="ctr">
               <a:defRPr sz="2600" b="1">
-                <a:solidFill>
-                  <a:srgbClr val="1A5C33"/>
-                </a:solidFill>
+                <a:solidFill>val="006847"/&gt;</a:solidFill>
               </a:defRPr>
             </a:pPr>
             <a:r>
@@ -4110,9 +4237,7 @@
                 <a:spcPts val="600"/>
               </a:spcAft>
               <a:defRPr sz="1500">
-                <a:solidFill>
-                  <a:srgbClr val="222222"/>
-                </a:solidFill>
+                <a:solidFill>val="22344A"/&gt;</a:solidFill>
               </a:defRPr>
             </a:pPr>
             <a:r>
@@ -4125,9 +4250,7 @@
                 <a:spcPts val="600"/>
               </a:spcAft>
               <a:defRPr sz="1500">
-                <a:solidFill>
-                  <a:srgbClr val="222222"/>
-                </a:solidFill>
+                <a:solidFill>val="22344A"/&gt;</a:solidFill>
               </a:defRPr>
             </a:pPr>
             <a:r>
@@ -4140,9 +4263,7 @@
                 <a:spcPts val="600"/>
               </a:spcAft>
               <a:defRPr sz="1500">
-                <a:solidFill>
-                  <a:srgbClr val="222222"/>
-                </a:solidFill>
+                <a:solidFill>val="22344A"/&gt;</a:solidFill>
               </a:defRPr>
             </a:pPr>
             <a:r>
@@ -4155,9 +4276,7 @@
                 <a:spcPts val="600"/>
               </a:spcAft>
               <a:defRPr sz="1500">
-                <a:solidFill>
-                  <a:srgbClr val="222222"/>
-                </a:solidFill>
+                <a:solidFill>val="22344A"/&gt;</a:solidFill>
               </a:defRPr>
             </a:pPr>
             <a:r>
@@ -4170,13 +4289,52 @@
                 <a:spcPts val="600"/>
               </a:spcAft>
               <a:defRPr sz="1500">
+                <a:solidFill>val="22344A"/&gt;</a:solidFill>
+              </a:defRPr>
+            </a:pPr>
+            <a:r>
+              <a:t>• Préparer une courte présentation orale</a:t>
+            </a:r>
+          </a:p>
+        </p:txBody>
+      </p:sp>
+      <p:sp>
+        <p:nvSpPr>
+          <p:cNvPr id="990001" name="Pied de page FLE"/>
+          <p:cNvSpPr>
+            <a:spLocks noGrp="1"/>
+          </p:cNvSpPr>
+          <p:nvPr/>
+        </p:nvSpPr>
+        <p:spPr>
+          <a:xfrm>
+            <a:off x="2971800" y="182880"/>
+            <a:ext cx="4572000" cy="274320"/>
+          </a:xfrm>
+          <a:prstGeom prst="rect">
+            <a:avLst/>
+          </a:prstGeom>
+        </p:spPr>
+        <p:txBody>
+          <a:bodyPr anchor="b"/>
+          <a:lstStyle/>
+          <a:p>
+            <a:pPr algn="r">
+              <a:defRPr sz="900">
                 <a:solidFill>
-                  <a:srgbClr val="222222"/>
+                  <a:srgbClr val="9AA7B6"/>
                 </a:solidFill>
-              </a:defRPr>
-            </a:pPr>
-            <a:r>
-              <a:t>• Préparer une courte présentation orale</a:t>
+                <a:latin typeface="Poppins"/>
+              </a:defRPr>
+            </a:pPr>
+            <a:r>
+              <a:rPr lang="fr-FR" sz="900">
+                <a:solidFill>
+                  <a:srgbClr val="9AA7B6"/>
+                </a:solidFill>
+                <a:latin typeface="Poppins"/>
+              </a:rPr>
+              <a:t>Université de Mostaganem — Dr. Madani BELACEL</a:t>
             </a:r>
           </a:p>
         </p:txBody>
@@ -4194,9 +4352,7 @@
   <p:cSld>
     <p:bg>
       <p:bgPr>
-        <a:solidFill>
-          <a:srgbClr val="1A5C33"/>
-        </a:solidFill>
+        <a:solidFill>val="006847"/&gt;</a:solidFill>
         <a:effectLst/>
       </p:bgPr>
     </p:bg>
@@ -4231,9 +4387,7 @@
           <a:p>
             <a:pPr algn="ctr">
               <a:defRPr sz="2800" b="1">
-                <a:solidFill>
-                  <a:srgbClr val="FFFFFF"/>
-                </a:solidFill>
+                <a:solidFill>val="FFFFFF"/&gt;</a:solidFill>
               </a:defRPr>
             </a:pPr>
             <a:r>
@@ -4266,25 +4420,64 @@
           <a:p>
             <a:pPr algn="ctr">
               <a:defRPr sz="1800" b="0">
+                <a:solidFill>val="DFE5EA"/&gt;</a:solidFill>
+              </a:defRPr>
+            </a:pPr>
+            <a:r>
+              <a:t>Dr. BELACEL Madani</a:t>
+            </a:r>
+            <a:br/>
+            <a:r>
+              <a:t>Maître de Conférences B</a:t>
+            </a:r>
+            <a:br/>
+            <a:r>
+              <a:t>Université de Mostaganem</a:t>
+            </a:r>
+            <a:br/>
+            <a:r>
+              <a:t>madani.belacel@univ-mosta.dz</a:t>
+            </a:r>
+          </a:p>
+        </p:txBody>
+      </p:sp>
+      <p:sp>
+        <p:nvSpPr>
+          <p:cNvPr id="990001" name="Pied de page FLE"/>
+          <p:cNvSpPr>
+            <a:spLocks noGrp="1"/>
+          </p:cNvSpPr>
+          <p:nvPr/>
+        </p:nvSpPr>
+        <p:spPr>
+          <a:xfrm>
+            <a:off x="2880360" y="457200"/>
+            <a:ext cx="4572000" cy="274320"/>
+          </a:xfrm>
+          <a:prstGeom prst="rect">
+            <a:avLst/>
+          </a:prstGeom>
+        </p:spPr>
+        <p:txBody>
+          <a:bodyPr anchor="b"/>
+          <a:lstStyle/>
+          <a:p>
+            <a:pPr algn="r">
+              <a:defRPr sz="900">
                 <a:solidFill>
-                  <a:srgbClr val="C5D9C7"/>
+                  <a:srgbClr val="9AA7B6"/>
                 </a:solidFill>
-              </a:defRPr>
-            </a:pPr>
-            <a:r>
-              <a:t>Dr. BELACEL Madani</a:t>
-            </a:r>
-            <a:br/>
-            <a:r>
-              <a:t>Maître de Conférences B</a:t>
-            </a:r>
-            <a:br/>
-            <a:r>
-              <a:t>Université de Mostaganem</a:t>
-            </a:r>
-            <a:br/>
-            <a:r>
-              <a:t>madani.belacel@univ-mosta.dz</a:t>
+                <a:latin typeface="Poppins"/>
+              </a:defRPr>
+            </a:pPr>
+            <a:r>
+              <a:rPr lang="fr-FR" sz="900">
+                <a:solidFill>
+                  <a:srgbClr val="9AA7B6"/>
+                </a:solidFill>
+                <a:latin typeface="Poppins"/>
+              </a:rPr>
+              <a:t>Université de Mostaganem — Dr. Madani BELACEL</a:t>
             </a:r>
           </a:p>
         </p:txBody>
@@ -4302,9 +4495,7 @@
   <p:cSld>
     <p:bg>
       <p:bgPr>
-        <a:solidFill>
-          <a:srgbClr val="FFFFFF"/>
-        </a:solidFill>
+        <a:solidFill>val="FFFFFF"/&gt;</a:solidFill>
         <a:effectLst/>
       </p:bgPr>
     </p:bg>
@@ -4339,9 +4530,7 @@
           <a:p>
             <a:pPr algn="l">
               <a:defRPr sz="2600" b="1">
-                <a:solidFill>
-                  <a:srgbClr val="1A5C33"/>
-                </a:solidFill>
+                <a:solidFill>val="006847"/&gt;</a:solidFill>
               </a:defRPr>
             </a:pPr>
             <a:r>
@@ -4377,9 +4566,7 @@
                 <a:spcPts val="600"/>
               </a:spcAft>
               <a:defRPr sz="1500">
-                <a:solidFill>
-                  <a:srgbClr val="222222"/>
-                </a:solidFill>
+                <a:solidFill>val="22344A"/&gt;</a:solidFill>
               </a:defRPr>
             </a:pPr>
             <a:r>
@@ -4404,9 +4591,7 @@
                 <a:spcPts val="600"/>
               </a:spcAft>
               <a:defRPr sz="1500">
-                <a:solidFill>
-                  <a:srgbClr val="222222"/>
-                </a:solidFill>
+                <a:solidFill>val="22344A"/&gt;</a:solidFill>
               </a:defRPr>
             </a:pPr>
             <a:r>
@@ -4431,9 +4616,7 @@
                 <a:spcPts val="600"/>
               </a:spcAft>
               <a:defRPr sz="1500">
-                <a:solidFill>
-                  <a:srgbClr val="222222"/>
-                </a:solidFill>
+                <a:solidFill>val="22344A"/&gt;</a:solidFill>
               </a:defRPr>
             </a:pPr>
             <a:r>
@@ -4454,13 +4637,52 @@
                 <a:spcPts val="600"/>
               </a:spcAft>
               <a:defRPr sz="1500">
+                <a:solidFill>val="22344A"/&gt;</a:solidFill>
+              </a:defRPr>
+            </a:pPr>
+            <a:r>
+              <a:t>• Mode d'évaluation :TD 40 % + Projet pédagogique TIC 30 % + Examen 30 %</a:t>
+            </a:r>
+          </a:p>
+        </p:txBody>
+      </p:sp>
+      <p:sp>
+        <p:nvSpPr>
+          <p:cNvPr id="990001" name="Pied de page FLE"/>
+          <p:cNvSpPr>
+            <a:spLocks noGrp="1"/>
+          </p:cNvSpPr>
+          <p:nvPr/>
+        </p:nvSpPr>
+        <p:spPr>
+          <a:xfrm>
+            <a:off x="2971800" y="182880"/>
+            <a:ext cx="4572000" cy="274320"/>
+          </a:xfrm>
+          <a:prstGeom prst="rect">
+            <a:avLst/>
+          </a:prstGeom>
+        </p:spPr>
+        <p:txBody>
+          <a:bodyPr anchor="b"/>
+          <a:lstStyle/>
+          <a:p>
+            <a:pPr algn="r">
+              <a:defRPr sz="900">
                 <a:solidFill>
-                  <a:srgbClr val="222222"/>
+                  <a:srgbClr val="9AA7B6"/>
                 </a:solidFill>
-              </a:defRPr>
-            </a:pPr>
-            <a:r>
-              <a:t>• Mode d'évaluation :TD 40 % + Projet pédagogique TIC 30 % + Examen 30 %</a:t>
+                <a:latin typeface="Poppins"/>
+              </a:defRPr>
+            </a:pPr>
+            <a:r>
+              <a:rPr lang="fr-FR" sz="900">
+                <a:solidFill>
+                  <a:srgbClr val="9AA7B6"/>
+                </a:solidFill>
+                <a:latin typeface="Poppins"/>
+              </a:rPr>
+              <a:t>Université de Mostaganem — Dr. Madani BELACEL</a:t>
             </a:r>
           </a:p>
         </p:txBody>
@@ -4478,9 +4700,7 @@
   <p:cSld>
     <p:bg>
       <p:bgPr>
-        <a:solidFill>
-          <a:srgbClr val="FFFFFF"/>
-        </a:solidFill>
+        <a:solidFill>val="FFFFFF"/&gt;</a:solidFill>
         <a:effectLst/>
       </p:bgPr>
     </p:bg>
@@ -4515,9 +4735,7 @@
           <a:p>
             <a:pPr algn="l">
               <a:defRPr sz="2600" b="1">
-                <a:solidFill>
-                  <a:srgbClr val="1A5C33"/>
-                </a:solidFill>
+                <a:solidFill>val="006847"/&gt;</a:solidFill>
               </a:defRPr>
             </a:pPr>
             <a:r>
@@ -4553,9 +4771,7 @@
                 <a:spcPts val="600"/>
               </a:spcAft>
               <a:defRPr sz="1600">
-                <a:solidFill>
-                  <a:srgbClr val="222222"/>
-                </a:solidFill>
+                <a:solidFill>val="22344A"/&gt;</a:solidFill>
               </a:defRPr>
             </a:pPr>
             <a:r>
@@ -4568,9 +4784,7 @@
                 <a:spcPts val="600"/>
               </a:spcAft>
               <a:defRPr sz="1600">
-                <a:solidFill>
-                  <a:srgbClr val="222222"/>
-                </a:solidFill>
+                <a:solidFill>val="22344A"/&gt;</a:solidFill>
               </a:defRPr>
             </a:pPr>
             <a:r>
@@ -4583,9 +4797,7 @@
                 <a:spcPts val="600"/>
               </a:spcAft>
               <a:defRPr sz="1600">
-                <a:solidFill>
-                  <a:srgbClr val="222222"/>
-                </a:solidFill>
+                <a:solidFill>val="22344A"/&gt;</a:solidFill>
               </a:defRPr>
             </a:pPr>
             <a:r>
@@ -4598,9 +4810,7 @@
                 <a:spcPts val="600"/>
               </a:spcAft>
               <a:defRPr sz="1600">
-                <a:solidFill>
-                  <a:srgbClr val="222222"/>
-                </a:solidFill>
+                <a:solidFill>val="22344A"/&gt;</a:solidFill>
               </a:defRPr>
             </a:pPr>
             <a:r>
@@ -4613,9 +4823,7 @@
                 <a:spcPts val="600"/>
               </a:spcAft>
               <a:defRPr sz="1600">
-                <a:solidFill>
-                  <a:srgbClr val="222222"/>
-                </a:solidFill>
+                <a:solidFill>val="22344A"/&gt;</a:solidFill>
               </a:defRPr>
             </a:pPr>
             <a:r>
@@ -4628,9 +4836,7 @@
                 <a:spcPts val="600"/>
               </a:spcAft>
               <a:defRPr sz="1600">
-                <a:solidFill>
-                  <a:srgbClr val="222222"/>
-                </a:solidFill>
+                <a:solidFill>val="22344A"/&gt;</a:solidFill>
               </a:defRPr>
             </a:pPr>
             <a:r>
@@ -4643,9 +4849,7 @@
                 <a:spcPts val="600"/>
               </a:spcAft>
               <a:defRPr sz="1600">
-                <a:solidFill>
-                  <a:srgbClr val="222222"/>
-                </a:solidFill>
+                <a:solidFill>val="22344A"/&gt;</a:solidFill>
               </a:defRPr>
             </a:pPr>
             <a:r>
@@ -4658,9 +4862,7 @@
                 <a:spcPts val="600"/>
               </a:spcAft>
               <a:defRPr sz="1600">
-                <a:solidFill>
-                  <a:srgbClr val="222222"/>
-                </a:solidFill>
+                <a:solidFill>val="22344A"/&gt;</a:solidFill>
               </a:defRPr>
             </a:pPr>
             <a:r>
@@ -4673,9 +4875,7 @@
                 <a:spcPts val="600"/>
               </a:spcAft>
               <a:defRPr sz="1600">
-                <a:solidFill>
-                  <a:srgbClr val="222222"/>
-                </a:solidFill>
+                <a:solidFill>val="22344A"/&gt;</a:solidFill>
               </a:defRPr>
             </a:pPr>
             <a:r>
@@ -4688,13 +4888,52 @@
                 <a:spcPts val="600"/>
               </a:spcAft>
               <a:defRPr sz="1600">
+                <a:solidFill>val="22344A"/&gt;</a:solidFill>
+              </a:defRPr>
+            </a:pPr>
+            <a:r>
+              <a:t>• 7. Éthique et Sécurité en Contexte Pédagogique(5 min)</a:t>
+            </a:r>
+          </a:p>
+        </p:txBody>
+      </p:sp>
+      <p:sp>
+        <p:nvSpPr>
+          <p:cNvPr id="990001" name="Pied de page FLE"/>
+          <p:cNvSpPr>
+            <a:spLocks noGrp="1"/>
+          </p:cNvSpPr>
+          <p:nvPr/>
+        </p:nvSpPr>
+        <p:spPr>
+          <a:xfrm>
+            <a:off x="2971800" y="182880"/>
+            <a:ext cx="4572000" cy="274320"/>
+          </a:xfrm>
+          <a:prstGeom prst="rect">
+            <a:avLst/>
+          </a:prstGeom>
+        </p:spPr>
+        <p:txBody>
+          <a:bodyPr anchor="b"/>
+          <a:lstStyle/>
+          <a:p>
+            <a:pPr algn="r">
+              <a:defRPr sz="900">
                 <a:solidFill>
-                  <a:srgbClr val="222222"/>
+                  <a:srgbClr val="9AA7B6"/>
                 </a:solidFill>
-              </a:defRPr>
-            </a:pPr>
-            <a:r>
-              <a:t>• 7. Éthique et Sécurité en Contexte Pédagogique(5 min)</a:t>
+                <a:latin typeface="Poppins"/>
+              </a:defRPr>
+            </a:pPr>
+            <a:r>
+              <a:rPr lang="fr-FR" sz="900">
+                <a:solidFill>
+                  <a:srgbClr val="9AA7B6"/>
+                </a:solidFill>
+                <a:latin typeface="Poppins"/>
+              </a:rPr>
+              <a:t>Université de Mostaganem — Dr. Madani BELACEL</a:t>
             </a:r>
           </a:p>
         </p:txBody>
@@ -4712,9 +4951,7 @@
   <p:cSld>
     <p:bg>
       <p:bgPr>
-        <a:solidFill>
-          <a:srgbClr val="FFFFFF"/>
-        </a:solidFill>
+        <a:solidFill>val="FFFFFF"/&gt;</a:solidFill>
         <a:effectLst/>
       </p:bgPr>
     </p:bg>
@@ -4739,9 +4976,7 @@
           <a:prstGeom prst="rect">
             <a:avLst/>
           </a:prstGeom>
-          <a:solidFill>
-            <a:srgbClr val="2C6E49"/>
-          </a:solidFill>
+          <a:solidFill>val="00875B"/&gt;</a:solidFill>
           <a:ln>
             <a:noFill/>
           </a:ln>
@@ -4792,9 +5027,7 @@
           <a:p>
             <a:pPr algn="l">
               <a:defRPr sz="2200" b="1">
-                <a:solidFill>
-                  <a:srgbClr val="1A5C33"/>
-                </a:solidFill>
+                <a:solidFill>val="006847"/&gt;</a:solidFill>
               </a:defRPr>
             </a:pPr>
             <a:r>
@@ -4830,9 +5063,7 @@
                 <a:spcPts val="600"/>
               </a:spcAft>
               <a:defRPr sz="1400">
-                <a:solidFill>
-                  <a:srgbClr val="222222"/>
-                </a:solidFill>
+                <a:solidFill>val="22344A"/&gt;</a:solidFill>
               </a:defRPr>
             </a:pPr>
             <a:r>
@@ -4845,13 +5076,52 @@
                 <a:spcPts val="600"/>
               </a:spcAft>
               <a:defRPr sz="1400">
+                <a:solidFill>val="22344A"/&gt;</a:solidFill>
+              </a:defRPr>
+            </a:pPr>
+            <a:r>
+              <a:t>• Compétences pré-requises :Notions de base en informatique (L1 validée)</a:t>
+            </a:r>
+          </a:p>
+        </p:txBody>
+      </p:sp>
+      <p:sp>
+        <p:nvSpPr>
+          <p:cNvPr id="990001" name="Pied de page FLE"/>
+          <p:cNvSpPr>
+            <a:spLocks noGrp="1"/>
+          </p:cNvSpPr>
+          <p:nvPr/>
+        </p:nvSpPr>
+        <p:spPr>
+          <a:xfrm>
+            <a:off x="-228600" y="6400800"/>
+            <a:ext cx="109728" cy="274320"/>
+          </a:xfrm>
+          <a:prstGeom prst="rect">
+            <a:avLst/>
+          </a:prstGeom>
+        </p:spPr>
+        <p:txBody>
+          <a:bodyPr anchor="b"/>
+          <a:lstStyle/>
+          <a:p>
+            <a:pPr algn="r">
+              <a:defRPr sz="900">
                 <a:solidFill>
-                  <a:srgbClr val="222222"/>
+                  <a:srgbClr val="9AA7B6"/>
                 </a:solidFill>
-              </a:defRPr>
-            </a:pPr>
-            <a:r>
-              <a:t>• Compétences pré-requises :Notions de base en informatique (L1 validée)</a:t>
+                <a:latin typeface="Poppins"/>
+              </a:defRPr>
+            </a:pPr>
+            <a:r>
+              <a:rPr lang="fr-FR" sz="900">
+                <a:solidFill>
+                  <a:srgbClr val="9AA7B6"/>
+                </a:solidFill>
+                <a:latin typeface="Poppins"/>
+              </a:rPr>
+              <a:t>Université de Mostaganem — Dr. Madani BELACEL</a:t>
             </a:r>
           </a:p>
         </p:txBody>
@@ -4869,9 +5139,7 @@
   <p:cSld>
     <p:bg>
       <p:bgPr>
-        <a:solidFill>
-          <a:srgbClr val="FFFFFF"/>
-        </a:solidFill>
+        <a:solidFill>val="FFFFFF"/&gt;</a:solidFill>
         <a:effectLst/>
       </p:bgPr>
     </p:bg>
@@ -4896,9 +5164,7 @@
           <a:prstGeom prst="rect">
             <a:avLst/>
           </a:prstGeom>
-          <a:solidFill>
-            <a:srgbClr val="2C6E49"/>
-          </a:solidFill>
+          <a:solidFill>val="00875B"/&gt;</a:solidFill>
           <a:ln>
             <a:noFill/>
           </a:ln>
@@ -4949,9 +5215,7 @@
           <a:p>
             <a:pPr algn="l">
               <a:defRPr sz="2200" b="1">
-                <a:solidFill>
-                  <a:srgbClr val="1A5C33"/>
-                </a:solidFill>
+                <a:solidFill>val="006847"/&gt;</a:solidFill>
               </a:defRPr>
             </a:pPr>
             <a:r>
@@ -4987,9 +5251,7 @@
                 <a:spcPts val="600"/>
               </a:spcAft>
               <a:defRPr sz="1400">
-                <a:solidFill>
-                  <a:srgbClr val="222222"/>
-                </a:solidFill>
+                <a:solidFill>val="22344A"/&gt;</a:solidFill>
               </a:defRPr>
             </a:pPr>
             <a:r>
@@ -5014,9 +5276,7 @@
                 <a:spcPts val="600"/>
               </a:spcAft>
               <a:defRPr sz="1400">
-                <a:solidFill>
-                  <a:srgbClr val="222222"/>
-                </a:solidFill>
+                <a:solidFill>val="22344A"/&gt;</a:solidFill>
               </a:defRPr>
             </a:pPr>
             <a:r>
@@ -5041,9 +5301,7 @@
                 <a:spcPts val="600"/>
               </a:spcAft>
               <a:defRPr sz="1400">
-                <a:solidFill>
-                  <a:srgbClr val="222222"/>
-                </a:solidFill>
+                <a:solidFill>val="22344A"/&gt;</a:solidFill>
               </a:defRPr>
             </a:pPr>
             <a:r>
@@ -5064,13 +5322,52 @@
                 <a:spcPts val="600"/>
               </a:spcAft>
               <a:defRPr sz="1400">
+                <a:solidFill>val="22344A"/&gt;</a:solidFill>
+              </a:defRPr>
+            </a:pPr>
+            <a:r>
+              <a:t>• Mode d'évaluation :TD 40 % + Projet pédagogique TIC 30 % + Examen 30 %</a:t>
+            </a:r>
+          </a:p>
+        </p:txBody>
+      </p:sp>
+      <p:sp>
+        <p:nvSpPr>
+          <p:cNvPr id="990001" name="Pied de page FLE"/>
+          <p:cNvSpPr>
+            <a:spLocks noGrp="1"/>
+          </p:cNvSpPr>
+          <p:nvPr/>
+        </p:nvSpPr>
+        <p:spPr>
+          <a:xfrm>
+            <a:off x="-228600" y="6400800"/>
+            <a:ext cx="109728" cy="274320"/>
+          </a:xfrm>
+          <a:prstGeom prst="rect">
+            <a:avLst/>
+          </a:prstGeom>
+        </p:spPr>
+        <p:txBody>
+          <a:bodyPr anchor="b"/>
+          <a:lstStyle/>
+          <a:p>
+            <a:pPr algn="r">
+              <a:defRPr sz="900">
                 <a:solidFill>
-                  <a:srgbClr val="222222"/>
+                  <a:srgbClr val="9AA7B6"/>
                 </a:solidFill>
-              </a:defRPr>
-            </a:pPr>
-            <a:r>
-              <a:t>• Mode d'évaluation :TD 40 % + Projet pédagogique TIC 30 % + Examen 30 %</a:t>
+                <a:latin typeface="Poppins"/>
+              </a:defRPr>
+            </a:pPr>
+            <a:r>
+              <a:rPr lang="fr-FR" sz="900">
+                <a:solidFill>
+                  <a:srgbClr val="9AA7B6"/>
+                </a:solidFill>
+                <a:latin typeface="Poppins"/>
+              </a:rPr>
+              <a:t>Université de Mostaganem — Dr. Madani BELACEL</a:t>
             </a:r>
           </a:p>
         </p:txBody>
@@ -5088,9 +5385,7 @@
   <p:cSld>
     <p:bg>
       <p:bgPr>
-        <a:solidFill>
-          <a:srgbClr val="FFFFFF"/>
-        </a:solidFill>
+        <a:solidFill>val="FFFFFF"/&gt;</a:solidFill>
         <a:effectLst/>
       </p:bgPr>
     </p:bg>
@@ -5115,9 +5410,7 @@
           <a:prstGeom prst="rect">
             <a:avLst/>
           </a:prstGeom>
-          <a:solidFill>
-            <a:srgbClr val="2C6E49"/>
-          </a:solidFill>
+          <a:solidFill>val="00875B"/&gt;</a:solidFill>
           <a:ln>
             <a:noFill/>
           </a:ln>
@@ -5168,9 +5461,7 @@
           <a:p>
             <a:pPr algn="l">
               <a:defRPr sz="2200" b="1">
-                <a:solidFill>
-                  <a:srgbClr val="1A5C33"/>
-                </a:solidFill>
+                <a:solidFill>val="006847"/&gt;</a:solidFill>
               </a:defRPr>
             </a:pPr>
             <a:r>
@@ -5206,9 +5497,7 @@
                 <a:spcPts val="600"/>
               </a:spcAft>
               <a:defRPr sz="1400">
-                <a:solidFill>
-                  <a:srgbClr val="222222"/>
-                </a:solidFill>
+                <a:solidFill>val="22344A"/&gt;</a:solidFill>
               </a:defRPr>
             </a:pPr>
             <a:r>
@@ -5221,9 +5510,7 @@
                 <a:spcPts val="600"/>
               </a:spcAft>
               <a:defRPr sz="1400">
-                <a:solidFill>
-                  <a:srgbClr val="222222"/>
-                </a:solidFill>
+                <a:solidFill>val="22344A"/&gt;</a:solidFill>
               </a:defRPr>
             </a:pPr>
             <a:r>
@@ -5236,9 +5523,7 @@
                 <a:spcPts val="600"/>
               </a:spcAft>
               <a:defRPr sz="1400">
-                <a:solidFill>
-                  <a:srgbClr val="222222"/>
-                </a:solidFill>
+                <a:solidFill>val="22344A"/&gt;</a:solidFill>
               </a:defRPr>
             </a:pPr>
             <a:r>
@@ -5251,9 +5536,7 @@
                 <a:spcPts val="600"/>
               </a:spcAft>
               <a:defRPr sz="1400">
-                <a:solidFill>
-                  <a:srgbClr val="222222"/>
-                </a:solidFill>
+                <a:solidFill>val="22344A"/&gt;</a:solidFill>
               </a:defRPr>
             </a:pPr>
             <a:r>
@@ -5266,9 +5549,7 @@
                 <a:spcPts val="600"/>
               </a:spcAft>
               <a:defRPr sz="1400">
-                <a:solidFill>
-                  <a:srgbClr val="222222"/>
-                </a:solidFill>
+                <a:solidFill>val="22344A"/&gt;</a:solidFill>
               </a:defRPr>
             </a:pPr>
             <a:r>
@@ -5281,13 +5562,52 @@
                 <a:spcPts val="600"/>
               </a:spcAft>
               <a:defRPr sz="1400">
+                <a:solidFill>val="22344A"/&gt;</a:solidFill>
+              </a:defRPr>
+            </a:pPr>
+            <a:r>
+              <a:t>• Benchmark des 10 universités algériennes— étude comparative des pratiques d'enseignement des TIC, consultée pour aligner ce cours sur les standards nationaux (BENCHMARK_10_UNIVERSITES_ELEARNING.md).</a:t>
+            </a:r>
+          </a:p>
+        </p:txBody>
+      </p:sp>
+      <p:sp>
+        <p:nvSpPr>
+          <p:cNvPr id="990001" name="Pied de page FLE"/>
+          <p:cNvSpPr>
+            <a:spLocks noGrp="1"/>
+          </p:cNvSpPr>
+          <p:nvPr/>
+        </p:nvSpPr>
+        <p:spPr>
+          <a:xfrm>
+            <a:off x="-228600" y="6400800"/>
+            <a:ext cx="109728" cy="274320"/>
+          </a:xfrm>
+          <a:prstGeom prst="rect">
+            <a:avLst/>
+          </a:prstGeom>
+        </p:spPr>
+        <p:txBody>
+          <a:bodyPr anchor="b"/>
+          <a:lstStyle/>
+          <a:p>
+            <a:pPr algn="r">
+              <a:defRPr sz="900">
                 <a:solidFill>
-                  <a:srgbClr val="222222"/>
+                  <a:srgbClr val="9AA7B6"/>
                 </a:solidFill>
-              </a:defRPr>
-            </a:pPr>
-            <a:r>
-              <a:t>• Benchmark des 10 universités algériennes— étude comparative des pratiques d'enseignement des TIC, consultée pour aligner ce cours sur les standards nationaux (BENCHMARK_10_UNIVERSITES_ELEARNING.md).</a:t>
+                <a:latin typeface="Poppins"/>
+              </a:defRPr>
+            </a:pPr>
+            <a:r>
+              <a:rPr lang="fr-FR" sz="900">
+                <a:solidFill>
+                  <a:srgbClr val="9AA7B6"/>
+                </a:solidFill>
+                <a:latin typeface="Poppins"/>
+              </a:rPr>
+              <a:t>Université de Mostaganem — Dr. Madani BELACEL</a:t>
             </a:r>
           </a:p>
         </p:txBody>
@@ -5305,9 +5625,7 @@
   <p:cSld>
     <p:bg>
       <p:bgPr>
-        <a:solidFill>
-          <a:srgbClr val="FFFFFF"/>
-        </a:solidFill>
+        <a:solidFill>val="FFFFFF"/&gt;</a:solidFill>
         <a:effectLst/>
       </p:bgPr>
     </p:bg>
@@ -5332,9 +5650,7 @@
           <a:prstGeom prst="rect">
             <a:avLst/>
           </a:prstGeom>
-          <a:solidFill>
-            <a:srgbClr val="2C6E49"/>
-          </a:solidFill>
+          <a:solidFill>val="00875B"/&gt;</a:solidFill>
           <a:ln>
             <a:noFill/>
           </a:ln>
@@ -5385,9 +5701,7 @@
           <a:p>
             <a:pPr algn="l">
               <a:defRPr sz="2200" b="1">
-                <a:solidFill>
-                  <a:srgbClr val="1A5C33"/>
-                </a:solidFill>
+                <a:solidFill>val="006847"/&gt;</a:solidFill>
               </a:defRPr>
             </a:pPr>
             <a:r>
@@ -5423,9 +5737,7 @@
                 <a:spcPts val="600"/>
               </a:spcAft>
               <a:defRPr sz="1400">
-                <a:solidFill>
-                  <a:srgbClr val="222222"/>
-                </a:solidFill>
+                <a:solidFill>val="22344A"/&gt;</a:solidFill>
               </a:defRPr>
             </a:pPr>
             <a:r>
@@ -5438,9 +5750,7 @@
                 <a:spcPts val="600"/>
               </a:spcAft>
               <a:defRPr sz="1400">
-                <a:solidFill>
-                  <a:srgbClr val="222222"/>
-                </a:solidFill>
+                <a:solidFill>val="22344A"/&gt;</a:solidFill>
               </a:defRPr>
             </a:pPr>
             <a:r>
@@ -5453,9 +5763,7 @@
                 <a:spcPts val="600"/>
               </a:spcAft>
               <a:defRPr sz="1400">
-                <a:solidFill>
-                  <a:srgbClr val="222222"/>
-                </a:solidFill>
+                <a:solidFill>val="22344A"/&gt;</a:solidFill>
               </a:defRPr>
             </a:pPr>
             <a:r>
@@ -5468,9 +5776,7 @@
                 <a:spcPts val="600"/>
               </a:spcAft>
               <a:defRPr sz="1400">
-                <a:solidFill>
-                  <a:srgbClr val="222222"/>
-                </a:solidFill>
+                <a:solidFill>val="22344A"/&gt;</a:solidFill>
               </a:defRPr>
             </a:pPr>
             <a:r>
@@ -5483,9 +5789,7 @@
                 <a:spcPts val="600"/>
               </a:spcAft>
               <a:defRPr sz="1400">
-                <a:solidFill>
-                  <a:srgbClr val="222222"/>
-                </a:solidFill>
+                <a:solidFill>val="22344A"/&gt;</a:solidFill>
               </a:defRPr>
             </a:pPr>
             <a:r>
@@ -5498,9 +5802,7 @@
                 <a:spcPts val="600"/>
               </a:spcAft>
               <a:defRPr sz="1400">
-                <a:solidFill>
-                  <a:srgbClr val="222222"/>
-                </a:solidFill>
+                <a:solidFill>val="22344A"/&gt;</a:solidFill>
               </a:defRPr>
             </a:pPr>
             <a:r>
@@ -5513,13 +5815,52 @@
                 <a:spcPts val="600"/>
               </a:spcAft>
               <a:defRPr sz="1400">
+                <a:solidFill>val="22344A"/&gt;</a:solidFill>
+              </a:defRPr>
+            </a:pPr>
+            <a:r>
+              <a:t>• Éthique et sécurité en contexte pédagogique(5 min)</a:t>
+            </a:r>
+          </a:p>
+        </p:txBody>
+      </p:sp>
+      <p:sp>
+        <p:nvSpPr>
+          <p:cNvPr id="990001" name="Pied de page FLE"/>
+          <p:cNvSpPr>
+            <a:spLocks noGrp="1"/>
+          </p:cNvSpPr>
+          <p:nvPr/>
+        </p:nvSpPr>
+        <p:spPr>
+          <a:xfrm>
+            <a:off x="-228600" y="6400800"/>
+            <a:ext cx="109728" cy="274320"/>
+          </a:xfrm>
+          <a:prstGeom prst="rect">
+            <a:avLst/>
+          </a:prstGeom>
+        </p:spPr>
+        <p:txBody>
+          <a:bodyPr anchor="b"/>
+          <a:lstStyle/>
+          <a:p>
+            <a:pPr algn="r">
+              <a:defRPr sz="900">
                 <a:solidFill>
-                  <a:srgbClr val="222222"/>
+                  <a:srgbClr val="9AA7B6"/>
                 </a:solidFill>
-              </a:defRPr>
-            </a:pPr>
-            <a:r>
-              <a:t>• Éthique et sécurité en contexte pédagogique(5 min)</a:t>
+                <a:latin typeface="Poppins"/>
+              </a:defRPr>
+            </a:pPr>
+            <a:r>
+              <a:rPr lang="fr-FR" sz="900">
+                <a:solidFill>
+                  <a:srgbClr val="9AA7B6"/>
+                </a:solidFill>
+                <a:latin typeface="Poppins"/>
+              </a:rPr>
+              <a:t>Université de Mostaganem — Dr. Madani BELACEL</a:t>
             </a:r>
           </a:p>
         </p:txBody>
@@ -5537,9 +5878,7 @@
   <p:cSld>
     <p:bg>
       <p:bgPr>
-        <a:solidFill>
-          <a:srgbClr val="FFFFFF"/>
-        </a:solidFill>
+        <a:solidFill>val="FFFFFF"/&gt;</a:solidFill>
         <a:effectLst/>
       </p:bgPr>
     </p:bg>
@@ -5564,9 +5903,7 @@
           <a:prstGeom prst="rect">
             <a:avLst/>
           </a:prstGeom>
-          <a:solidFill>
-            <a:srgbClr val="2C6E49"/>
-          </a:solidFill>
+          <a:solidFill>val="00875B"/&gt;</a:solidFill>
           <a:ln>
             <a:noFill/>
           </a:ln>
@@ -5617,9 +5954,7 @@
           <a:p>
             <a:pPr algn="l">
               <a:defRPr sz="2200" b="1">
-                <a:solidFill>
-                  <a:srgbClr val="1A5C33"/>
-                </a:solidFill>
+                <a:solidFill>val="006847"/&gt;</a:solidFill>
               </a:defRPr>
             </a:pPr>
             <a:r>
@@ -5655,9 +5990,7 @@
                 <a:spcPts val="600"/>
               </a:spcAft>
               <a:defRPr sz="1400">
-                <a:solidFill>
-                  <a:srgbClr val="222222"/>
-                </a:solidFill>
+                <a:solidFill>val="22344A"/&gt;</a:solidFill>
               </a:defRPr>
             </a:pPr>
             <a:r>
@@ -5670,9 +6003,7 @@
                 <a:spcPts val="600"/>
               </a:spcAft>
               <a:defRPr sz="1400">
-                <a:solidFill>
-                  <a:srgbClr val="222222"/>
-                </a:solidFill>
+                <a:solidFill>val="22344A"/&gt;</a:solidFill>
               </a:defRPr>
             </a:pPr>
             <a:r>
@@ -5685,13 +6016,52 @@
                 <a:spcPts val="600"/>
               </a:spcAft>
               <a:defRPr sz="1400">
+                <a:solidFill>val="22344A"/&gt;</a:solidFill>
+              </a:defRPr>
+            </a:pPr>
+            <a:r>
+              <a:t>• Pour le futur enseignant de langues, les TIC ne sont pas seulement des outils personnels mais des instruments pédagogiques à intégrer dans sa pratique quotidienne. La maîtrise de ces technologies est devenue une compétence professionnelle fondamentale, au même titre que la didactique ou la linguistique.</a:t>
+            </a:r>
+          </a:p>
+        </p:txBody>
+      </p:sp>
+      <p:sp>
+        <p:nvSpPr>
+          <p:cNvPr id="990001" name="Pied de page FLE"/>
+          <p:cNvSpPr>
+            <a:spLocks noGrp="1"/>
+          </p:cNvSpPr>
+          <p:nvPr/>
+        </p:nvSpPr>
+        <p:spPr>
+          <a:xfrm>
+            <a:off x="-228600" y="6400800"/>
+            <a:ext cx="109728" cy="274320"/>
+          </a:xfrm>
+          <a:prstGeom prst="rect">
+            <a:avLst/>
+          </a:prstGeom>
+        </p:spPr>
+        <p:txBody>
+          <a:bodyPr anchor="b"/>
+          <a:lstStyle/>
+          <a:p>
+            <a:pPr algn="r">
+              <a:defRPr sz="900">
                 <a:solidFill>
-                  <a:srgbClr val="222222"/>
+                  <a:srgbClr val="9AA7B6"/>
                 </a:solidFill>
-              </a:defRPr>
-            </a:pPr>
-            <a:r>
-              <a:t>• Pour le futur enseignant de langues, les TIC ne sont pas seulement des outils personnels mais des instruments pédagogiques à intégrer dans sa pratique quotidienne. La maîtrise de ces technologies est devenue une compétence professionnelle fondamentale, au même titre que la didactique ou la linguistique.</a:t>
+                <a:latin typeface="Poppins"/>
+              </a:defRPr>
+            </a:pPr>
+            <a:r>
+              <a:rPr lang="fr-FR" sz="900">
+                <a:solidFill>
+                  <a:srgbClr val="9AA7B6"/>
+                </a:solidFill>
+                <a:latin typeface="Poppins"/>
+              </a:rPr>
+              <a:t>Université de Mostaganem — Dr. Madani BELACEL</a:t>
             </a:r>
           </a:p>
         </p:txBody>
@@ -5709,9 +6079,7 @@
   <p:cSld>
     <p:bg>
       <p:bgPr>
-        <a:solidFill>
-          <a:srgbClr val="FFFFFF"/>
-        </a:solidFill>
+        <a:solidFill>val="FFFFFF"/&gt;</a:solidFill>
         <a:effectLst/>
       </p:bgPr>
     </p:bg>
@@ -5736,9 +6104,7 @@
           <a:prstGeom prst="rect">
             <a:avLst/>
           </a:prstGeom>
-          <a:solidFill>
-            <a:srgbClr val="2C6E49"/>
-          </a:solidFill>
+          <a:solidFill>val="00875B"/&gt;</a:solidFill>
           <a:ln>
             <a:noFill/>
           </a:ln>
@@ -5789,9 +6155,7 @@
           <a:p>
             <a:pPr algn="l">
               <a:defRPr sz="2200" b="1">
-                <a:solidFill>
-                  <a:srgbClr val="1A5C33"/>
-                </a:solidFill>
+                <a:solidFill>val="006847"/&gt;</a:solidFill>
               </a:defRPr>
             </a:pPr>
             <a:r>
@@ -5827,9 +6191,7 @@
                 <a:spcPts val="600"/>
               </a:spcAft>
               <a:defRPr sz="1400">
-                <a:solidFill>
-                  <a:srgbClr val="222222"/>
-                </a:solidFill>
+                <a:solidFill>val="22344A"/&gt;</a:solidFill>
               </a:defRPr>
             </a:pPr>
             <a:r>
@@ -5842,13 +6204,52 @@
                 <a:spcPts val="600"/>
               </a:spcAft>
               <a:defRPr sz="1400">
+                <a:solidFill>val="22344A"/&gt;</a:solidFill>
+              </a:defRPr>
+            </a:pPr>
+            <a:r>
+              <a:t>• L'enseignant de langues doit maîtriser ces trois dimensions pour concevoir des séquences pédagogiques efficaces. La dimension communication est particulièrement importante en didactique des langues car elle permet l'interaction authentique entre apprenants et avec des locuteurs natifs.</a:t>
+            </a:r>
+          </a:p>
+        </p:txBody>
+      </p:sp>
+      <p:sp>
+        <p:nvSpPr>
+          <p:cNvPr id="990001" name="Pied de page FLE"/>
+          <p:cNvSpPr>
+            <a:spLocks noGrp="1"/>
+          </p:cNvSpPr>
+          <p:nvPr/>
+        </p:nvSpPr>
+        <p:spPr>
+          <a:xfrm>
+            <a:off x="-228600" y="6400800"/>
+            <a:ext cx="109728" cy="274320"/>
+          </a:xfrm>
+          <a:prstGeom prst="rect">
+            <a:avLst/>
+          </a:prstGeom>
+        </p:spPr>
+        <p:txBody>
+          <a:bodyPr anchor="b"/>
+          <a:lstStyle/>
+          <a:p>
+            <a:pPr algn="r">
+              <a:defRPr sz="900">
                 <a:solidFill>
-                  <a:srgbClr val="222222"/>
+                  <a:srgbClr val="9AA7B6"/>
                 </a:solidFill>
-              </a:defRPr>
-            </a:pPr>
-            <a:r>
-              <a:t>• L'enseignant de langues doit maîtriser ces trois dimensions pour concevoir des séquences pédagogiques efficaces. La dimension communication est particulièrement importante en didactique des langues car elle permet l'interaction authentique entre apprenants et avec des locuteurs natifs.</a:t>
+                <a:latin typeface="Poppins"/>
+              </a:defRPr>
+            </a:pPr>
+            <a:r>
+              <a:rPr lang="fr-FR" sz="900">
+                <a:solidFill>
+                  <a:srgbClr val="9AA7B6"/>
+                </a:solidFill>
+                <a:latin typeface="Poppins"/>
+              </a:rPr>
+              <a:t>Université de Mostaganem — Dr. Madani BELACEL</a:t>
             </a:r>
           </a:p>
         </p:txBody>
@@ -5904,7 +6305,7 @@
     </a:clrScheme>
     <a:fontScheme name="Office">
       <a:majorFont>
-        <a:latin typeface="Calibri"/>
+        <a:latin typeface="Poppins"/>
         <a:ea typeface=""/>
         <a:cs typeface=""/>
         <a:font script="Jpan" typeface="ＭＳ Ｐゴシック"/>
@@ -5939,7 +6340,7 @@
         <a:font script="Geor" typeface="Sylfaen"/>
       </a:majorFont>
       <a:minorFont>
-        <a:latin typeface="Calibri"/>
+        <a:latin typeface="Poppins"/>
         <a:ea typeface=""/>
         <a:cs typeface=""/>
         <a:font script="Jpan" typeface="ＭＳ Ｐゴシック"/>
